--- a/MMN_update_2026_skeleton_ja.pptx
+++ b/MMN_update_2026_skeleton_ja.pptx
@@ -30,6 +30,15 @@
     <p:sldId id="278" r:id="rId29"/>
     <p:sldId id="279" r:id="rId30"/>
     <p:sldId id="280" r:id="rId31"/>
+    <p:sldId id="281" r:id="rId32"/>
+    <p:sldId id="282" r:id="rId33"/>
+    <p:sldId id="283" r:id="rId34"/>
+    <p:sldId id="284" r:id="rId35"/>
+    <p:sldId id="285" r:id="rId36"/>
+    <p:sldId id="286" r:id="rId37"/>
+    <p:sldId id="287" r:id="rId38"/>
+    <p:sldId id="288" r:id="rId39"/>
+    <p:sldId id="289" r:id="rId40"/>
   </p:sldIdLst>
   <p:sldSz cx="12191695" cy="6858000" type="screen4x3"/>
   <p:notesSz cx="6858000" cy="9144000"/>
@@ -3533,7 +3542,7 @@
                 <a:latin typeface="Yu Gothic"/>
                 <a:ea typeface="Yu Gothic"/>
               </a:rPr>
-              <a:t>2｜診断</a:t>
+              <a:t>1｜病態（新）</a:t>
             </a:r>
           </a:p>
         </p:txBody>
@@ -3576,7 +3585,7 @@
                 <a:latin typeface="Yu Gothic"/>
                 <a:ea typeface="Yu Gothic"/>
               </a:rPr>
-              <a:t>診断プロセスと現行 EFNS/PNS 2010 基準</a:t>
+              <a:t>病態④ — 血液神経関門(BNB)と軸索膜（本邦グループの知見）</a:t>
             </a:r>
           </a:p>
         </p:txBody>
@@ -3629,7 +3638,7 @@
                 <a:latin typeface="Yu Gothic"/>
                 <a:ea typeface="Yu Gothic"/>
               </a:rPr>
-              <a:t>臨床：2神経以上・1か月以上の非対称性運動麻痺、客観的感覚障害なし</a:t>
+              <a:t>患者IgGによる血液神経関門(BNB)破綻：CIDPと分子機序が異なる</a:t>
             </a:r>
           </a:p>
           <a:p>
@@ -3659,7 +3668,37 @@
                 <a:latin typeface="Yu Gothic"/>
                 <a:ea typeface="Yu Gothic"/>
               </a:rPr>
-              <a:t>支持：上肢優位・腱反射低下・脳神経正常・筋痙攣/線維束収縮・免疫療法反応</a:t>
+              <a:t>MMNでは内皮のTNF-α・VCAM-1上昇が主体（典型CIDPはCCL20/ICAM-1、多巣性CIDPはGM-CSF等）</a:t>
+            </a:r>
+          </a:p>
+          <a:p>
+            <a:pPr>
+              <a:spcBef>
+                <a:spcPts val="800"/>
+              </a:spcBef>
+              <a:spcAft>
+                <a:spcPts val="700"/>
+              </a:spcAft>
+            </a:pPr>
+            <a:r>
+              <a:rPr sz="1800" b="1">
+                <a:solidFill>
+                  <a:srgbClr val="2E6DA4"/>
+                </a:solidFill>
+                <a:latin typeface="Yu Gothic"/>
+                <a:ea typeface="Yu Gothic"/>
+              </a:rPr>
+              <a:t>● </a:t>
+            </a:r>
+            <a:r>
+              <a:rPr sz="1800" b="1">
+                <a:solidFill>
+                  <a:srgbClr val="1F3A5F"/>
+                </a:solidFill>
+                <a:latin typeface="Yu Gothic"/>
+                <a:ea typeface="Yu Gothic"/>
+              </a:rPr>
+              <a:t>軸索膜の不安定性：fast K⁺電流低下・superexcitability</a:t>
             </a:r>
           </a:p>
           <a:p>
@@ -3689,13 +3728,13 @@
                 <a:latin typeface="Yu Gothic"/>
                 <a:ea typeface="Yu Gothic"/>
               </a:rPr>
-              <a:t>電気診断：絞扼部以外での definite/probable CB</a:t>
+              <a:t>paranodeミエリンの緩みを示唆、不随意指運動例でより顕著</a:t>
             </a:r>
           </a:p>
           <a:p>
             <a:pPr lvl="1">
               <a:spcBef>
-                <a:spcPts val="200"/>
+                <a:spcPts val="600"/>
               </a:spcBef>
               <a:spcAft>
                 <a:spcPts val="700"/>
@@ -3709,47 +3748,17 @@
                 <a:latin typeface="Yu Gothic"/>
                 <a:ea typeface="Yu Gothic"/>
               </a:rPr>
-              <a:t>– </a:t>
-            </a:r>
-            <a:r>
-              <a:rPr sz="1500" b="0">
-                <a:solidFill>
-                  <a:srgbClr val="555555"/>
-                </a:solidFill>
-                <a:latin typeface="Yu Gothic"/>
-                <a:ea typeface="Yu Gothic"/>
-              </a:rPr>
-              <a:t>補助：抗GM1 IgM、末梢神経肥厚（エコー/MRI）、軽度CSF蛋白上昇</a:t>
-            </a:r>
-          </a:p>
-          <a:p>
-            <a:pPr>
-              <a:spcBef>
-                <a:spcPts val="800"/>
-              </a:spcBef>
-              <a:spcAft>
-                <a:spcPts val="700"/>
-              </a:spcAft>
-            </a:pPr>
-            <a:r>
-              <a:rPr sz="1800" b="1">
+              <a:t>▶ </a:t>
+            </a:r>
+            <a:r>
+              <a:rPr sz="1500" b="1">
                 <a:solidFill>
                   <a:srgbClr val="2E6DA4"/>
                 </a:solidFill>
                 <a:latin typeface="Yu Gothic"/>
                 <a:ea typeface="Yu Gothic"/>
               </a:rPr>
-              <a:t>● </a:t>
-            </a:r>
-            <a:r>
-              <a:rPr sz="1800" b="0">
-                <a:solidFill>
-                  <a:srgbClr val="222222"/>
-                </a:solidFill>
-                <a:latin typeface="Yu Gothic"/>
-                <a:ea typeface="Yu Gothic"/>
-              </a:rPr>
-              <a:t>疑い例では IVIg 診断的治療で反応性を確認することもしばしば</a:t>
+              <a:t>→ MMNは「CB＋軸索」だけでなく、より広汎な有髄線維障害のスペクトラム</a:t>
             </a:r>
           </a:p>
         </p:txBody>
@@ -3792,7 +3801,7 @@
                 <a:latin typeface="Yu Gothic"/>
                 <a:ea typeface="Yu Gothic"/>
               </a:rPr>
-              <a:t>出典：Joint Task Force EFNS/PNS. J Peripher Nerv Syst 2010;15:295-301（表を流用）</a:t>
+              <a:t>出典：Shimizu F, et al. Int J Mol Sci 2026;27(2):1088（本邦）／Krarup C, et al. Clin Neurophysiol 2025;173:229-238</a:t>
             </a:r>
           </a:p>
         </p:txBody>
@@ -3835,7 +3844,7 @@
                 <a:latin typeface="Yu Gothic"/>
                 <a:ea typeface="Yu Gothic"/>
               </a:rPr>
-              <a:t>2</a:t>
+              <a:t>1</a:t>
             </a:r>
           </a:p>
         </p:txBody>
@@ -3867,7 +3876,7 @@
         <p:spPr>
           <a:xfrm>
             <a:off x="0" y="0"/>
-            <a:ext cx="12191695" cy="1051560"/>
+            <a:ext cx="12191695" cy="6858000"/>
           </a:xfrm>
           <a:prstGeom prst="rect">
             <a:avLst/>
@@ -3910,8 +3919,8 @@
         </p:nvSpPr>
         <p:spPr>
           <a:xfrm>
-            <a:off x="0" y="1051560"/>
-            <a:ext cx="12191695" cy="50800"/>
+            <a:off x="822960" y="2743200"/>
+            <a:ext cx="1463040" cy="76200"/>
           </a:xfrm>
           <a:prstGeom prst="rect">
             <a:avLst/>
@@ -3954,8 +3963,8 @@
         </p:nvSpPr>
         <p:spPr>
           <a:xfrm>
-            <a:off x="457200" y="109728"/>
-            <a:ext cx="10058400" cy="274320"/>
+            <a:off x="822960" y="1828800"/>
+            <a:ext cx="2743200" cy="914400"/>
           </a:xfrm>
           <a:prstGeom prst="rect">
             <a:avLst/>
@@ -3977,14 +3986,14 @@
               </a:spcAft>
             </a:pPr>
             <a:r>
-              <a:rPr sz="1200" b="1">
-                <a:solidFill>
-                  <a:srgbClr val="BBD3EA"/>
-                </a:solidFill>
-                <a:latin typeface="Yu Gothic"/>
-                <a:ea typeface="Yu Gothic"/>
-              </a:rPr>
-              <a:t>2｜診断</a:t>
+              <a:rPr sz="8000" b="1">
+                <a:solidFill>
+                  <a:srgbClr val="3E6A99"/>
+                </a:solidFill>
+                <a:latin typeface="Yu Gothic"/>
+                <a:ea typeface="Yu Gothic"/>
+              </a:rPr>
+              <a:t>2</a:t>
             </a:r>
           </a:p>
         </p:txBody>
@@ -3997,224 +4006,8 @@
         </p:nvSpPr>
         <p:spPr>
           <a:xfrm>
-            <a:off x="457200" y="329184"/>
-            <a:ext cx="11247120" cy="685800"/>
-          </a:xfrm>
-          <a:prstGeom prst="rect">
-            <a:avLst/>
-          </a:prstGeom>
-          <a:noFill/>
-        </p:spPr>
-        <p:txBody>
-          <a:bodyPr wrap="square" anchor="ctr" lIns="50800" rIns="50800" tIns="25400" bIns="25400">
-            <a:spAutoFit/>
-          </a:bodyPr>
-          <a:lstStyle/>
-          <a:p>
-            <a:pPr algn="l">
-              <a:spcBef>
-                <a:spcPts val="0"/>
-              </a:spcBef>
-              <a:spcAft>
-                <a:spcPts val="400"/>
-              </a:spcAft>
-            </a:pPr>
-            <a:r>
-              <a:rPr sz="2600" b="1">
-                <a:solidFill>
-                  <a:srgbClr val="FFFFFF"/>
-                </a:solidFill>
-                <a:latin typeface="Yu Gothic"/>
-                <a:ea typeface="Yu Gothic"/>
-              </a:rPr>
-              <a:t>診断アップデート① — 基準の感度比較（Doneddu 2024）</a:t>
-            </a:r>
-          </a:p>
-        </p:txBody>
-      </p:sp>
-      <p:sp>
-        <p:nvSpPr>
-          <p:cNvPr id="6" name="TextBox 5"/>
-          <p:cNvSpPr txBox="1"/>
-          <p:nvPr/>
-        </p:nvSpPr>
-        <p:spPr>
-          <a:xfrm>
-            <a:off x="548640" y="1325880"/>
-            <a:ext cx="11064240" cy="5029200"/>
-          </a:xfrm>
-          <a:prstGeom prst="rect">
-            <a:avLst/>
-          </a:prstGeom>
-          <a:noFill/>
-        </p:spPr>
-        <p:txBody>
-          <a:bodyPr wrap="square">
-            <a:spAutoFit/>
-          </a:bodyPr>
-          <a:lstStyle/>
-          <a:p>
-            <a:pPr>
-              <a:spcBef>
-                <a:spcPts val="200"/>
-              </a:spcBef>
-              <a:spcAft>
-                <a:spcPts val="700"/>
-              </a:spcAft>
-            </a:pPr>
-            <a:r>
-              <a:rPr sz="1800" b="1">
-                <a:solidFill>
-                  <a:srgbClr val="2E6DA4"/>
-                </a:solidFill>
-                <a:latin typeface="Yu Gothic"/>
-                <a:ea typeface="Yu Gothic"/>
-              </a:rPr>
-              <a:t>● </a:t>
-            </a:r>
-            <a:r>
-              <a:rPr sz="1800" b="1">
-                <a:solidFill>
-                  <a:srgbClr val="222222"/>
-                </a:solidFill>
-                <a:latin typeface="Yu Gothic"/>
-                <a:ea typeface="Yu Gothic"/>
-              </a:rPr>
-              <a:t>EFNS/PNS 2010 vs AANEM：MMN 53例 vs 対照280例</a:t>
-            </a:r>
-          </a:p>
-          <a:p>
-            <a:pPr lvl="1">
-              <a:spcBef>
-                <a:spcPts val="200"/>
-              </a:spcBef>
-              <a:spcAft>
-                <a:spcPts val="700"/>
-              </a:spcAft>
-            </a:pPr>
-            <a:r>
-              <a:rPr sz="1500" b="1">
-                <a:solidFill>
-                  <a:srgbClr val="555555"/>
-                </a:solidFill>
-                <a:latin typeface="Yu Gothic"/>
-                <a:ea typeface="Yu Gothic"/>
-              </a:rPr>
-              <a:t>– </a:t>
-            </a:r>
-            <a:r>
-              <a:rPr sz="1500" b="0">
-                <a:solidFill>
-                  <a:srgbClr val="555555"/>
-                </a:solidFill>
-                <a:latin typeface="Yu Gothic"/>
-                <a:ea typeface="Yu Gothic"/>
-              </a:rPr>
-              <a:t>感度：EFNS/PNS 47%（definite）/57%（prob+def）＞ AANEM 28%/53%</a:t>
-            </a:r>
-          </a:p>
-          <a:p>
-            <a:pPr lvl="1">
-              <a:spcBef>
-                <a:spcPts val="200"/>
-              </a:spcBef>
-              <a:spcAft>
-                <a:spcPts val="700"/>
-              </a:spcAft>
-            </a:pPr>
-            <a:r>
-              <a:rPr sz="1500" b="1">
-                <a:solidFill>
-                  <a:srgbClr val="555555"/>
-                </a:solidFill>
-                <a:latin typeface="Yu Gothic"/>
-                <a:ea typeface="Yu Gothic"/>
-              </a:rPr>
-              <a:t>– </a:t>
-            </a:r>
-            <a:r>
-              <a:rPr sz="1500" b="0">
-                <a:solidFill>
-                  <a:srgbClr val="555555"/>
-                </a:solidFill>
-                <a:latin typeface="Yu Gothic"/>
-                <a:ea typeface="Yu Gothic"/>
-              </a:rPr>
-              <a:t>支持基準を加えると EFNS/PNS の prob+def 感度は 64% に</a:t>
-            </a:r>
-          </a:p>
-          <a:p>
-            <a:pPr lvl="1">
-              <a:spcBef>
-                <a:spcPts val="200"/>
-              </a:spcBef>
-              <a:spcAft>
-                <a:spcPts val="700"/>
-              </a:spcAft>
-            </a:pPr>
-            <a:r>
-              <a:rPr sz="1500" b="1">
-                <a:solidFill>
-                  <a:srgbClr val="555555"/>
-                </a:solidFill>
-                <a:latin typeface="Yu Gothic"/>
-                <a:ea typeface="Yu Gothic"/>
-              </a:rPr>
-              <a:t>– </a:t>
-            </a:r>
-            <a:r>
-              <a:rPr sz="1500" b="0">
-                <a:solidFill>
-                  <a:srgbClr val="555555"/>
-                </a:solidFill>
-                <a:latin typeface="Yu Gothic"/>
-                <a:ea typeface="Yu Gothic"/>
-              </a:rPr>
-              <a:t>特異度：AANEM 100%、EFNS/PNS 97〜98.5%（ともに高い）</a:t>
-            </a:r>
-          </a:p>
-          <a:p>
-            <a:pPr>
-              <a:spcBef>
-                <a:spcPts val="800"/>
-              </a:spcBef>
-              <a:spcAft>
-                <a:spcPts val="700"/>
-              </a:spcAft>
-            </a:pPr>
-            <a:r>
-              <a:rPr sz="1800" b="1">
-                <a:solidFill>
-                  <a:srgbClr val="2E6DA4"/>
-                </a:solidFill>
-                <a:latin typeface="Yu Gothic"/>
-                <a:ea typeface="Yu Gothic"/>
-              </a:rPr>
-              <a:t>▶ </a:t>
-            </a:r>
-            <a:r>
-              <a:rPr sz="1800" b="1">
-                <a:solidFill>
-                  <a:srgbClr val="2E6DA4"/>
-                </a:solidFill>
-                <a:latin typeface="Yu Gothic"/>
-                <a:ea typeface="Yu Gothic"/>
-              </a:rPr>
-              <a:t>→ EFNS/PNSは高感度・わずかに低特異度。NCSの拡張（多神経検索）を推奨</a:t>
-            </a:r>
-          </a:p>
-        </p:txBody>
-      </p:sp>
-      <p:sp>
-        <p:nvSpPr>
-          <p:cNvPr id="7" name="TextBox 6"/>
-          <p:cNvSpPr txBox="1"/>
-          <p:nvPr/>
-        </p:nvSpPr>
-        <p:spPr>
-          <a:xfrm>
-            <a:off x="548640" y="6355080"/>
-            <a:ext cx="11064240" cy="365760"/>
+            <a:off x="822960" y="2926080"/>
+            <a:ext cx="10515600" cy="1188720"/>
           </a:xfrm>
           <a:prstGeom prst="rect">
             <a:avLst/>
@@ -4236,28 +4029,28 @@
               </a:spcAft>
             </a:pPr>
             <a:r>
-              <a:rPr sz="1050" b="0">
-                <a:solidFill>
-                  <a:srgbClr val="555555"/>
-                </a:solidFill>
-                <a:latin typeface="Yu Gothic"/>
-                <a:ea typeface="Yu Gothic"/>
-              </a:rPr>
-              <a:t>出典：Doneddu PE, et al. Eur J Neurol 2024;31:e16444／同 Italian database 2024;31:e16248</a:t>
-            </a:r>
-          </a:p>
-        </p:txBody>
-      </p:sp>
-      <p:sp>
-        <p:nvSpPr>
-          <p:cNvPr id="8" name="TextBox 7"/>
+              <a:rPr sz="3600" b="1">
+                <a:solidFill>
+                  <a:srgbClr val="FFFFFF"/>
+                </a:solidFill>
+                <a:latin typeface="Yu Gothic"/>
+                <a:ea typeface="Yu Gothic"/>
+              </a:rPr>
+              <a:t>診断のアップデート</a:t>
+            </a:r>
+          </a:p>
+        </p:txBody>
+      </p:sp>
+      <p:sp>
+        <p:nvSpPr>
+          <p:cNvPr id="6" name="TextBox 5"/>
           <p:cNvSpPr txBox="1"/>
           <p:nvPr/>
         </p:nvSpPr>
         <p:spPr>
           <a:xfrm>
-            <a:off x="11430000" y="109728"/>
-            <a:ext cx="640080" cy="274320"/>
+            <a:off x="868680" y="4023360"/>
+            <a:ext cx="10515600" cy="914400"/>
           </a:xfrm>
           <a:prstGeom prst="rect">
             <a:avLst/>
@@ -4270,7 +4063,7 @@
           </a:bodyPr>
           <a:lstStyle/>
           <a:p>
-            <a:pPr algn="r">
+            <a:pPr algn="l">
               <a:spcBef>
                 <a:spcPts val="0"/>
               </a:spcBef>
@@ -4279,14 +4072,14 @@
               </a:spcAft>
             </a:pPr>
             <a:r>
-              <a:rPr sz="1200" b="1">
+              <a:rPr sz="1800" b="0">
                 <a:solidFill>
                   <a:srgbClr val="BBD3EA"/>
                 </a:solidFill>
                 <a:latin typeface="Yu Gothic"/>
                 <a:ea typeface="Yu Gothic"/>
               </a:rPr>
-              <a:t>2</a:t>
+              <a:t>診断基準の再検討と EAN/PNS 新ガイドライン</a:t>
             </a:r>
           </a:p>
         </p:txBody>
@@ -4478,7 +4271,7 @@
                 <a:latin typeface="Yu Gothic"/>
                 <a:ea typeface="Yu Gothic"/>
               </a:rPr>
-              <a:t>診断アップデート② — CBを超えた「拡張基準」（Doneddu 2025）</a:t>
+              <a:t>診断プロセスと現行 EFNS/PNS 2010 基準</a:t>
             </a:r>
           </a:p>
         </p:txBody>
@@ -4531,7 +4324,7 @@
                 <a:latin typeface="Yu Gothic"/>
                 <a:ea typeface="Yu Gothic"/>
               </a:rPr>
-              <a:t>MMN 70例 vs 対照359例</a:t>
+              <a:t>臨床：2神経以上・1か月以上の非対称性運動麻痺、客観的感覚障害なし</a:t>
             </a:r>
           </a:p>
           <a:p>
@@ -4561,7 +4354,67 @@
                 <a:latin typeface="Yu Gothic"/>
                 <a:ea typeface="Yu Gothic"/>
               </a:rPr>
-              <a:t>CBのない区間でも71%にCB以外の伝導異常（時間的分散47%・遠位CMAP持続延長31%・CV低下26% 等）</a:t>
+              <a:t>支持：上肢優位・腱反射低下・脳神経正常・筋痙攣/線維束収縮・免疫療法反応</a:t>
+            </a:r>
+          </a:p>
+          <a:p>
+            <a:pPr lvl="1">
+              <a:spcBef>
+                <a:spcPts val="200"/>
+              </a:spcBef>
+              <a:spcAft>
+                <a:spcPts val="700"/>
+              </a:spcAft>
+            </a:pPr>
+            <a:r>
+              <a:rPr sz="1500" b="1">
+                <a:solidFill>
+                  <a:srgbClr val="555555"/>
+                </a:solidFill>
+                <a:latin typeface="Yu Gothic"/>
+                <a:ea typeface="Yu Gothic"/>
+              </a:rPr>
+              <a:t>– </a:t>
+            </a:r>
+            <a:r>
+              <a:rPr sz="1500" b="0">
+                <a:solidFill>
+                  <a:srgbClr val="555555"/>
+                </a:solidFill>
+                <a:latin typeface="Yu Gothic"/>
+                <a:ea typeface="Yu Gothic"/>
+              </a:rPr>
+              <a:t>電気診断：絞扼部以外での definite/probable CB</a:t>
+            </a:r>
+          </a:p>
+          <a:p>
+            <a:pPr lvl="1">
+              <a:spcBef>
+                <a:spcPts val="200"/>
+              </a:spcBef>
+              <a:spcAft>
+                <a:spcPts val="700"/>
+              </a:spcAft>
+            </a:pPr>
+            <a:r>
+              <a:rPr sz="1500" b="1">
+                <a:solidFill>
+                  <a:srgbClr val="555555"/>
+                </a:solidFill>
+                <a:latin typeface="Yu Gothic"/>
+                <a:ea typeface="Yu Gothic"/>
+              </a:rPr>
+              <a:t>– </a:t>
+            </a:r>
+            <a:r>
+              <a:rPr sz="1500" b="0">
+                <a:solidFill>
+                  <a:srgbClr val="555555"/>
+                </a:solidFill>
+                <a:latin typeface="Yu Gothic"/>
+                <a:ea typeface="Yu Gothic"/>
+              </a:rPr>
+              <a:t>補助：抗GM1 IgM、末梢神経肥厚（エコー/MRI）、軽度CSF蛋白上昇</a:t>
             </a:r>
           </a:p>
           <a:p>
@@ -4584,74 +4437,14 @@
               <a:t>● </a:t>
             </a:r>
             <a:r>
-              <a:rPr sz="1800" b="1">
-                <a:solidFill>
-                  <a:srgbClr val="1F3A5F"/>
-                </a:solidFill>
-                <a:latin typeface="Yu Gothic"/>
-                <a:ea typeface="Yu Gothic"/>
-              </a:rPr>
-              <a:t>これらを取り込むと prob/def 感度が +26%（p&lt;0.001）、特異度低下は最小</a:t>
-            </a:r>
-          </a:p>
-          <a:p>
-            <a:pPr lvl="1">
-              <a:spcBef>
-                <a:spcPts val="200"/>
-              </a:spcBef>
-              <a:spcAft>
-                <a:spcPts val="700"/>
-              </a:spcAft>
-            </a:pPr>
-            <a:r>
-              <a:rPr sz="1500" b="1">
-                <a:solidFill>
-                  <a:srgbClr val="2E7D32"/>
-                </a:solidFill>
-                <a:latin typeface="Yu Gothic"/>
-                <a:ea typeface="Yu Gothic"/>
-              </a:rPr>
-              <a:t>▶ </a:t>
-            </a:r>
-            <a:r>
-              <a:rPr sz="1500" b="1">
-                <a:solidFill>
-                  <a:srgbClr val="2E7D32"/>
-                </a:solidFill>
-                <a:latin typeface="Yu Gothic"/>
-                <a:ea typeface="Yu Gothic"/>
-              </a:rPr>
-              <a:t>「CBが唯一の脱髄指標ではない」— 新ガイドライン改訂の論点に</a:t>
-            </a:r>
-          </a:p>
-          <a:p>
-            <a:pPr lvl="1">
-              <a:spcBef>
-                <a:spcPts val="600"/>
-              </a:spcBef>
-              <a:spcAft>
-                <a:spcPts val="700"/>
-              </a:spcAft>
-            </a:pPr>
-            <a:r>
-              <a:rPr sz="1500" b="1">
-                <a:solidFill>
-                  <a:srgbClr val="555555"/>
-                </a:solidFill>
-                <a:latin typeface="Yu Gothic"/>
-                <a:ea typeface="Yu Gothic"/>
-              </a:rPr>
-              <a:t>– </a:t>
-            </a:r>
-            <a:r>
-              <a:rPr sz="1500" b="0">
-                <a:solidFill>
-                  <a:srgbClr val="555555"/>
-                </a:solidFill>
-                <a:latin typeface="Yu Gothic"/>
-                <a:ea typeface="Yu Gothic"/>
-              </a:rPr>
-              <a:t>関連：CB定義のばらつき／CB依存度への問題提起が相次ぐ（2025 レター）</a:t>
+              <a:rPr sz="1800" b="0">
+                <a:solidFill>
+                  <a:srgbClr val="222222"/>
+                </a:solidFill>
+                <a:latin typeface="Yu Gothic"/>
+                <a:ea typeface="Yu Gothic"/>
+              </a:rPr>
+              <a:t>疑い例では IVIg 診断的治療で反応性を確認することもしばしば</a:t>
             </a:r>
           </a:p>
         </p:txBody>
@@ -4694,7 +4487,7 @@
                 <a:latin typeface="Yu Gothic"/>
                 <a:ea typeface="Yu Gothic"/>
               </a:rPr>
-              <a:t>出典：Doneddu PE, et al. Nerve Conduction Abnormalities Beyond CB in MMN. Eur J Neurol 2025;32:e70300</a:t>
+              <a:t>出典：Joint Task Force EFNS/PNS. J Peripher Nerv Syst 2010;15:295-301（表を流用）</a:t>
             </a:r>
           </a:p>
         </p:txBody>
@@ -4929,7 +4722,7 @@
                 <a:latin typeface="Yu Gothic"/>
                 <a:ea typeface="Yu Gothic"/>
               </a:rPr>
-              <a:t>画像・バイオマーカーのアップデート</a:t>
+              <a:t>診断アップデート① — 基準の感度比較（Doneddu 2024）</a:t>
             </a:r>
           </a:p>
         </p:txBody>
@@ -4982,7 +4775,7 @@
                 <a:latin typeface="Yu Gothic"/>
                 <a:ea typeface="Yu Gothic"/>
               </a:rPr>
-              <a:t>神経エコー：非対称性の神経腫大を高感度に検出、ALS鑑別に有用</a:t>
+              <a:t>EFNS/PNS 2010 vs AANEM：MMN 53例 vs 対照280例</a:t>
             </a:r>
           </a:p>
           <a:p>
@@ -5012,13 +4805,73 @@
                 <a:latin typeface="Yu Gothic"/>
                 <a:ea typeface="Yu Gothic"/>
               </a:rPr>
-              <a:t>低コスト・非侵襲。narrative reviewは「可能なら第一選択の画像」と提言</a:t>
+              <a:t>感度：EFNS/PNS 47%（definite）/57%（prob+def）＞ AANEM 28%/53%</a:t>
+            </a:r>
+          </a:p>
+          <a:p>
+            <a:pPr lvl="1">
+              <a:spcBef>
+                <a:spcPts val="200"/>
+              </a:spcBef>
+              <a:spcAft>
+                <a:spcPts val="700"/>
+              </a:spcAft>
+            </a:pPr>
+            <a:r>
+              <a:rPr sz="1500" b="1">
+                <a:solidFill>
+                  <a:srgbClr val="555555"/>
+                </a:solidFill>
+                <a:latin typeface="Yu Gothic"/>
+                <a:ea typeface="Yu Gothic"/>
+              </a:rPr>
+              <a:t>– </a:t>
+            </a:r>
+            <a:r>
+              <a:rPr sz="1500" b="0">
+                <a:solidFill>
+                  <a:srgbClr val="555555"/>
+                </a:solidFill>
+                <a:latin typeface="Yu Gothic"/>
+                <a:ea typeface="Yu Gothic"/>
+              </a:rPr>
+              <a:t>支持基準を加えると EFNS/PNS の prob+def 感度は 64% に</a:t>
+            </a:r>
+          </a:p>
+          <a:p>
+            <a:pPr lvl="1">
+              <a:spcBef>
+                <a:spcPts val="200"/>
+              </a:spcBef>
+              <a:spcAft>
+                <a:spcPts val="700"/>
+              </a:spcAft>
+            </a:pPr>
+            <a:r>
+              <a:rPr sz="1500" b="1">
+                <a:solidFill>
+                  <a:srgbClr val="555555"/>
+                </a:solidFill>
+                <a:latin typeface="Yu Gothic"/>
+                <a:ea typeface="Yu Gothic"/>
+              </a:rPr>
+              <a:t>– </a:t>
+            </a:r>
+            <a:r>
+              <a:rPr sz="1500" b="0">
+                <a:solidFill>
+                  <a:srgbClr val="555555"/>
+                </a:solidFill>
+                <a:latin typeface="Yu Gothic"/>
+                <a:ea typeface="Yu Gothic"/>
+              </a:rPr>
+              <a:t>特異度：AANEM 100%、EFNS/PNS 97〜98.5%（ともに高い）</a:t>
             </a:r>
           </a:p>
           <a:p>
             <a:pPr>
               <a:spcBef>
-                <a:spcPts val="600"/>
+                <a:spcPts val="800"/>
               </a:spcBef>
               <a:spcAft>
                 <a:spcPts val="700"/>
@@ -5032,77 +4885,17 @@
                 <a:latin typeface="Yu Gothic"/>
                 <a:ea typeface="Yu Gothic"/>
               </a:rPr>
-              <a:t>● </a:t>
+              <a:t>▶ </a:t>
             </a:r>
             <a:r>
               <a:rPr sz="1800" b="1">
                 <a:solidFill>
-                  <a:srgbClr val="222222"/>
-                </a:solidFill>
-                <a:latin typeface="Yu Gothic"/>
-                <a:ea typeface="Yu Gothic"/>
-              </a:rPr>
-              <a:t>MR neurography：神経腫大は MADSAM で顕著、MMNで乏しい→鑑別の手がかり</a:t>
-            </a:r>
-          </a:p>
-          <a:p>
-            <a:pPr>
-              <a:spcBef>
-                <a:spcPts val="600"/>
-              </a:spcBef>
-              <a:spcAft>
-                <a:spcPts val="700"/>
-              </a:spcAft>
-            </a:pPr>
-            <a:r>
-              <a:rPr sz="1800" b="1">
-                <a:solidFill>
                   <a:srgbClr val="2E6DA4"/>
                 </a:solidFill>
                 <a:latin typeface="Yu Gothic"/>
                 <a:ea typeface="Yu Gothic"/>
               </a:rPr>
-              <a:t>● </a:t>
-            </a:r>
-            <a:r>
-              <a:rPr sz="1800" b="1">
-                <a:solidFill>
-                  <a:srgbClr val="222222"/>
-                </a:solidFill>
-                <a:latin typeface="Yu Gothic"/>
-                <a:ea typeface="Yu Gothic"/>
-              </a:rPr>
-              <a:t>バイオマーカー：血清NfL は ALS＜ 鑑別補助、peripherin（軸索障害）も注目</a:t>
-            </a:r>
-          </a:p>
-          <a:p>
-            <a:pPr lvl="1">
-              <a:spcBef>
-                <a:spcPts val="200"/>
-              </a:spcBef>
-              <a:spcAft>
-                <a:spcPts val="700"/>
-              </a:spcAft>
-            </a:pPr>
-            <a:r>
-              <a:rPr sz="1500" b="1">
-                <a:solidFill>
-                  <a:srgbClr val="555555"/>
-                </a:solidFill>
-                <a:latin typeface="Yu Gothic"/>
-                <a:ea typeface="Yu Gothic"/>
-              </a:rPr>
-              <a:t>– </a:t>
-            </a:r>
-            <a:r>
-              <a:rPr sz="1500" b="0">
-                <a:solidFill>
-                  <a:srgbClr val="2E6DA4"/>
-                </a:solidFill>
-                <a:latin typeface="Yu Gothic"/>
-                <a:ea typeface="Yu Gothic"/>
-              </a:rPr>
-              <a:t>現行 EFNS/PNS はエコー記載なし → 新GLでの正式採用が期待される</a:t>
+              <a:t>→ EFNS/PNSは高感度・わずかに低特異度。NCSの拡張（多神経検索）を推奨</a:t>
             </a:r>
           </a:p>
         </p:txBody>
@@ -5145,7 +4938,7 @@
                 <a:latin typeface="Yu Gothic"/>
                 <a:ea typeface="Yu Gothic"/>
               </a:rPr>
-              <a:t>出典：Pitman J, et al. Muscle Nerve 2024;71:293-308／Karam C. Muscle Nerve 2025;73:86-92 等</a:t>
+              <a:t>出典：Doneddu PE, et al. Eur J Neurol 2024;31:e16444／同 Italian database 2024;31:e16248</a:t>
             </a:r>
           </a:p>
         </p:txBody>
@@ -5380,7 +5173,7 @@
                 <a:latin typeface="Yu Gothic"/>
                 <a:ea typeface="Yu Gothic"/>
               </a:rPr>
-              <a:t>診断遅延・誤診の実態 —「気づかれない」MMN</a:t>
+              <a:t>診断アップデート② — CBを超えた「拡張基準」（Doneddu 2025）</a:t>
             </a:r>
           </a:p>
         </p:txBody>
@@ -5433,7 +5226,37 @@
                 <a:latin typeface="Yu Gothic"/>
                 <a:ea typeface="Yu Gothic"/>
               </a:rPr>
-              <a:t>英国多施設調査：初診からの診断遅延が50%超で1年以上</a:t>
+              <a:t>MMN 70例 vs 対照359例</a:t>
+            </a:r>
+          </a:p>
+          <a:p>
+            <a:pPr lvl="1">
+              <a:spcBef>
+                <a:spcPts val="200"/>
+              </a:spcBef>
+              <a:spcAft>
+                <a:spcPts val="700"/>
+              </a:spcAft>
+            </a:pPr>
+            <a:r>
+              <a:rPr sz="1500" b="1">
+                <a:solidFill>
+                  <a:srgbClr val="555555"/>
+                </a:solidFill>
+                <a:latin typeface="Yu Gothic"/>
+                <a:ea typeface="Yu Gothic"/>
+              </a:rPr>
+              <a:t>– </a:t>
+            </a:r>
+            <a:r>
+              <a:rPr sz="1500" b="0">
+                <a:solidFill>
+                  <a:srgbClr val="555555"/>
+                </a:solidFill>
+                <a:latin typeface="Yu Gothic"/>
+                <a:ea typeface="Yu Gothic"/>
+              </a:rPr>
+              <a:t>CBのない区間でも71%にCB以外の伝導異常（時間的分散47%・遠位CMAP持続延長31%・CV低下26% 等）</a:t>
             </a:r>
           </a:p>
           <a:p>
@@ -5463,7 +5286,7 @@
                 <a:latin typeface="Yu Gothic"/>
                 <a:ea typeface="Yu Gothic"/>
               </a:rPr>
-              <a:t>argenxグローバル医師調査（250名/9か国）</a:t>
+              <a:t>これらを取り込むと prob/def 感度が +26%（p&lt;0.001）、特異度低下は最小</a:t>
             </a:r>
           </a:p>
           <a:p>
@@ -5478,6 +5301,36 @@
             <a:r>
               <a:rPr sz="1500" b="1">
                 <a:solidFill>
+                  <a:srgbClr val="2E7D32"/>
+                </a:solidFill>
+                <a:latin typeface="Yu Gothic"/>
+                <a:ea typeface="Yu Gothic"/>
+              </a:rPr>
+              <a:t>▶ </a:t>
+            </a:r>
+            <a:r>
+              <a:rPr sz="1500" b="1">
+                <a:solidFill>
+                  <a:srgbClr val="2E7D32"/>
+                </a:solidFill>
+                <a:latin typeface="Yu Gothic"/>
+                <a:ea typeface="Yu Gothic"/>
+              </a:rPr>
+              <a:t>「CBが唯一の脱髄指標ではない」— 新ガイドライン改訂の論点に</a:t>
+            </a:r>
+          </a:p>
+          <a:p>
+            <a:pPr lvl="1">
+              <a:spcBef>
+                <a:spcPts val="600"/>
+              </a:spcBef>
+              <a:spcAft>
+                <a:spcPts val="700"/>
+              </a:spcAft>
+            </a:pPr>
+            <a:r>
+              <a:rPr sz="1500" b="1">
+                <a:solidFill>
                   <a:srgbClr val="555555"/>
                 </a:solidFill>
                 <a:latin typeface="Yu Gothic"/>
@@ -5493,67 +5346,7 @@
                 <a:latin typeface="Yu Gothic"/>
                 <a:ea typeface="Yu Gothic"/>
               </a:rPr>
-              <a:t>約70%が別の末梢神経疾患と最初に誤診（ALS誤診50%、CIDP51%）</a:t>
-            </a:r>
-          </a:p>
-          <a:p>
-            <a:pPr lvl="1">
-              <a:spcBef>
-                <a:spcPts val="200"/>
-              </a:spcBef>
-              <a:spcAft>
-                <a:spcPts val="700"/>
-              </a:spcAft>
-            </a:pPr>
-            <a:r>
-              <a:rPr sz="1500" b="1">
-                <a:solidFill>
-                  <a:srgbClr val="555555"/>
-                </a:solidFill>
-                <a:latin typeface="Yu Gothic"/>
-                <a:ea typeface="Yu Gothic"/>
-              </a:rPr>
-              <a:t>– </a:t>
-            </a:r>
-            <a:r>
-              <a:rPr sz="1500" b="0">
-                <a:solidFill>
-                  <a:srgbClr val="555555"/>
-                </a:solidFill>
-                <a:latin typeface="Yu Gothic"/>
-                <a:ea typeface="Yu Gothic"/>
-              </a:rPr>
-              <a:t>31%はどのガイドラインも参照せず、1/3がステロイドを1st-line（非推奨）</a:t>
-            </a:r>
-          </a:p>
-          <a:p>
-            <a:pPr lvl="1">
-              <a:spcBef>
-                <a:spcPts val="200"/>
-              </a:spcBef>
-              <a:spcAft>
-                <a:spcPts val="700"/>
-              </a:spcAft>
-            </a:pPr>
-            <a:r>
-              <a:rPr sz="1500" b="1">
-                <a:solidFill>
-                  <a:srgbClr val="555555"/>
-                </a:solidFill>
-                <a:latin typeface="Yu Gothic"/>
-                <a:ea typeface="Yu Gothic"/>
-              </a:rPr>
-              <a:t>– </a:t>
-            </a:r>
-            <a:r>
-              <a:rPr sz="1500" b="0">
-                <a:solidFill>
-                  <a:srgbClr val="555555"/>
-                </a:solidFill>
-                <a:latin typeface="Yu Gothic"/>
-                <a:ea typeface="Yu Gothic"/>
-              </a:rPr>
-              <a:t>診断遅延：医師推計 約1.75年／患者報告 約6年（両者に乖離、両方提示）</a:t>
+              <a:t>関連：CB定義のばらつき／CB依存度への問題提起が相次ぐ（2025 レター）</a:t>
             </a:r>
           </a:p>
         </p:txBody>
@@ -5596,7 +5389,7 @@
                 <a:latin typeface="Yu Gothic"/>
                 <a:ea typeface="Yu Gothic"/>
               </a:rPr>
-              <a:t>出典：Rajabally YA, et al. JPNS 2025;30:e70018／argenx PNS 2025 ポスター（医師・患者調査）</a:t>
+              <a:t>出典：Doneddu PE, et al. Nerve Conduction Abnormalities Beyond CB in MMN. Eur J Neurol 2025;32:e70300</a:t>
             </a:r>
           </a:p>
         </p:txBody>
@@ -5788,7 +5581,7 @@
                 <a:latin typeface="Yu Gothic"/>
                 <a:ea typeface="Yu Gothic"/>
               </a:rPr>
-              <a:t>2｜新ガイドライン</a:t>
+              <a:t>2｜診断（新）</a:t>
             </a:r>
           </a:p>
         </p:txBody>
@@ -5831,7 +5624,7 @@
                 <a:latin typeface="Yu Gothic"/>
                 <a:ea typeface="Yu Gothic"/>
               </a:rPr>
-              <a:t>新ガイドライン — EAN/PNS MMN ガイドライン（近刊）</a:t>
+              <a:t>診断アップデート③ — 実データが示す電気診断の最適化（2025）</a:t>
             </a:r>
           </a:p>
         </p:txBody>
@@ -5884,7 +5677,67 @@
                 <a:latin typeface="Yu Gothic"/>
                 <a:ea typeface="Yu Gothic"/>
               </a:rPr>
-              <a:t>現行標準は依然 2010年 EFNS/PNS 第1改訂版</a:t>
+              <a:t>CB定義は「振幅30%減」が「面積30%減」より高感度（78.7% vs 63.8%）</a:t>
+            </a:r>
+          </a:p>
+          <a:p>
+            <a:pPr lvl="1">
+              <a:spcBef>
+                <a:spcPts val="200"/>
+              </a:spcBef>
+              <a:spcAft>
+                <a:spcPts val="700"/>
+              </a:spcAft>
+            </a:pPr>
+            <a:r>
+              <a:rPr sz="1500" b="1">
+                <a:solidFill>
+                  <a:srgbClr val="2E7D32"/>
+                </a:solidFill>
+                <a:latin typeface="Yu Gothic"/>
+                <a:ea typeface="Yu Gothic"/>
+              </a:rPr>
+              <a:t>▶ </a:t>
+            </a:r>
+            <a:r>
+              <a:rPr sz="1500" b="1">
+                <a:solidFill>
+                  <a:srgbClr val="2E7D32"/>
+                </a:solidFill>
+                <a:latin typeface="Yu Gothic"/>
+                <a:ea typeface="Yu Gothic"/>
+              </a:rPr>
+              <a:t>CB(振幅)＋時間的分散(TD)＋F波延長/消失を独立指標にすると感度78.7→91.5%</a:t>
+            </a:r>
+          </a:p>
+          <a:p>
+            <a:pPr lvl="1">
+              <a:spcBef>
+                <a:spcPts val="200"/>
+              </a:spcBef>
+              <a:spcAft>
+                <a:spcPts val="700"/>
+              </a:spcAft>
+            </a:pPr>
+            <a:r>
+              <a:rPr sz="1500" b="1">
+                <a:solidFill>
+                  <a:srgbClr val="555555"/>
+                </a:solidFill>
+                <a:latin typeface="Yu Gothic"/>
+                <a:ea typeface="Yu Gothic"/>
+              </a:rPr>
+              <a:t>– </a:t>
+            </a:r>
+            <a:r>
+              <a:rPr sz="1500" b="0">
+                <a:solidFill>
+                  <a:srgbClr val="555555"/>
+                </a:solidFill>
+                <a:latin typeface="Yu Gothic"/>
+                <a:ea typeface="Yu Gothic"/>
+              </a:rPr>
+              <a:t>TDは感度59.6%/特異度94.3%、F波異常は感度42.6%/特異度96.9%（英・韓 多施設）</a:t>
             </a:r>
           </a:p>
           <a:p>
@@ -5914,7 +5767,7 @@
                 <a:latin typeface="Yu Gothic"/>
                 <a:ea typeface="Yu Gothic"/>
               </a:rPr>
-              <a:t>改訂版：Task Force chair S. Goedee（Utrecht）</a:t>
+              <a:t>予後：IVIg反応不良例は発症時から罹患神経数が多くTDが多い（CB単独では判別不可）</a:t>
             </a:r>
           </a:p>
           <a:p>
@@ -5939,102 +5792,12 @@
             <a:r>
               <a:rPr sz="1500" b="0">
                 <a:solidFill>
-                  <a:srgbClr val="555555"/>
-                </a:solidFill>
-                <a:latin typeface="Yu Gothic"/>
-                <a:ea typeface="Yu Gothic"/>
-              </a:rPr>
-              <a:t>EAN公式は「Guideline Proposal accepted（初期段階）」、2025–2026発刊見込み</a:t>
-            </a:r>
-          </a:p>
-          <a:p>
-            <a:pPr lvl="1">
-              <a:spcBef>
-                <a:spcPts val="200"/>
-              </a:spcBef>
-              <a:spcAft>
-                <a:spcPts val="700"/>
-              </a:spcAft>
-            </a:pPr>
-            <a:r>
-              <a:rPr sz="1500" b="1">
-                <a:solidFill>
-                  <a:srgbClr val="555555"/>
-                </a:solidFill>
-                <a:latin typeface="Yu Gothic"/>
-                <a:ea typeface="Yu Gothic"/>
-              </a:rPr>
-              <a:t>– </a:t>
-            </a:r>
-            <a:r>
-              <a:rPr sz="1500" b="0">
-                <a:solidFill>
-                  <a:srgbClr val="555555"/>
-                </a:solidFill>
-                <a:latin typeface="Yu Gothic"/>
-                <a:ea typeface="Yu Gothic"/>
-              </a:rPr>
-              <a:t>＊正式な発刊日・内容は未公開 → 本項は「予想」として提示</a:t>
-            </a:r>
-          </a:p>
-          <a:p>
-            <a:pPr>
-              <a:spcBef>
-                <a:spcPts val="800"/>
-              </a:spcBef>
-              <a:spcAft>
-                <a:spcPts val="700"/>
-              </a:spcAft>
-            </a:pPr>
-            <a:r>
-              <a:rPr sz="1800" b="1">
-                <a:solidFill>
                   <a:srgbClr val="2E6DA4"/>
                 </a:solidFill>
                 <a:latin typeface="Yu Gothic"/>
                 <a:ea typeface="Yu Gothic"/>
               </a:rPr>
-              <a:t>● </a:t>
-            </a:r>
-            <a:r>
-              <a:rPr sz="1800" b="1">
-                <a:solidFill>
-                  <a:srgbClr val="222222"/>
-                </a:solidFill>
-                <a:latin typeface="Yu Gothic"/>
-                <a:ea typeface="Yu Gothic"/>
-              </a:rPr>
-              <a:t>予想される変更点（未確定）</a:t>
-            </a:r>
-          </a:p>
-          <a:p>
-            <a:pPr lvl="1">
-              <a:spcBef>
-                <a:spcPts val="200"/>
-              </a:spcBef>
-              <a:spcAft>
-                <a:spcPts val="700"/>
-              </a:spcAft>
-            </a:pPr>
-            <a:r>
-              <a:rPr sz="1500" b="1">
-                <a:solidFill>
-                  <a:srgbClr val="555555"/>
-                </a:solidFill>
-                <a:latin typeface="Yu Gothic"/>
-                <a:ea typeface="Yu Gothic"/>
-              </a:rPr>
-              <a:t>– </a:t>
-            </a:r>
-            <a:r>
-              <a:rPr sz="1500" b="0">
-                <a:solidFill>
-                  <a:srgbClr val="555555"/>
-                </a:solidFill>
-                <a:latin typeface="Yu Gothic"/>
-                <a:ea typeface="Yu Gothic"/>
-              </a:rPr>
-              <a:t>CB以外の伝導異常の位置づけ／神経エコーの支持基準採用／SCIg・補体阻害への言及</a:t>
+              <a:t>→ CBだけでなくTD・F波・罹患神経数を系統的に評価</a:t>
             </a:r>
           </a:p>
         </p:txBody>
@@ -6077,7 +5840,7 @@
                 <a:latin typeface="Yu Gothic"/>
                 <a:ea typeface="Yu Gothic"/>
               </a:rPr>
-              <a:t>出典：EAN Ongoing Guidelines（ean.org）。発表直前に発刊状況の再確認を推奨</a:t>
+              <a:t>出典：Rajabally YA, et al. Eur J Neurol 2025;32:e70361／Posa A, et al. IBRO Neurosci Rep 2026;20:474-479</a:t>
             </a:r>
           </a:p>
         </p:txBody>
@@ -6269,7 +6032,7 @@
                 <a:latin typeface="Yu Gothic"/>
                 <a:ea typeface="Yu Gothic"/>
               </a:rPr>
-              <a:t>2｜新ガイドライン</a:t>
+              <a:t>2｜診断</a:t>
             </a:r>
           </a:p>
         </p:txBody>
@@ -6312,7 +6075,7 @@
                 <a:latin typeface="Yu Gothic"/>
                 <a:ea typeface="Yu Gothic"/>
               </a:rPr>
-              <a:t>参考：2021 EAN/PNS CIDPガイドライン と 日本GL2024</a:t>
+              <a:t>画像・バイオマーカーのアップデート</a:t>
             </a:r>
           </a:p>
         </p:txBody>
@@ -6365,7 +6128,7 @@
                 <a:latin typeface="Yu Gothic"/>
                 <a:ea typeface="Yu Gothic"/>
               </a:rPr>
-              <a:t>2021 CIDPガイドライン：「atypical CIDP」→「CIDP variants」に整理</a:t>
+              <a:t>神経エコー：非対称性の神経腫大を高感度に検出、ALS鑑別に有用</a:t>
             </a:r>
           </a:p>
           <a:p>
@@ -6395,13 +6158,13 @@
                 <a:latin typeface="Yu Gothic"/>
                 <a:ea typeface="Yu Gothic"/>
               </a:rPr>
-              <a:t>Lewis-Sumner/MADSAM は「multifocal CIDP」と改称 → MMNとの厳密な鑑別が重要</a:t>
+              <a:t>低コスト・非侵襲。narrative reviewは「可能なら第一選択の画像」と提言</a:t>
             </a:r>
           </a:p>
           <a:p>
             <a:pPr>
               <a:spcBef>
-                <a:spcPts val="800"/>
+                <a:spcPts val="600"/>
               </a:spcBef>
               <a:spcAft>
                 <a:spcPts val="700"/>
@@ -6420,12 +6183,42 @@
             <a:r>
               <a:rPr sz="1800" b="1">
                 <a:solidFill>
-                  <a:srgbClr val="1F3A5F"/>
-                </a:solidFill>
-                <a:latin typeface="Yu Gothic"/>
-                <a:ea typeface="Yu Gothic"/>
-              </a:rPr>
-              <a:t>日本GL2024（要点）</a:t>
+                  <a:srgbClr val="222222"/>
+                </a:solidFill>
+                <a:latin typeface="Yu Gothic"/>
+                <a:ea typeface="Yu Gothic"/>
+              </a:rPr>
+              <a:t>MR neurography：神経腫大は MADSAM で顕著、MMNで乏しい→鑑別の手がかり</a:t>
+            </a:r>
+          </a:p>
+          <a:p>
+            <a:pPr>
+              <a:spcBef>
+                <a:spcPts val="600"/>
+              </a:spcBef>
+              <a:spcAft>
+                <a:spcPts val="700"/>
+              </a:spcAft>
+            </a:pPr>
+            <a:r>
+              <a:rPr sz="1800" b="1">
+                <a:solidFill>
+                  <a:srgbClr val="2E6DA4"/>
+                </a:solidFill>
+                <a:latin typeface="Yu Gothic"/>
+                <a:ea typeface="Yu Gothic"/>
+              </a:rPr>
+              <a:t>● </a:t>
+            </a:r>
+            <a:r>
+              <a:rPr sz="1800" b="1">
+                <a:solidFill>
+                  <a:srgbClr val="222222"/>
+                </a:solidFill>
+                <a:latin typeface="Yu Gothic"/>
+                <a:ea typeface="Yu Gothic"/>
+              </a:rPr>
+              <a:t>バイオマーカー：血清NfL は ALS＜ 鑑別補助、peripherin（軸索障害）も注目</a:t>
             </a:r>
           </a:p>
           <a:p>
@@ -6450,72 +6243,12 @@
             <a:r>
               <a:rPr sz="1500" b="0">
                 <a:solidFill>
-                  <a:srgbClr val="555555"/>
-                </a:solidFill>
-                <a:latin typeface="Yu Gothic"/>
-                <a:ea typeface="Yu Gothic"/>
-              </a:rPr>
-              <a:t>IVIg導入(1C)・維持(1B)を強く推奨、SCIg維持は条件付き(2C・国内保険適用外)</a:t>
-            </a:r>
-          </a:p>
-          <a:p>
-            <a:pPr lvl="1">
-              <a:spcBef>
-                <a:spcPts val="200"/>
-              </a:spcBef>
-              <a:spcAft>
-                <a:spcPts val="700"/>
-              </a:spcAft>
-            </a:pPr>
-            <a:r>
-              <a:rPr sz="1500" b="1">
-                <a:solidFill>
-                  <a:srgbClr val="555555"/>
-                </a:solidFill>
-                <a:latin typeface="Yu Gothic"/>
-                <a:ea typeface="Yu Gothic"/>
-              </a:rPr>
-              <a:t>– </a:t>
-            </a:r>
-            <a:r>
-              <a:rPr sz="1500" b="0">
-                <a:solidFill>
-                  <a:srgbClr val="555555"/>
-                </a:solidFill>
-                <a:latin typeface="Yu Gothic"/>
-                <a:ea typeface="Yu Gothic"/>
-              </a:rPr>
-              <a:t>免疫抑制療法は行わないことを強く推奨(1B)、ステロイドは増悪例あり非推奨</a:t>
-            </a:r>
-          </a:p>
-          <a:p>
-            <a:pPr lvl="1">
-              <a:spcBef>
-                <a:spcPts val="200"/>
-              </a:spcBef>
-              <a:spcAft>
-                <a:spcPts val="700"/>
-              </a:spcAft>
-            </a:pPr>
-            <a:r>
-              <a:rPr sz="1500" b="1">
-                <a:solidFill>
-                  <a:srgbClr val="555555"/>
-                </a:solidFill>
-                <a:latin typeface="Yu Gothic"/>
-                <a:ea typeface="Yu Gothic"/>
-              </a:rPr>
-              <a:t>▶ </a:t>
-            </a:r>
-            <a:r>
-              <a:rPr sz="1500" b="0">
-                <a:solidFill>
                   <a:srgbClr val="2E6DA4"/>
                 </a:solidFill>
                 <a:latin typeface="Yu Gothic"/>
                 <a:ea typeface="Yu Gothic"/>
               </a:rPr>
-              <a:t>補体阻害薬・FcRnは「今後の臨床試験に期待」→ 次章が最新の続報</a:t>
+              <a:t>現行 EFNS/PNS はエコー記載なし → 新GLでの正式採用が期待される</a:t>
             </a:r>
           </a:p>
         </p:txBody>
@@ -6558,7 +6291,7 @@
                 <a:latin typeface="Yu Gothic"/>
                 <a:ea typeface="Yu Gothic"/>
               </a:rPr>
-              <a:t>出典：Van den Bergh PYK, et al. EAN/PNS CIDP guideline 2021／日本CIDP/MMN診療ガイドライン2024</a:t>
+              <a:t>出典：Pitman J, et al. Muscle Nerve 2024;71:293-308／Karam C. Muscle Nerve 2025;73:86-92 等</a:t>
             </a:r>
           </a:p>
         </p:txBody>
@@ -6633,7 +6366,7 @@
         <p:spPr>
           <a:xfrm>
             <a:off x="0" y="0"/>
-            <a:ext cx="12191695" cy="6858000"/>
+            <a:ext cx="12191695" cy="1051560"/>
           </a:xfrm>
           <a:prstGeom prst="rect">
             <a:avLst/>
@@ -6676,8 +6409,8 @@
         </p:nvSpPr>
         <p:spPr>
           <a:xfrm>
-            <a:off x="822960" y="2743200"/>
-            <a:ext cx="1463040" cy="76200"/>
+            <a:off x="0" y="1051560"/>
+            <a:ext cx="12191695" cy="50800"/>
           </a:xfrm>
           <a:prstGeom prst="rect">
             <a:avLst/>
@@ -6720,8 +6453,8 @@
         </p:nvSpPr>
         <p:spPr>
           <a:xfrm>
-            <a:off x="822960" y="1828800"/>
-            <a:ext cx="2743200" cy="914400"/>
+            <a:off x="457200" y="109728"/>
+            <a:ext cx="10058400" cy="274320"/>
           </a:xfrm>
           <a:prstGeom prst="rect">
             <a:avLst/>
@@ -6743,14 +6476,14 @@
               </a:spcAft>
             </a:pPr>
             <a:r>
-              <a:rPr sz="8000" b="1">
-                <a:solidFill>
-                  <a:srgbClr val="3E6A99"/>
-                </a:solidFill>
-                <a:latin typeface="Yu Gothic"/>
-                <a:ea typeface="Yu Gothic"/>
-              </a:rPr>
-              <a:t>3</a:t>
+              <a:rPr sz="1200" b="1">
+                <a:solidFill>
+                  <a:srgbClr val="BBD3EA"/>
+                </a:solidFill>
+                <a:latin typeface="Yu Gothic"/>
+                <a:ea typeface="Yu Gothic"/>
+              </a:rPr>
+              <a:t>2｜診断（新）</a:t>
             </a:r>
           </a:p>
         </p:txBody>
@@ -6763,8 +6496,224 @@
         </p:nvSpPr>
         <p:spPr>
           <a:xfrm>
-            <a:off x="822960" y="2926080"/>
-            <a:ext cx="10515600" cy="1188720"/>
+            <a:off x="457200" y="329184"/>
+            <a:ext cx="11247120" cy="685800"/>
+          </a:xfrm>
+          <a:prstGeom prst="rect">
+            <a:avLst/>
+          </a:prstGeom>
+          <a:noFill/>
+        </p:spPr>
+        <p:txBody>
+          <a:bodyPr wrap="square" anchor="ctr" lIns="50800" rIns="50800" tIns="25400" bIns="25400">
+            <a:spAutoFit/>
+          </a:bodyPr>
+          <a:lstStyle/>
+          <a:p>
+            <a:pPr algn="l">
+              <a:spcBef>
+                <a:spcPts val="0"/>
+              </a:spcBef>
+              <a:spcAft>
+                <a:spcPts val="400"/>
+              </a:spcAft>
+            </a:pPr>
+            <a:r>
+              <a:rPr sz="2600" b="1">
+                <a:solidFill>
+                  <a:srgbClr val="FFFFFF"/>
+                </a:solidFill>
+                <a:latin typeface="Yu Gothic"/>
+                <a:ea typeface="Yu Gothic"/>
+              </a:rPr>
+              <a:t>神経エコー — MMN・純粋運動CIDP・典型CIDPは連続スペクトラム</a:t>
+            </a:r>
+          </a:p>
+        </p:txBody>
+      </p:sp>
+      <p:sp>
+        <p:nvSpPr>
+          <p:cNvPr id="6" name="TextBox 5"/>
+          <p:cNvSpPr txBox="1"/>
+          <p:nvPr/>
+        </p:nvSpPr>
+        <p:spPr>
+          <a:xfrm>
+            <a:off x="548640" y="1325880"/>
+            <a:ext cx="11064240" cy="5029200"/>
+          </a:xfrm>
+          <a:prstGeom prst="rect">
+            <a:avLst/>
+          </a:prstGeom>
+          <a:noFill/>
+        </p:spPr>
+        <p:txBody>
+          <a:bodyPr wrap="square">
+            <a:spAutoFit/>
+          </a:bodyPr>
+          <a:lstStyle/>
+          <a:p>
+            <a:pPr>
+              <a:spcBef>
+                <a:spcPts val="200"/>
+              </a:spcBef>
+              <a:spcAft>
+                <a:spcPts val="700"/>
+              </a:spcAft>
+            </a:pPr>
+            <a:r>
+              <a:rPr sz="1800" b="1">
+                <a:solidFill>
+                  <a:srgbClr val="2E6DA4"/>
+                </a:solidFill>
+                <a:latin typeface="Yu Gothic"/>
+                <a:ea typeface="Yu Gothic"/>
+              </a:rPr>
+              <a:t>● </a:t>
+            </a:r>
+            <a:r>
+              <a:rPr sz="1800" b="1">
+                <a:solidFill>
+                  <a:srgbClr val="222222"/>
+                </a:solidFill>
+                <a:latin typeface="Yu Gothic"/>
+                <a:ea typeface="Yu Gothic"/>
+              </a:rPr>
+              <a:t>MMN19／motor CIDP15／典型CIDP117 を神経エコー＋NCSで比較</a:t>
+            </a:r>
+          </a:p>
+          <a:p>
+            <a:pPr lvl="1">
+              <a:spcBef>
+                <a:spcPts val="200"/>
+              </a:spcBef>
+              <a:spcAft>
+                <a:spcPts val="700"/>
+              </a:spcAft>
+            </a:pPr>
+            <a:r>
+              <a:rPr sz="1500" b="1">
+                <a:solidFill>
+                  <a:srgbClr val="555555"/>
+                </a:solidFill>
+                <a:latin typeface="Yu Gothic"/>
+                <a:ea typeface="Yu Gothic"/>
+              </a:rPr>
+              <a:t>– </a:t>
+            </a:r>
+            <a:r>
+              <a:rPr sz="1500" b="0">
+                <a:solidFill>
+                  <a:srgbClr val="555555"/>
+                </a:solidFill>
+                <a:latin typeface="Yu Gothic"/>
+                <a:ea typeface="Yu Gothic"/>
+              </a:rPr>
+              <a:t>神経断面積(CSA)：典型CIDP＞MPred-CIDP＞PM-CIDP＞MMN の順で小さくなる</a:t>
+            </a:r>
+          </a:p>
+          <a:p>
+            <a:pPr lvl="1">
+              <a:spcBef>
+                <a:spcPts val="200"/>
+              </a:spcBef>
+              <a:spcAft>
+                <a:spcPts val="700"/>
+              </a:spcAft>
+            </a:pPr>
+            <a:r>
+              <a:rPr sz="1500" b="1">
+                <a:solidFill>
+                  <a:srgbClr val="555555"/>
+                </a:solidFill>
+                <a:latin typeface="Yu Gothic"/>
+                <a:ea typeface="Yu Gothic"/>
+              </a:rPr>
+              <a:t>– </a:t>
+            </a:r>
+            <a:r>
+              <a:rPr sz="1500" b="0">
+                <a:solidFill>
+                  <a:srgbClr val="555555"/>
+                </a:solidFill>
+                <a:latin typeface="Yu Gothic"/>
+                <a:ea typeface="Yu Gothic"/>
+              </a:rPr>
+              <a:t>伝導速度は逆順（MMNで最も速い）→ 3疾患は連続スペクトラム</a:t>
+            </a:r>
+          </a:p>
+          <a:p>
+            <a:pPr lvl="1">
+              <a:spcBef>
+                <a:spcPts val="200"/>
+              </a:spcBef>
+              <a:spcAft>
+                <a:spcPts val="700"/>
+              </a:spcAft>
+            </a:pPr>
+            <a:r>
+              <a:rPr sz="1500" b="1">
+                <a:solidFill>
+                  <a:srgbClr val="555555"/>
+                </a:solidFill>
+                <a:latin typeface="Yu Gothic"/>
+                <a:ea typeface="Yu Gothic"/>
+              </a:rPr>
+              <a:t>– </a:t>
+            </a:r>
+            <a:r>
+              <a:rPr sz="1500" b="0">
+                <a:solidFill>
+                  <a:srgbClr val="555555"/>
+                </a:solidFill>
+                <a:latin typeface="Yu Gothic"/>
+                <a:ea typeface="Yu Gothic"/>
+              </a:rPr>
+              <a:t>motor CIDPは腕神経叢が近位優位に腫大（MMN・典型CIDPは均等）</a:t>
+            </a:r>
+          </a:p>
+          <a:p>
+            <a:pPr lvl="1">
+              <a:spcBef>
+                <a:spcPts val="600"/>
+              </a:spcBef>
+              <a:spcAft>
+                <a:spcPts val="700"/>
+              </a:spcAft>
+            </a:pPr>
+            <a:r>
+              <a:rPr sz="1500" b="1">
+                <a:solidFill>
+                  <a:srgbClr val="555555"/>
+                </a:solidFill>
+                <a:latin typeface="Yu Gothic"/>
+                <a:ea typeface="Yu Gothic"/>
+              </a:rPr>
+              <a:t>▶ </a:t>
+            </a:r>
+            <a:r>
+              <a:rPr sz="1500" b="1">
+                <a:solidFill>
+                  <a:srgbClr val="2E6DA4"/>
+                </a:solidFill>
+                <a:latin typeface="Yu Gothic"/>
+                <a:ea typeface="Yu Gothic"/>
+              </a:rPr>
+              <a:t>→ エコー＋NCS＋治療反応で疾患スペクトラム上の位置づけが可能</a:t>
+            </a:r>
+          </a:p>
+        </p:txBody>
+      </p:sp>
+      <p:sp>
+        <p:nvSpPr>
+          <p:cNvPr id="7" name="TextBox 6"/>
+          <p:cNvSpPr txBox="1"/>
+          <p:nvPr/>
+        </p:nvSpPr>
+        <p:spPr>
+          <a:xfrm>
+            <a:off x="548640" y="6355080"/>
+            <a:ext cx="11064240" cy="365760"/>
           </a:xfrm>
           <a:prstGeom prst="rect">
             <a:avLst/>
@@ -6786,28 +6735,28 @@
               </a:spcAft>
             </a:pPr>
             <a:r>
-              <a:rPr sz="3600" b="1">
-                <a:solidFill>
-                  <a:srgbClr val="FFFFFF"/>
-                </a:solidFill>
-                <a:latin typeface="Yu Gothic"/>
-                <a:ea typeface="Yu Gothic"/>
-              </a:rPr>
-              <a:t>治療のアップデート</a:t>
-            </a:r>
-          </a:p>
-        </p:txBody>
-      </p:sp>
-      <p:sp>
-        <p:nvSpPr>
-          <p:cNvPr id="6" name="TextBox 5"/>
+              <a:rPr sz="1050" b="0">
+                <a:solidFill>
+                  <a:srgbClr val="555555"/>
+                </a:solidFill>
+                <a:latin typeface="Yu Gothic"/>
+                <a:ea typeface="Yu Gothic"/>
+              </a:rPr>
+              <a:t>出典：Niu J, et al. Nerve Ultrasound of MMN and Motor/Typical CIDP. Can J Neurol Sci 2025</a:t>
+            </a:r>
+          </a:p>
+        </p:txBody>
+      </p:sp>
+      <p:sp>
+        <p:nvSpPr>
+          <p:cNvPr id="8" name="TextBox 7"/>
           <p:cNvSpPr txBox="1"/>
           <p:nvPr/>
         </p:nvSpPr>
         <p:spPr>
           <a:xfrm>
-            <a:off x="868680" y="4023360"/>
-            <a:ext cx="10515600" cy="914400"/>
+            <a:off x="11430000" y="109728"/>
+            <a:ext cx="640080" cy="274320"/>
           </a:xfrm>
           <a:prstGeom prst="rect">
             <a:avLst/>
@@ -6820,7 +6769,7 @@
           </a:bodyPr>
           <a:lstStyle/>
           <a:p>
-            <a:pPr algn="l">
+            <a:pPr algn="r">
               <a:spcBef>
                 <a:spcPts val="0"/>
               </a:spcBef>
@@ -6829,14 +6778,14 @@
               </a:spcAft>
             </a:pPr>
             <a:r>
-              <a:rPr sz="1800" b="0">
+              <a:rPr sz="1200" b="1">
                 <a:solidFill>
                   <a:srgbClr val="BBD3EA"/>
                 </a:solidFill>
                 <a:latin typeface="Yu Gothic"/>
                 <a:ea typeface="Yu Gothic"/>
               </a:rPr>
-              <a:t>「本命」補体阻害薬と新規IgG療法</a:t>
+              <a:t>2</a:t>
             </a:r>
           </a:p>
         </p:txBody>
@@ -6985,7 +6934,7 @@
                 <a:latin typeface="Yu Gothic"/>
                 <a:ea typeface="Yu Gothic"/>
               </a:rPr>
-              <a:t>3｜治療</a:t>
+              <a:t>2｜診断（新）</a:t>
             </a:r>
           </a:p>
         </p:txBody>
@@ -7028,7 +6977,7 @@
                 <a:latin typeface="Yu Gothic"/>
                 <a:ea typeface="Yu Gothic"/>
               </a:rPr>
-              <a:t>治療の現状と限界 — IVIg / SCIg</a:t>
+              <a:t>鑑別診断 — 手初発ALS と 運動優位ニューロパチー</a:t>
             </a:r>
           </a:p>
         </p:txBody>
@@ -7076,12 +7025,12 @@
             <a:r>
               <a:rPr sz="1800" b="1">
                 <a:solidFill>
-                  <a:srgbClr val="222222"/>
-                </a:solidFill>
-                <a:latin typeface="Yu Gothic"/>
-                <a:ea typeface="Yu Gothic"/>
-              </a:rPr>
-              <a:t>IVIgは唯一の承認治療・第一選択（実臨床の奏効率は高い：英国97.8%）</a:t>
+                  <a:srgbClr val="1F3A5F"/>
+                </a:solidFill>
+                <a:latin typeface="Yu Gothic"/>
+                <a:ea typeface="Yu Gothic"/>
+              </a:rPr>
+              <a:t>MMN vs 手初発ALS（Fang 2026）</a:t>
             </a:r>
           </a:p>
           <a:p>
@@ -7111,7 +7060,37 @@
                 <a:latin typeface="Yu Gothic"/>
                 <a:ea typeface="Yu Gothic"/>
               </a:rPr>
-              <a:t>SCIgはIVIgと同等の有効性・良好な忍容性（国内は未承認）</a:t>
+              <a:t>MMNは若年発症(43 vs 59歳)・低CK・高IgM。CBはMMN 87.5% vs 手初発ALS 31%</a:t>
+            </a:r>
+          </a:p>
+          <a:p>
+            <a:pPr lvl="1">
+              <a:spcBef>
+                <a:spcPts val="200"/>
+              </a:spcBef>
+              <a:spcAft>
+                <a:spcPts val="700"/>
+              </a:spcAft>
+            </a:pPr>
+            <a:r>
+              <a:rPr sz="1500" b="1">
+                <a:solidFill>
+                  <a:srgbClr val="555555"/>
+                </a:solidFill>
+                <a:latin typeface="Yu Gothic"/>
+                <a:ea typeface="Yu Gothic"/>
+              </a:rPr>
+              <a:t>– </a:t>
+            </a:r>
+            <a:r>
+              <a:rPr sz="1500" b="0">
+                <a:solidFill>
+                  <a:srgbClr val="555555"/>
+                </a:solidFill>
+                <a:latin typeface="Yu Gothic"/>
+                <a:ea typeface="Yu Gothic"/>
+              </a:rPr>
+              <a:t>手初発ALSの約1/3でCK上昇、MMNは全例CK正常</a:t>
             </a:r>
           </a:p>
           <a:p>
@@ -7141,7 +7120,7 @@
                 <a:latin typeface="Yu Gothic"/>
                 <a:ea typeface="Yu Gothic"/>
               </a:rPr>
-              <a:t>限界：維持療法下でも軸索変性が緩徐に進行、経時的に効果減弱</a:t>
+              <a:t>LMND様重症運動ニューロパチーで新規セプチン多量体自己抗体（Arlt 2026, Brain）</a:t>
             </a:r>
           </a:p>
           <a:p>
@@ -7171,37 +7150,7 @@
                 <a:latin typeface="Yu Gothic"/>
                 <a:ea typeface="Yu Gothic"/>
               </a:rPr>
-              <a:t>約90%の患者が維持IVIg下でも軸索変性が進行（患者調査）</a:t>
-            </a:r>
-          </a:p>
-          <a:p>
-            <a:pPr lvl="1">
-              <a:spcBef>
-                <a:spcPts val="600"/>
-              </a:spcBef>
-              <a:spcAft>
-                <a:spcPts val="700"/>
-              </a:spcAft>
-            </a:pPr>
-            <a:r>
-              <a:rPr sz="1500" b="1">
-                <a:solidFill>
-                  <a:srgbClr val="2E7D32"/>
-                </a:solidFill>
-                <a:latin typeface="Yu Gothic"/>
-                <a:ea typeface="Yu Gothic"/>
-              </a:rPr>
-              <a:t>▶ </a:t>
-            </a:r>
-            <a:r>
-              <a:rPr sz="1500" b="1">
-                <a:solidFill>
-                  <a:srgbClr val="2E7D32"/>
-                </a:solidFill>
-                <a:latin typeface="Yu Gothic"/>
-                <a:ea typeface="Yu Gothic"/>
-              </a:rPr>
-              <a:t>→ 病態を修飾する新規治療（補体阻害）への強い期待</a:t>
+              <a:t>MMN検証群は陰性だが、運動優位ニューロパチー×LMND鑑別で今後注目</a:t>
             </a:r>
           </a:p>
         </p:txBody>
@@ -7244,7 +7193,7 @@
                 <a:latin typeface="Yu Gothic"/>
                 <a:ea typeface="Yu Gothic"/>
               </a:rPr>
-              <a:t>出典：Rajabally YA, et al. JPNS 2025;30:e70018／Claytor et al. Muscle Nerve 2025 等</a:t>
+              <a:t>出典：Fang SY, et al. J Chin Med Assoc 2026;89:437-444／Arlt FA, et al. Brain 2026;awag183</a:t>
             </a:r>
           </a:p>
         </p:txBody>
@@ -7287,7 +7236,7 @@
                 <a:latin typeface="Yu Gothic"/>
                 <a:ea typeface="Yu Gothic"/>
               </a:rPr>
-              <a:t>3</a:t>
+              <a:t>2</a:t>
             </a:r>
           </a:p>
         </p:txBody>
@@ -7436,7 +7385,7 @@
                 <a:latin typeface="Yu Gothic"/>
                 <a:ea typeface="Yu Gothic"/>
               </a:rPr>
-              <a:t>3｜治療</a:t>
+              <a:t>2｜診断</a:t>
             </a:r>
           </a:p>
         </p:txBody>
@@ -7479,7 +7428,7 @@
                 <a:latin typeface="Yu Gothic"/>
                 <a:ea typeface="Yu Gothic"/>
               </a:rPr>
-              <a:t>なぜ補体阻害か —「本命」の病態的根拠</a:t>
+              <a:t>診断遅延・誤診の実態 —「気づかれない」MMN</a:t>
             </a:r>
           </a:p>
         </p:txBody>
@@ -7532,7 +7481,37 @@
                 <a:latin typeface="Yu Gothic"/>
                 <a:ea typeface="Yu Gothic"/>
               </a:rPr>
-              <a:t>抗GM1 IgM →（古典経路・C2依存性）→ 補体活性化</a:t>
+              <a:t>英国多施設調査：初診からの診断遅延が50%超で1年以上</a:t>
+            </a:r>
+          </a:p>
+          <a:p>
+            <a:pPr>
+              <a:spcBef>
+                <a:spcPts val="800"/>
+              </a:spcBef>
+              <a:spcAft>
+                <a:spcPts val="700"/>
+              </a:spcAft>
+            </a:pPr>
+            <a:r>
+              <a:rPr sz="1800" b="1">
+                <a:solidFill>
+                  <a:srgbClr val="2E6DA4"/>
+                </a:solidFill>
+                <a:latin typeface="Yu Gothic"/>
+                <a:ea typeface="Yu Gothic"/>
+              </a:rPr>
+              <a:t>● </a:t>
+            </a:r>
+            <a:r>
+              <a:rPr sz="1800" b="1">
+                <a:solidFill>
+                  <a:srgbClr val="1F3A5F"/>
+                </a:solidFill>
+                <a:latin typeface="Yu Gothic"/>
+                <a:ea typeface="Yu Gothic"/>
+              </a:rPr>
+              <a:t>argenxグローバル医師調査（250名/9か国）</a:t>
             </a:r>
           </a:p>
           <a:p>
@@ -7562,7 +7541,7 @@
                 <a:latin typeface="Yu Gothic"/>
                 <a:ea typeface="Yu Gothic"/>
               </a:rPr>
-              <a:t>ランビエ絞輪で膜侵襲複合体(MAC)形成 → Navチャネル障害・軸索障害</a:t>
+              <a:t>約70%が別の末梢神経疾患と最初に誤診（ALS誤診50%、CIDP51%）</a:t>
             </a:r>
           </a:p>
           <a:p>
@@ -7592,57 +7571,37 @@
                 <a:latin typeface="Yu Gothic"/>
                 <a:ea typeface="Yu Gothic"/>
               </a:rPr>
-              <a:t>IVIgは補体沈着を減らすが不十分 → 上流での選択的補体阻害が合理的</a:t>
-            </a:r>
-          </a:p>
-          <a:p>
-            <a:pPr>
-              <a:spcBef>
-                <a:spcPts val="1000"/>
+              <a:t>31%はどのガイドラインも参照せず、1/3がステロイドを1st-line（非推奨）</a:t>
+            </a:r>
+          </a:p>
+          <a:p>
+            <a:pPr lvl="1">
+              <a:spcBef>
+                <a:spcPts val="200"/>
               </a:spcBef>
               <a:spcAft>
                 <a:spcPts val="700"/>
               </a:spcAft>
             </a:pPr>
             <a:r>
-              <a:rPr sz="1800" b="1">
-                <a:solidFill>
-                  <a:srgbClr val="2E6DA4"/>
-                </a:solidFill>
-                <a:latin typeface="Yu Gothic"/>
-                <a:ea typeface="Yu Gothic"/>
-              </a:rPr>
-              <a:t>▶ </a:t>
-            </a:r>
-            <a:r>
-              <a:rPr sz="1800" b="1">
-                <a:solidFill>
-                  <a:srgbClr val="1F3A5F"/>
-                </a:solidFill>
-                <a:latin typeface="Yu Gothic"/>
-                <a:ea typeface="Yu Gothic"/>
-              </a:rPr>
-              <a:t>開発の主戦場は C2（empasiprubart）と 活性化C1s（DNTH103）</a:t>
-            </a:r>
-          </a:p>
-          <a:p>
-            <a:pPr>
-              <a:spcBef>
-                <a:spcPts val="800"/>
-              </a:spcBef>
-              <a:spcAft>
-                <a:spcPts val="700"/>
-              </a:spcAft>
-            </a:pPr>
-            <a:r>
-              <a:rPr sz="1300" b="0">
+              <a:rPr sz="1500" b="1">
                 <a:solidFill>
                   <a:srgbClr val="555555"/>
                 </a:solidFill>
                 <a:latin typeface="Yu Gothic"/>
                 <a:ea typeface="Yu Gothic"/>
               </a:rPr>
-              <a:t>＊いずれも国内未承認・臨床試験段階（適応外）</a:t>
+              <a:t>– </a:t>
+            </a:r>
+            <a:r>
+              <a:rPr sz="1500" b="0">
+                <a:solidFill>
+                  <a:srgbClr val="555555"/>
+                </a:solidFill>
+                <a:latin typeface="Yu Gothic"/>
+                <a:ea typeface="Yu Gothic"/>
+              </a:rPr>
+              <a:t>診断遅延：医師推計 約1.75年／患者報告 約6年（両者に乖離、両方提示）</a:t>
             </a:r>
           </a:p>
         </p:txBody>
@@ -7685,7 +7644,7 @@
                 <a:latin typeface="Yu Gothic"/>
                 <a:ea typeface="Yu Gothic"/>
               </a:rPr>
-              <a:t>出典：Budding K, et al. Eur J Neurol 2025;32:e16541 ほか</a:t>
+              <a:t>出典：Rajabally YA, et al. JPNS 2025;30:e70018／argenx PNS 2025 ポスター（医師・患者調査）</a:t>
             </a:r>
           </a:p>
         </p:txBody>
@@ -7728,7 +7687,7 @@
                 <a:latin typeface="Yu Gothic"/>
                 <a:ea typeface="Yu Gothic"/>
               </a:rPr>
-              <a:t>3</a:t>
+              <a:t>2</a:t>
             </a:r>
           </a:p>
         </p:txBody>
@@ -8192,7 +8151,7 @@
                 <a:latin typeface="Yu Gothic"/>
                 <a:ea typeface="Yu Gothic"/>
               </a:rPr>
-              <a:t>3｜治療（本命）</a:t>
+              <a:t>2｜新ガイドライン</a:t>
             </a:r>
           </a:p>
         </p:txBody>
@@ -8235,7 +8194,7 @@
                 <a:latin typeface="Yu Gothic"/>
                 <a:ea typeface="Yu Gothic"/>
               </a:rPr>
-              <a:t>empasiprubart（抗C2）— 第2相 ARDA 試験</a:t>
+              <a:t>新ガイドライン — EAN/PNS MMN ガイドライン（近刊）</a:t>
             </a:r>
           </a:p>
         </p:txBody>
@@ -8288,7 +8247,37 @@
                 <a:latin typeface="Yu Gothic"/>
                 <a:ea typeface="Yu Gothic"/>
               </a:rPr>
-              <a:t>対象：IVIg依存の probable/definite MMN 計54名</a:t>
+              <a:t>現行標準は依然 2010年 EFNS/PNS 第1改訂版</a:t>
+            </a:r>
+          </a:p>
+          <a:p>
+            <a:pPr>
+              <a:spcBef>
+                <a:spcPts val="800"/>
+              </a:spcBef>
+              <a:spcAft>
+                <a:spcPts val="700"/>
+              </a:spcAft>
+            </a:pPr>
+            <a:r>
+              <a:rPr sz="1800" b="1">
+                <a:solidFill>
+                  <a:srgbClr val="2E6DA4"/>
+                </a:solidFill>
+                <a:latin typeface="Yu Gothic"/>
+                <a:ea typeface="Yu Gothic"/>
+              </a:rPr>
+              <a:t>● </a:t>
+            </a:r>
+            <a:r>
+              <a:rPr sz="1800" b="1">
+                <a:solidFill>
+                  <a:srgbClr val="1F3A5F"/>
+                </a:solidFill>
+                <a:latin typeface="Yu Gothic"/>
+                <a:ea typeface="Yu Gothic"/>
+              </a:rPr>
+              <a:t>改訂版：Task Force chair S. Goedee（Utrecht）</a:t>
             </a:r>
           </a:p>
           <a:p>
@@ -8318,7 +8307,37 @@
                 <a:latin typeface="Yu Gothic"/>
                 <a:ea typeface="Yu Gothic"/>
               </a:rPr>
-              <a:t>27名×2コホート、各2:1（実薬n=18/プラセボn=9）、16週二重盲検</a:t>
+              <a:t>EAN公式は「Guideline Proposal accepted（初期段階）」、2025–2026発刊見込み</a:t>
+            </a:r>
+          </a:p>
+          <a:p>
+            <a:pPr lvl="1">
+              <a:spcBef>
+                <a:spcPts val="200"/>
+              </a:spcBef>
+              <a:spcAft>
+                <a:spcPts val="700"/>
+              </a:spcAft>
+            </a:pPr>
+            <a:r>
+              <a:rPr sz="1500" b="1">
+                <a:solidFill>
+                  <a:srgbClr val="555555"/>
+                </a:solidFill>
+                <a:latin typeface="Yu Gothic"/>
+                <a:ea typeface="Yu Gothic"/>
+              </a:rPr>
+              <a:t>– </a:t>
+            </a:r>
+            <a:r>
+              <a:rPr sz="1500" b="0">
+                <a:solidFill>
+                  <a:srgbClr val="555555"/>
+                </a:solidFill>
+                <a:latin typeface="Yu Gothic"/>
+                <a:ea typeface="Yu Gothic"/>
+              </a:rPr>
+              <a:t>＊正式な発刊日・内容は未公開 → 本項は「予想」として提示</a:t>
             </a:r>
           </a:p>
           <a:p>
@@ -8343,12 +8362,12 @@
             <a:r>
               <a:rPr sz="1800" b="1">
                 <a:solidFill>
-                  <a:srgbClr val="1F3A5F"/>
-                </a:solidFill>
-                <a:latin typeface="Yu Gothic"/>
-                <a:ea typeface="Yu Gothic"/>
-              </a:rPr>
-              <a:t>主要結果（EAN2025/PNS2025）</a:t>
+                  <a:srgbClr val="222222"/>
+                </a:solidFill>
+                <a:latin typeface="Yu Gothic"/>
+                <a:ea typeface="Yu Gothic"/>
+              </a:rPr>
+              <a:t>予想される変更点（未確定）</a:t>
             </a:r>
           </a:p>
           <a:p>
@@ -8371,74 +8390,14 @@
               <a:t>– </a:t>
             </a:r>
             <a:r>
-              <a:rPr sz="1500" b="1">
-                <a:solidFill>
-                  <a:srgbClr val="2E7D32"/>
-                </a:solidFill>
-                <a:latin typeface="Yu Gothic"/>
-                <a:ea typeface="Yu Gothic"/>
-              </a:rPr>
-              <a:t>IVIg再投与リスク 約91%減：コホート1 HR 0.09（95%CI 0.02–0.44）</a:t>
-            </a:r>
-          </a:p>
-          <a:p>
-            <a:pPr lvl="1">
-              <a:spcBef>
-                <a:spcPts val="200"/>
-              </a:spcBef>
-              <a:spcAft>
-                <a:spcPts val="700"/>
-              </a:spcAft>
-            </a:pPr>
-            <a:r>
-              <a:rPr sz="1500" b="1">
+              <a:rPr sz="1500" b="0">
                 <a:solidFill>
                   <a:srgbClr val="555555"/>
                 </a:solidFill>
                 <a:latin typeface="Yu Gothic"/>
                 <a:ea typeface="Yu Gothic"/>
               </a:rPr>
-              <a:t>– </a:t>
-            </a:r>
-            <a:r>
-              <a:rPr sz="1500" b="0">
-                <a:solidFill>
-                  <a:srgbClr val="555555"/>
-                </a:solidFill>
-                <a:latin typeface="Yu Gothic"/>
-                <a:ea typeface="Yu Gothic"/>
-              </a:rPr>
-              <a:t>握力改善（コホート2：+19.89 vs +0.78 kPa）、血清NfL低下（軸索保護示唆）</a:t>
-            </a:r>
-          </a:p>
-          <a:p>
-            <a:pPr lvl="1">
-              <a:spcBef>
-                <a:spcPts val="200"/>
-              </a:spcBef>
-              <a:spcAft>
-                <a:spcPts val="700"/>
-              </a:spcAft>
-            </a:pPr>
-            <a:r>
-              <a:rPr sz="1500" b="1">
-                <a:solidFill>
-                  <a:srgbClr val="555555"/>
-                </a:solidFill>
-                <a:latin typeface="Yu Gothic"/>
-                <a:ea typeface="Yu Gothic"/>
-              </a:rPr>
-              <a:t>– </a:t>
-            </a:r>
-            <a:r>
-              <a:rPr sz="1500" b="0">
-                <a:solidFill>
-                  <a:srgbClr val="555555"/>
-                </a:solidFill>
-                <a:latin typeface="Yu Gothic"/>
-                <a:ea typeface="Yu Gothic"/>
-              </a:rPr>
-              <a:t>安全性は概ね良好（多くは軽〜中等度）。MMNで過去最大の介入試験</a:t>
+              <a:t>CB以外の伝導異常の位置づけ／神経エコーの支持基準採用／SCIg・補体阻害への言及</a:t>
             </a:r>
           </a:p>
         </p:txBody>
@@ -8481,7 +8440,7 @@
                 <a:latin typeface="Yu Gothic"/>
                 <a:ea typeface="Yu Gothic"/>
               </a:rPr>
-              <a:t>出典：ARDA 第2相（NCT05225675）argenx PNS 2025 ポスター。査読論文化は要確認・国内未承認</a:t>
+              <a:t>出典：EAN Ongoing Guidelines（ean.org）。発表直前に発刊状況の再確認を推奨</a:t>
             </a:r>
           </a:p>
         </p:txBody>
@@ -8524,7 +8483,7 @@
                 <a:latin typeface="Yu Gothic"/>
                 <a:ea typeface="Yu Gothic"/>
               </a:rPr>
-              <a:t>3</a:t>
+              <a:t>2</a:t>
             </a:r>
           </a:p>
         </p:txBody>
@@ -8673,7 +8632,7 @@
                 <a:latin typeface="Yu Gothic"/>
                 <a:ea typeface="Yu Gothic"/>
               </a:rPr>
-              <a:t>3｜治療（本命）</a:t>
+              <a:t>2｜新ガイドライン</a:t>
             </a:r>
           </a:p>
         </p:txBody>
@@ -8716,7 +8675,7 @@
                 <a:latin typeface="Yu Gothic"/>
                 <a:ea typeface="Yu Gothic"/>
               </a:rPr>
-              <a:t>empasiprubart — 第3相 EMPASSION／他の補体阻害薬</a:t>
+              <a:t>参考：2021 EAN/PNS CIDPガイドライン と 日本GL2024</a:t>
             </a:r>
           </a:p>
         </p:txBody>
@@ -8769,7 +8728,7 @@
                 <a:latin typeface="Yu Gothic"/>
                 <a:ea typeface="Yu Gothic"/>
               </a:rPr>
-              <a:t>EMPASSION（NCT06742190）：empasiprubart vs IVIg、約154名、進行中</a:t>
+              <a:t>2021 CIDPガイドライン：「atypical CIDP」→「CIDP variants」に整理</a:t>
             </a:r>
           </a:p>
           <a:p>
@@ -8799,7 +8758,7 @@
                 <a:latin typeface="Yu Gothic"/>
                 <a:ea typeface="Yu Gothic"/>
               </a:rPr>
-              <a:t>主要評価は握力変化（CT.gov）／MMN-RODS（企業資料）で出典間に食い違い→要確認</a:t>
+              <a:t>Lewis-Sumner/MADSAM は「multifocal CIDP」と改称 → MMNとの厳密な鑑別が重要</a:t>
             </a:r>
           </a:p>
           <a:p>
@@ -8824,12 +8783,12 @@
             <a:r>
               <a:rPr sz="1800" b="1">
                 <a:solidFill>
-                  <a:srgbClr val="222222"/>
-                </a:solidFill>
-                <a:latin typeface="Yu Gothic"/>
-                <a:ea typeface="Yu Gothic"/>
-              </a:rPr>
-              <a:t>DNTH103（抗活性化C1s、皮下・2週毎）：第2相 MoMeNtum（MMN36名）、2H2026データ</a:t>
+                  <a:srgbClr val="1F3A5F"/>
+                </a:solidFill>
+                <a:latin typeface="Yu Gothic"/>
+                <a:ea typeface="Yu Gothic"/>
+              </a:rPr>
+              <a:t>日本GL2024（要点）</a:t>
             </a:r>
           </a:p>
           <a:p>
@@ -8859,7 +8818,7 @@
                 <a:latin typeface="Yu Gothic"/>
                 <a:ea typeface="Yu Gothic"/>
               </a:rPr>
-              <a:t>riliprubart（抗C1s, Sanofi）はMMN非対象（CIDP専用・難治CIDP第3相は無益性中止）</a:t>
+              <a:t>IVIg導入(1C)・維持(1B)を強く推奨、SCIg維持は条件付き(2C・国内保険適用外)</a:t>
             </a:r>
           </a:p>
           <a:p>
@@ -8889,7 +8848,37 @@
                 <a:latin typeface="Yu Gothic"/>
                 <a:ea typeface="Yu Gothic"/>
               </a:rPr>
-              <a:t>eculizumab（抗C5）は小規模オープン試験で効果限定的（上流阻害へ主流移行）</a:t>
+              <a:t>免疫抑制療法は行わないことを強く推奨(1B)、ステロイドは増悪例あり非推奨</a:t>
+            </a:r>
+          </a:p>
+          <a:p>
+            <a:pPr lvl="1">
+              <a:spcBef>
+                <a:spcPts val="200"/>
+              </a:spcBef>
+              <a:spcAft>
+                <a:spcPts val="700"/>
+              </a:spcAft>
+            </a:pPr>
+            <a:r>
+              <a:rPr sz="1500" b="1">
+                <a:solidFill>
+                  <a:srgbClr val="555555"/>
+                </a:solidFill>
+                <a:latin typeface="Yu Gothic"/>
+                <a:ea typeface="Yu Gothic"/>
+              </a:rPr>
+              <a:t>▶ </a:t>
+            </a:r>
+            <a:r>
+              <a:rPr sz="1500" b="0">
+                <a:solidFill>
+                  <a:srgbClr val="2E6DA4"/>
+                </a:solidFill>
+                <a:latin typeface="Yu Gothic"/>
+                <a:ea typeface="Yu Gothic"/>
+              </a:rPr>
+              <a:t>補体阻害薬・FcRnは「今後の臨床試験に期待」→ 次章が最新の続報</a:t>
             </a:r>
           </a:p>
         </p:txBody>
@@ -8932,7 +8921,7 @@
                 <a:latin typeface="Yu Gothic"/>
                 <a:ea typeface="Yu Gothic"/>
               </a:rPr>
-              <a:t>出典：ClinicalTrials.gov（NCT06742190/NCT06537999）／Sanofi press 2026／Fitzpatrick 2011</a:t>
+              <a:t>出典：Van den Bergh PYK, et al. EAN/PNS CIDP guideline 2021／日本CIDP/MMN診療ガイドライン2024</a:t>
             </a:r>
           </a:p>
         </p:txBody>
@@ -8975,7 +8964,7 @@
                 <a:latin typeface="Yu Gothic"/>
                 <a:ea typeface="Yu Gothic"/>
               </a:rPr>
-              <a:t>3</a:t>
+              <a:t>2</a:t>
             </a:r>
           </a:p>
         </p:txBody>
@@ -8989,6 +8978,3803 @@
 </file>
 
 <file path=ppt/slides/slide22.xml><?xml version="1.0" encoding="utf-8"?>
+<p:sld xmlns:a="http://schemas.openxmlformats.org/drawingml/2006/main" xmlns:p="http://schemas.openxmlformats.org/presentationml/2006/main" xmlns:r="http://schemas.openxmlformats.org/officeDocument/2006/relationships">
+  <p:cSld>
+    <p:spTree>
+      <p:nvGrpSpPr>
+        <p:cNvPr id="1" name=""/>
+        <p:cNvGrpSpPr/>
+        <p:nvPr/>
+      </p:nvGrpSpPr>
+      <p:grpSpPr/>
+      <p:sp>
+        <p:nvSpPr>
+          <p:cNvPr id="2" name="Rectangle 1"/>
+          <p:cNvSpPr/>
+          <p:nvPr/>
+        </p:nvSpPr>
+        <p:spPr>
+          <a:xfrm>
+            <a:off x="0" y="0"/>
+            <a:ext cx="12191695" cy="6858000"/>
+          </a:xfrm>
+          <a:prstGeom prst="rect">
+            <a:avLst/>
+          </a:prstGeom>
+          <a:solidFill>
+            <a:srgbClr val="1F3A5F"/>
+          </a:solidFill>
+          <a:ln>
+            <a:noFill/>
+          </a:ln>
+          <a:effectLst/>
+        </p:spPr>
+        <p:style>
+          <a:lnRef idx="1">
+            <a:schemeClr val="accent1"/>
+          </a:lnRef>
+          <a:fillRef idx="3">
+            <a:schemeClr val="accent1"/>
+          </a:fillRef>
+          <a:effectRef idx="2">
+            <a:schemeClr val="accent1"/>
+          </a:effectRef>
+          <a:fontRef idx="minor">
+            <a:schemeClr val="lt1"/>
+          </a:fontRef>
+        </p:style>
+        <p:txBody>
+          <a:bodyPr rtlCol="0" anchor="ctr"/>
+          <a:lstStyle/>
+          <a:p>
+            <a:pPr algn="ctr"/>
+          </a:p>
+        </p:txBody>
+      </p:sp>
+      <p:sp>
+        <p:nvSpPr>
+          <p:cNvPr id="3" name="Rectangle 2"/>
+          <p:cNvSpPr/>
+          <p:nvPr/>
+        </p:nvSpPr>
+        <p:spPr>
+          <a:xfrm>
+            <a:off x="822960" y="2743200"/>
+            <a:ext cx="1463040" cy="76200"/>
+          </a:xfrm>
+          <a:prstGeom prst="rect">
+            <a:avLst/>
+          </a:prstGeom>
+          <a:solidFill>
+            <a:srgbClr val="2E6DA4"/>
+          </a:solidFill>
+          <a:ln>
+            <a:noFill/>
+          </a:ln>
+          <a:effectLst/>
+        </p:spPr>
+        <p:style>
+          <a:lnRef idx="1">
+            <a:schemeClr val="accent1"/>
+          </a:lnRef>
+          <a:fillRef idx="3">
+            <a:schemeClr val="accent1"/>
+          </a:fillRef>
+          <a:effectRef idx="2">
+            <a:schemeClr val="accent1"/>
+          </a:effectRef>
+          <a:fontRef idx="minor">
+            <a:schemeClr val="lt1"/>
+          </a:fontRef>
+        </p:style>
+        <p:txBody>
+          <a:bodyPr rtlCol="0" anchor="ctr"/>
+          <a:lstStyle/>
+          <a:p>
+            <a:pPr algn="ctr"/>
+          </a:p>
+        </p:txBody>
+      </p:sp>
+      <p:sp>
+        <p:nvSpPr>
+          <p:cNvPr id="4" name="TextBox 3"/>
+          <p:cNvSpPr txBox="1"/>
+          <p:nvPr/>
+        </p:nvSpPr>
+        <p:spPr>
+          <a:xfrm>
+            <a:off x="822960" y="1828800"/>
+            <a:ext cx="2743200" cy="914400"/>
+          </a:xfrm>
+          <a:prstGeom prst="rect">
+            <a:avLst/>
+          </a:prstGeom>
+          <a:noFill/>
+        </p:spPr>
+        <p:txBody>
+          <a:bodyPr wrap="square" anchor="t" lIns="50800" rIns="50800" tIns="25400" bIns="25400">
+            <a:spAutoFit/>
+          </a:bodyPr>
+          <a:lstStyle/>
+          <a:p>
+            <a:pPr algn="l">
+              <a:spcBef>
+                <a:spcPts val="0"/>
+              </a:spcBef>
+              <a:spcAft>
+                <a:spcPts val="400"/>
+              </a:spcAft>
+            </a:pPr>
+            <a:r>
+              <a:rPr sz="8000" b="1">
+                <a:solidFill>
+                  <a:srgbClr val="3E6A99"/>
+                </a:solidFill>
+                <a:latin typeface="Yu Gothic"/>
+                <a:ea typeface="Yu Gothic"/>
+              </a:rPr>
+              <a:t>3</a:t>
+            </a:r>
+          </a:p>
+        </p:txBody>
+      </p:sp>
+      <p:sp>
+        <p:nvSpPr>
+          <p:cNvPr id="5" name="TextBox 4"/>
+          <p:cNvSpPr txBox="1"/>
+          <p:nvPr/>
+        </p:nvSpPr>
+        <p:spPr>
+          <a:xfrm>
+            <a:off x="822960" y="2926080"/>
+            <a:ext cx="10515600" cy="1188720"/>
+          </a:xfrm>
+          <a:prstGeom prst="rect">
+            <a:avLst/>
+          </a:prstGeom>
+          <a:noFill/>
+        </p:spPr>
+        <p:txBody>
+          <a:bodyPr wrap="square" anchor="t" lIns="50800" rIns="50800" tIns="25400" bIns="25400">
+            <a:spAutoFit/>
+          </a:bodyPr>
+          <a:lstStyle/>
+          <a:p>
+            <a:pPr algn="l">
+              <a:spcBef>
+                <a:spcPts val="0"/>
+              </a:spcBef>
+              <a:spcAft>
+                <a:spcPts val="400"/>
+              </a:spcAft>
+            </a:pPr>
+            <a:r>
+              <a:rPr sz="3600" b="1">
+                <a:solidFill>
+                  <a:srgbClr val="FFFFFF"/>
+                </a:solidFill>
+                <a:latin typeface="Yu Gothic"/>
+                <a:ea typeface="Yu Gothic"/>
+              </a:rPr>
+              <a:t>治療のアップデート</a:t>
+            </a:r>
+          </a:p>
+        </p:txBody>
+      </p:sp>
+      <p:sp>
+        <p:nvSpPr>
+          <p:cNvPr id="6" name="TextBox 5"/>
+          <p:cNvSpPr txBox="1"/>
+          <p:nvPr/>
+        </p:nvSpPr>
+        <p:spPr>
+          <a:xfrm>
+            <a:off x="868680" y="4023360"/>
+            <a:ext cx="10515600" cy="914400"/>
+          </a:xfrm>
+          <a:prstGeom prst="rect">
+            <a:avLst/>
+          </a:prstGeom>
+          <a:noFill/>
+        </p:spPr>
+        <p:txBody>
+          <a:bodyPr wrap="square" anchor="t" lIns="50800" rIns="50800" tIns="25400" bIns="25400">
+            <a:spAutoFit/>
+          </a:bodyPr>
+          <a:lstStyle/>
+          <a:p>
+            <a:pPr algn="l">
+              <a:spcBef>
+                <a:spcPts val="0"/>
+              </a:spcBef>
+              <a:spcAft>
+                <a:spcPts val="400"/>
+              </a:spcAft>
+            </a:pPr>
+            <a:r>
+              <a:rPr sz="1800" b="0">
+                <a:solidFill>
+                  <a:srgbClr val="BBD3EA"/>
+                </a:solidFill>
+                <a:latin typeface="Yu Gothic"/>
+                <a:ea typeface="Yu Gothic"/>
+              </a:rPr>
+              <a:t>「本命」補体阻害薬と新規IgG療法</a:t>
+            </a:r>
+          </a:p>
+        </p:txBody>
+      </p:sp>
+    </p:spTree>
+  </p:cSld>
+  <p:clrMapOvr>
+    <a:masterClrMapping/>
+  </p:clrMapOvr>
+</p:sld>
+</file>
+
+<file path=ppt/slides/slide23.xml><?xml version="1.0" encoding="utf-8"?>
+<p:sld xmlns:a="http://schemas.openxmlformats.org/drawingml/2006/main" xmlns:p="http://schemas.openxmlformats.org/presentationml/2006/main" xmlns:r="http://schemas.openxmlformats.org/officeDocument/2006/relationships">
+  <p:cSld>
+    <p:spTree>
+      <p:nvGrpSpPr>
+        <p:cNvPr id="1" name=""/>
+        <p:cNvGrpSpPr/>
+        <p:nvPr/>
+      </p:nvGrpSpPr>
+      <p:grpSpPr/>
+      <p:sp>
+        <p:nvSpPr>
+          <p:cNvPr id="2" name="Rectangle 1"/>
+          <p:cNvSpPr/>
+          <p:nvPr/>
+        </p:nvSpPr>
+        <p:spPr>
+          <a:xfrm>
+            <a:off x="0" y="0"/>
+            <a:ext cx="12191695" cy="1051560"/>
+          </a:xfrm>
+          <a:prstGeom prst="rect">
+            <a:avLst/>
+          </a:prstGeom>
+          <a:solidFill>
+            <a:srgbClr val="1F3A5F"/>
+          </a:solidFill>
+          <a:ln>
+            <a:noFill/>
+          </a:ln>
+          <a:effectLst/>
+        </p:spPr>
+        <p:style>
+          <a:lnRef idx="1">
+            <a:schemeClr val="accent1"/>
+          </a:lnRef>
+          <a:fillRef idx="3">
+            <a:schemeClr val="accent1"/>
+          </a:fillRef>
+          <a:effectRef idx="2">
+            <a:schemeClr val="accent1"/>
+          </a:effectRef>
+          <a:fontRef idx="minor">
+            <a:schemeClr val="lt1"/>
+          </a:fontRef>
+        </p:style>
+        <p:txBody>
+          <a:bodyPr rtlCol="0" anchor="ctr"/>
+          <a:lstStyle/>
+          <a:p>
+            <a:pPr algn="ctr"/>
+          </a:p>
+        </p:txBody>
+      </p:sp>
+      <p:sp>
+        <p:nvSpPr>
+          <p:cNvPr id="3" name="Rectangle 2"/>
+          <p:cNvSpPr/>
+          <p:nvPr/>
+        </p:nvSpPr>
+        <p:spPr>
+          <a:xfrm>
+            <a:off x="0" y="1051560"/>
+            <a:ext cx="12191695" cy="50800"/>
+          </a:xfrm>
+          <a:prstGeom prst="rect">
+            <a:avLst/>
+          </a:prstGeom>
+          <a:solidFill>
+            <a:srgbClr val="2E6DA4"/>
+          </a:solidFill>
+          <a:ln>
+            <a:noFill/>
+          </a:ln>
+          <a:effectLst/>
+        </p:spPr>
+        <p:style>
+          <a:lnRef idx="1">
+            <a:schemeClr val="accent1"/>
+          </a:lnRef>
+          <a:fillRef idx="3">
+            <a:schemeClr val="accent1"/>
+          </a:fillRef>
+          <a:effectRef idx="2">
+            <a:schemeClr val="accent1"/>
+          </a:effectRef>
+          <a:fontRef idx="minor">
+            <a:schemeClr val="lt1"/>
+          </a:fontRef>
+        </p:style>
+        <p:txBody>
+          <a:bodyPr rtlCol="0" anchor="ctr"/>
+          <a:lstStyle/>
+          <a:p>
+            <a:pPr algn="ctr"/>
+          </a:p>
+        </p:txBody>
+      </p:sp>
+      <p:sp>
+        <p:nvSpPr>
+          <p:cNvPr id="4" name="TextBox 3"/>
+          <p:cNvSpPr txBox="1"/>
+          <p:nvPr/>
+        </p:nvSpPr>
+        <p:spPr>
+          <a:xfrm>
+            <a:off x="457200" y="109728"/>
+            <a:ext cx="10058400" cy="274320"/>
+          </a:xfrm>
+          <a:prstGeom prst="rect">
+            <a:avLst/>
+          </a:prstGeom>
+          <a:noFill/>
+        </p:spPr>
+        <p:txBody>
+          <a:bodyPr wrap="square" anchor="t" lIns="50800" rIns="50800" tIns="25400" bIns="25400">
+            <a:spAutoFit/>
+          </a:bodyPr>
+          <a:lstStyle/>
+          <a:p>
+            <a:pPr algn="l">
+              <a:spcBef>
+                <a:spcPts val="0"/>
+              </a:spcBef>
+              <a:spcAft>
+                <a:spcPts val="400"/>
+              </a:spcAft>
+            </a:pPr>
+            <a:r>
+              <a:rPr sz="1200" b="1">
+                <a:solidFill>
+                  <a:srgbClr val="BBD3EA"/>
+                </a:solidFill>
+                <a:latin typeface="Yu Gothic"/>
+                <a:ea typeface="Yu Gothic"/>
+              </a:rPr>
+              <a:t>3｜治療</a:t>
+            </a:r>
+          </a:p>
+        </p:txBody>
+      </p:sp>
+      <p:sp>
+        <p:nvSpPr>
+          <p:cNvPr id="5" name="TextBox 4"/>
+          <p:cNvSpPr txBox="1"/>
+          <p:nvPr/>
+        </p:nvSpPr>
+        <p:spPr>
+          <a:xfrm>
+            <a:off x="457200" y="329184"/>
+            <a:ext cx="11247120" cy="685800"/>
+          </a:xfrm>
+          <a:prstGeom prst="rect">
+            <a:avLst/>
+          </a:prstGeom>
+          <a:noFill/>
+        </p:spPr>
+        <p:txBody>
+          <a:bodyPr wrap="square" anchor="ctr" lIns="50800" rIns="50800" tIns="25400" bIns="25400">
+            <a:spAutoFit/>
+          </a:bodyPr>
+          <a:lstStyle/>
+          <a:p>
+            <a:pPr algn="l">
+              <a:spcBef>
+                <a:spcPts val="0"/>
+              </a:spcBef>
+              <a:spcAft>
+                <a:spcPts val="400"/>
+              </a:spcAft>
+            </a:pPr>
+            <a:r>
+              <a:rPr sz="2600" b="1">
+                <a:solidFill>
+                  <a:srgbClr val="FFFFFF"/>
+                </a:solidFill>
+                <a:latin typeface="Yu Gothic"/>
+                <a:ea typeface="Yu Gothic"/>
+              </a:rPr>
+              <a:t>治療の現状と限界 — IVIg / SCIg</a:t>
+            </a:r>
+          </a:p>
+        </p:txBody>
+      </p:sp>
+      <p:sp>
+        <p:nvSpPr>
+          <p:cNvPr id="6" name="TextBox 5"/>
+          <p:cNvSpPr txBox="1"/>
+          <p:nvPr/>
+        </p:nvSpPr>
+        <p:spPr>
+          <a:xfrm>
+            <a:off x="548640" y="1325880"/>
+            <a:ext cx="11064240" cy="5029200"/>
+          </a:xfrm>
+          <a:prstGeom prst="rect">
+            <a:avLst/>
+          </a:prstGeom>
+          <a:noFill/>
+        </p:spPr>
+        <p:txBody>
+          <a:bodyPr wrap="square">
+            <a:spAutoFit/>
+          </a:bodyPr>
+          <a:lstStyle/>
+          <a:p>
+            <a:pPr>
+              <a:spcBef>
+                <a:spcPts val="200"/>
+              </a:spcBef>
+              <a:spcAft>
+                <a:spcPts val="700"/>
+              </a:spcAft>
+            </a:pPr>
+            <a:r>
+              <a:rPr sz="1800" b="1">
+                <a:solidFill>
+                  <a:srgbClr val="2E6DA4"/>
+                </a:solidFill>
+                <a:latin typeface="Yu Gothic"/>
+                <a:ea typeface="Yu Gothic"/>
+              </a:rPr>
+              <a:t>● </a:t>
+            </a:r>
+            <a:r>
+              <a:rPr sz="1800" b="1">
+                <a:solidFill>
+                  <a:srgbClr val="222222"/>
+                </a:solidFill>
+                <a:latin typeface="Yu Gothic"/>
+                <a:ea typeface="Yu Gothic"/>
+              </a:rPr>
+              <a:t>IVIgは唯一の承認治療・第一選択（実臨床の奏効率は高い：英国97.8%）</a:t>
+            </a:r>
+          </a:p>
+          <a:p>
+            <a:pPr lvl="1">
+              <a:spcBef>
+                <a:spcPts val="200"/>
+              </a:spcBef>
+              <a:spcAft>
+                <a:spcPts val="700"/>
+              </a:spcAft>
+            </a:pPr>
+            <a:r>
+              <a:rPr sz="1500" b="1">
+                <a:solidFill>
+                  <a:srgbClr val="555555"/>
+                </a:solidFill>
+                <a:latin typeface="Yu Gothic"/>
+                <a:ea typeface="Yu Gothic"/>
+              </a:rPr>
+              <a:t>– </a:t>
+            </a:r>
+            <a:r>
+              <a:rPr sz="1500" b="0">
+                <a:solidFill>
+                  <a:srgbClr val="555555"/>
+                </a:solidFill>
+                <a:latin typeface="Yu Gothic"/>
+                <a:ea typeface="Yu Gothic"/>
+              </a:rPr>
+              <a:t>SCIgはIVIgと同等の有効性・良好な忍容性（国内は未承認）</a:t>
+            </a:r>
+          </a:p>
+          <a:p>
+            <a:pPr>
+              <a:spcBef>
+                <a:spcPts val="800"/>
+              </a:spcBef>
+              <a:spcAft>
+                <a:spcPts val="700"/>
+              </a:spcAft>
+            </a:pPr>
+            <a:r>
+              <a:rPr sz="1800" b="1">
+                <a:solidFill>
+                  <a:srgbClr val="2E6DA4"/>
+                </a:solidFill>
+                <a:latin typeface="Yu Gothic"/>
+                <a:ea typeface="Yu Gothic"/>
+              </a:rPr>
+              <a:t>● </a:t>
+            </a:r>
+            <a:r>
+              <a:rPr sz="1800" b="1">
+                <a:solidFill>
+                  <a:srgbClr val="1F3A5F"/>
+                </a:solidFill>
+                <a:latin typeface="Yu Gothic"/>
+                <a:ea typeface="Yu Gothic"/>
+              </a:rPr>
+              <a:t>限界：維持療法下でも軸索変性が緩徐に進行、経時的に効果減弱</a:t>
+            </a:r>
+          </a:p>
+          <a:p>
+            <a:pPr lvl="1">
+              <a:spcBef>
+                <a:spcPts val="200"/>
+              </a:spcBef>
+              <a:spcAft>
+                <a:spcPts val="700"/>
+              </a:spcAft>
+            </a:pPr>
+            <a:r>
+              <a:rPr sz="1500" b="1">
+                <a:solidFill>
+                  <a:srgbClr val="555555"/>
+                </a:solidFill>
+                <a:latin typeface="Yu Gothic"/>
+                <a:ea typeface="Yu Gothic"/>
+              </a:rPr>
+              <a:t>– </a:t>
+            </a:r>
+            <a:r>
+              <a:rPr sz="1500" b="0">
+                <a:solidFill>
+                  <a:srgbClr val="555555"/>
+                </a:solidFill>
+                <a:latin typeface="Yu Gothic"/>
+                <a:ea typeface="Yu Gothic"/>
+              </a:rPr>
+              <a:t>約90%の患者が維持IVIg下でも軸索変性が進行（患者調査）</a:t>
+            </a:r>
+          </a:p>
+          <a:p>
+            <a:pPr lvl="1">
+              <a:spcBef>
+                <a:spcPts val="600"/>
+              </a:spcBef>
+              <a:spcAft>
+                <a:spcPts val="700"/>
+              </a:spcAft>
+            </a:pPr>
+            <a:r>
+              <a:rPr sz="1500" b="1">
+                <a:solidFill>
+                  <a:srgbClr val="2E7D32"/>
+                </a:solidFill>
+                <a:latin typeface="Yu Gothic"/>
+                <a:ea typeface="Yu Gothic"/>
+              </a:rPr>
+              <a:t>▶ </a:t>
+            </a:r>
+            <a:r>
+              <a:rPr sz="1500" b="1">
+                <a:solidFill>
+                  <a:srgbClr val="2E7D32"/>
+                </a:solidFill>
+                <a:latin typeface="Yu Gothic"/>
+                <a:ea typeface="Yu Gothic"/>
+              </a:rPr>
+              <a:t>→ 病態を修飾する新規治療（補体阻害）への強い期待</a:t>
+            </a:r>
+          </a:p>
+        </p:txBody>
+      </p:sp>
+      <p:sp>
+        <p:nvSpPr>
+          <p:cNvPr id="7" name="TextBox 6"/>
+          <p:cNvSpPr txBox="1"/>
+          <p:nvPr/>
+        </p:nvSpPr>
+        <p:spPr>
+          <a:xfrm>
+            <a:off x="548640" y="6355080"/>
+            <a:ext cx="11064240" cy="365760"/>
+          </a:xfrm>
+          <a:prstGeom prst="rect">
+            <a:avLst/>
+          </a:prstGeom>
+          <a:noFill/>
+        </p:spPr>
+        <p:txBody>
+          <a:bodyPr wrap="square" anchor="t" lIns="50800" rIns="50800" tIns="25400" bIns="25400">
+            <a:spAutoFit/>
+          </a:bodyPr>
+          <a:lstStyle/>
+          <a:p>
+            <a:pPr algn="l">
+              <a:spcBef>
+                <a:spcPts val="0"/>
+              </a:spcBef>
+              <a:spcAft>
+                <a:spcPts val="400"/>
+              </a:spcAft>
+            </a:pPr>
+            <a:r>
+              <a:rPr sz="1050" b="0">
+                <a:solidFill>
+                  <a:srgbClr val="555555"/>
+                </a:solidFill>
+                <a:latin typeface="Yu Gothic"/>
+                <a:ea typeface="Yu Gothic"/>
+              </a:rPr>
+              <a:t>出典：Rajabally YA, et al. JPNS 2025;30:e70018／Claytor et al. Muscle Nerve 2025 等</a:t>
+            </a:r>
+          </a:p>
+        </p:txBody>
+      </p:sp>
+      <p:sp>
+        <p:nvSpPr>
+          <p:cNvPr id="8" name="TextBox 7"/>
+          <p:cNvSpPr txBox="1"/>
+          <p:nvPr/>
+        </p:nvSpPr>
+        <p:spPr>
+          <a:xfrm>
+            <a:off x="11430000" y="109728"/>
+            <a:ext cx="640080" cy="274320"/>
+          </a:xfrm>
+          <a:prstGeom prst="rect">
+            <a:avLst/>
+          </a:prstGeom>
+          <a:noFill/>
+        </p:spPr>
+        <p:txBody>
+          <a:bodyPr wrap="square" anchor="t" lIns="50800" rIns="50800" tIns="25400" bIns="25400">
+            <a:spAutoFit/>
+          </a:bodyPr>
+          <a:lstStyle/>
+          <a:p>
+            <a:pPr algn="r">
+              <a:spcBef>
+                <a:spcPts val="0"/>
+              </a:spcBef>
+              <a:spcAft>
+                <a:spcPts val="400"/>
+              </a:spcAft>
+            </a:pPr>
+            <a:r>
+              <a:rPr sz="1200" b="1">
+                <a:solidFill>
+                  <a:srgbClr val="BBD3EA"/>
+                </a:solidFill>
+                <a:latin typeface="Yu Gothic"/>
+                <a:ea typeface="Yu Gothic"/>
+              </a:rPr>
+              <a:t>3</a:t>
+            </a:r>
+          </a:p>
+        </p:txBody>
+      </p:sp>
+    </p:spTree>
+  </p:cSld>
+  <p:clrMapOvr>
+    <a:masterClrMapping/>
+  </p:clrMapOvr>
+</p:sld>
+</file>
+
+<file path=ppt/slides/slide24.xml><?xml version="1.0" encoding="utf-8"?>
+<p:sld xmlns:a="http://schemas.openxmlformats.org/drawingml/2006/main" xmlns:p="http://schemas.openxmlformats.org/presentationml/2006/main" xmlns:r="http://schemas.openxmlformats.org/officeDocument/2006/relationships">
+  <p:cSld>
+    <p:spTree>
+      <p:nvGrpSpPr>
+        <p:cNvPr id="1" name=""/>
+        <p:cNvGrpSpPr/>
+        <p:nvPr/>
+      </p:nvGrpSpPr>
+      <p:grpSpPr/>
+      <p:sp>
+        <p:nvSpPr>
+          <p:cNvPr id="2" name="Rectangle 1"/>
+          <p:cNvSpPr/>
+          <p:nvPr/>
+        </p:nvSpPr>
+        <p:spPr>
+          <a:xfrm>
+            <a:off x="0" y="0"/>
+            <a:ext cx="12191695" cy="1051560"/>
+          </a:xfrm>
+          <a:prstGeom prst="rect">
+            <a:avLst/>
+          </a:prstGeom>
+          <a:solidFill>
+            <a:srgbClr val="1F3A5F"/>
+          </a:solidFill>
+          <a:ln>
+            <a:noFill/>
+          </a:ln>
+          <a:effectLst/>
+        </p:spPr>
+        <p:style>
+          <a:lnRef idx="1">
+            <a:schemeClr val="accent1"/>
+          </a:lnRef>
+          <a:fillRef idx="3">
+            <a:schemeClr val="accent1"/>
+          </a:fillRef>
+          <a:effectRef idx="2">
+            <a:schemeClr val="accent1"/>
+          </a:effectRef>
+          <a:fontRef idx="minor">
+            <a:schemeClr val="lt1"/>
+          </a:fontRef>
+        </p:style>
+        <p:txBody>
+          <a:bodyPr rtlCol="0" anchor="ctr"/>
+          <a:lstStyle/>
+          <a:p>
+            <a:pPr algn="ctr"/>
+          </a:p>
+        </p:txBody>
+      </p:sp>
+      <p:sp>
+        <p:nvSpPr>
+          <p:cNvPr id="3" name="Rectangle 2"/>
+          <p:cNvSpPr/>
+          <p:nvPr/>
+        </p:nvSpPr>
+        <p:spPr>
+          <a:xfrm>
+            <a:off x="0" y="1051560"/>
+            <a:ext cx="12191695" cy="50800"/>
+          </a:xfrm>
+          <a:prstGeom prst="rect">
+            <a:avLst/>
+          </a:prstGeom>
+          <a:solidFill>
+            <a:srgbClr val="2E6DA4"/>
+          </a:solidFill>
+          <a:ln>
+            <a:noFill/>
+          </a:ln>
+          <a:effectLst/>
+        </p:spPr>
+        <p:style>
+          <a:lnRef idx="1">
+            <a:schemeClr val="accent1"/>
+          </a:lnRef>
+          <a:fillRef idx="3">
+            <a:schemeClr val="accent1"/>
+          </a:fillRef>
+          <a:effectRef idx="2">
+            <a:schemeClr val="accent1"/>
+          </a:effectRef>
+          <a:fontRef idx="minor">
+            <a:schemeClr val="lt1"/>
+          </a:fontRef>
+        </p:style>
+        <p:txBody>
+          <a:bodyPr rtlCol="0" anchor="ctr"/>
+          <a:lstStyle/>
+          <a:p>
+            <a:pPr algn="ctr"/>
+          </a:p>
+        </p:txBody>
+      </p:sp>
+      <p:sp>
+        <p:nvSpPr>
+          <p:cNvPr id="4" name="TextBox 3"/>
+          <p:cNvSpPr txBox="1"/>
+          <p:nvPr/>
+        </p:nvSpPr>
+        <p:spPr>
+          <a:xfrm>
+            <a:off x="457200" y="109728"/>
+            <a:ext cx="10058400" cy="274320"/>
+          </a:xfrm>
+          <a:prstGeom prst="rect">
+            <a:avLst/>
+          </a:prstGeom>
+          <a:noFill/>
+        </p:spPr>
+        <p:txBody>
+          <a:bodyPr wrap="square" anchor="t" lIns="50800" rIns="50800" tIns="25400" bIns="25400">
+            <a:spAutoFit/>
+          </a:bodyPr>
+          <a:lstStyle/>
+          <a:p>
+            <a:pPr algn="l">
+              <a:spcBef>
+                <a:spcPts val="0"/>
+              </a:spcBef>
+              <a:spcAft>
+                <a:spcPts val="400"/>
+              </a:spcAft>
+            </a:pPr>
+            <a:r>
+              <a:rPr sz="1200" b="1">
+                <a:solidFill>
+                  <a:srgbClr val="BBD3EA"/>
+                </a:solidFill>
+                <a:latin typeface="Yu Gothic"/>
+                <a:ea typeface="Yu Gothic"/>
+              </a:rPr>
+              <a:t>3｜治療（新）</a:t>
+            </a:r>
+          </a:p>
+        </p:txBody>
+      </p:sp>
+      <p:sp>
+        <p:nvSpPr>
+          <p:cNvPr id="5" name="TextBox 4"/>
+          <p:cNvSpPr txBox="1"/>
+          <p:nvPr/>
+        </p:nvSpPr>
+        <p:spPr>
+          <a:xfrm>
+            <a:off x="457200" y="329184"/>
+            <a:ext cx="11247120" cy="685800"/>
+          </a:xfrm>
+          <a:prstGeom prst="rect">
+            <a:avLst/>
+          </a:prstGeom>
+          <a:noFill/>
+        </p:spPr>
+        <p:txBody>
+          <a:bodyPr wrap="square" anchor="ctr" lIns="50800" rIns="50800" tIns="25400" bIns="25400">
+            <a:spAutoFit/>
+          </a:bodyPr>
+          <a:lstStyle/>
+          <a:p>
+            <a:pPr algn="l">
+              <a:spcBef>
+                <a:spcPts val="0"/>
+              </a:spcBef>
+              <a:spcAft>
+                <a:spcPts val="400"/>
+              </a:spcAft>
+            </a:pPr>
+            <a:r>
+              <a:rPr sz="2600" b="1">
+                <a:solidFill>
+                  <a:srgbClr val="FFFFFF"/>
+                </a:solidFill>
+                <a:latin typeface="Yu Gothic"/>
+                <a:ea typeface="Yu Gothic"/>
+              </a:rPr>
+              <a:t>IVIg の最適化と長期アウトカム（2025–2026）</a:t>
+            </a:r>
+          </a:p>
+        </p:txBody>
+      </p:sp>
+      <p:sp>
+        <p:nvSpPr>
+          <p:cNvPr id="6" name="TextBox 5"/>
+          <p:cNvSpPr txBox="1"/>
+          <p:nvPr/>
+        </p:nvSpPr>
+        <p:spPr>
+          <a:xfrm>
+            <a:off x="548640" y="1325880"/>
+            <a:ext cx="11064240" cy="5029200"/>
+          </a:xfrm>
+          <a:prstGeom prst="rect">
+            <a:avLst/>
+          </a:prstGeom>
+          <a:noFill/>
+        </p:spPr>
+        <p:txBody>
+          <a:bodyPr wrap="square">
+            <a:spAutoFit/>
+          </a:bodyPr>
+          <a:lstStyle/>
+          <a:p>
+            <a:pPr>
+              <a:spcBef>
+                <a:spcPts val="200"/>
+              </a:spcBef>
+              <a:spcAft>
+                <a:spcPts val="700"/>
+              </a:spcAft>
+            </a:pPr>
+            <a:r>
+              <a:rPr sz="1800" b="1">
+                <a:solidFill>
+                  <a:srgbClr val="2E6DA4"/>
+                </a:solidFill>
+                <a:latin typeface="Yu Gothic"/>
+                <a:ea typeface="Yu Gothic"/>
+              </a:rPr>
+              <a:t>● </a:t>
+            </a:r>
+            <a:r>
+              <a:rPr sz="1800" b="1">
+                <a:solidFill>
+                  <a:srgbClr val="222222"/>
+                </a:solidFill>
+                <a:latin typeface="Yu Gothic"/>
+                <a:ea typeface="Yu Gothic"/>
+              </a:rPr>
+              <a:t>高頻度IVIg（年2回超）で遠位CMAP振幅・mRSが有意改善、CB数も減少</a:t>
+            </a:r>
+          </a:p>
+          <a:p>
+            <a:pPr lvl="1">
+              <a:spcBef>
+                <a:spcPts val="200"/>
+              </a:spcBef>
+              <a:spcAft>
+                <a:spcPts val="700"/>
+              </a:spcAft>
+            </a:pPr>
+            <a:r>
+              <a:rPr sz="1500" b="1">
+                <a:solidFill>
+                  <a:srgbClr val="555555"/>
+                </a:solidFill>
+                <a:latin typeface="Yu Gothic"/>
+                <a:ea typeface="Yu Gothic"/>
+              </a:rPr>
+              <a:t>– </a:t>
+            </a:r>
+            <a:r>
+              <a:rPr sz="1500" b="0">
+                <a:solidFill>
+                  <a:srgbClr val="555555"/>
+                </a:solidFill>
+                <a:latin typeface="Yu Gothic"/>
+                <a:ea typeface="Yu Gothic"/>
+              </a:rPr>
+              <a:t>過少治療だった症例でも改善余地（B=2.88, P&lt;0.001／中国・地方3施設）</a:t>
+            </a:r>
+          </a:p>
+          <a:p>
+            <a:pPr>
+              <a:spcBef>
+                <a:spcPts val="800"/>
+              </a:spcBef>
+              <a:spcAft>
+                <a:spcPts val="700"/>
+              </a:spcAft>
+            </a:pPr>
+            <a:r>
+              <a:rPr sz="1800" b="1">
+                <a:solidFill>
+                  <a:srgbClr val="2E6DA4"/>
+                </a:solidFill>
+                <a:latin typeface="Yu Gothic"/>
+                <a:ea typeface="Yu Gothic"/>
+              </a:rPr>
+              <a:t>● </a:t>
+            </a:r>
+            <a:r>
+              <a:rPr sz="1800" b="1">
+                <a:solidFill>
+                  <a:srgbClr val="1F3A5F"/>
+                </a:solidFill>
+                <a:latin typeface="Yu Gothic"/>
+                <a:ea typeface="Yu Gothic"/>
+              </a:rPr>
+              <a:t>個別最適化用量で MMN-RODS が90.6%(29/32)で6年以上改善維持</a:t>
+            </a:r>
+          </a:p>
+          <a:p>
+            <a:pPr lvl="1">
+              <a:spcBef>
+                <a:spcPts val="200"/>
+              </a:spcBef>
+              <a:spcAft>
+                <a:spcPts val="700"/>
+              </a:spcAft>
+            </a:pPr>
+            <a:r>
+              <a:rPr sz="1500" b="1">
+                <a:solidFill>
+                  <a:srgbClr val="555555"/>
+                </a:solidFill>
+                <a:latin typeface="Yu Gothic"/>
+                <a:ea typeface="Yu Gothic"/>
+              </a:rPr>
+              <a:t>– </a:t>
+            </a:r>
+            <a:r>
+              <a:rPr sz="1500" b="0">
+                <a:solidFill>
+                  <a:srgbClr val="555555"/>
+                </a:solidFill>
+                <a:latin typeface="Yu Gothic"/>
+                <a:ea typeface="Yu Gothic"/>
+              </a:rPr>
+              <a:t>従来の「経時的に低下」像と対照的。用量は施設間差大（18.8〜33.9 g/週）</a:t>
+            </a:r>
+          </a:p>
+          <a:p>
+            <a:pPr lvl="1">
+              <a:spcBef>
+                <a:spcPts val="600"/>
+              </a:spcBef>
+              <a:spcAft>
+                <a:spcPts val="700"/>
+              </a:spcAft>
+            </a:pPr>
+            <a:r>
+              <a:rPr sz="1500" b="1">
+                <a:solidFill>
+                  <a:srgbClr val="555555"/>
+                </a:solidFill>
+                <a:latin typeface="Yu Gothic"/>
+                <a:ea typeface="Yu Gothic"/>
+              </a:rPr>
+              <a:t>▶ </a:t>
+            </a:r>
+            <a:r>
+              <a:rPr sz="1500" b="1">
+                <a:solidFill>
+                  <a:srgbClr val="2E6DA4"/>
+                </a:solidFill>
+                <a:latin typeface="Yu Gothic"/>
+                <a:ea typeface="Yu Gothic"/>
+              </a:rPr>
+              <a:t>→ 早期・十分量・個別最適化が鍵（減量判断のLLM支援も報告）</a:t>
+            </a:r>
+          </a:p>
+        </p:txBody>
+      </p:sp>
+      <p:sp>
+        <p:nvSpPr>
+          <p:cNvPr id="7" name="TextBox 6"/>
+          <p:cNvSpPr txBox="1"/>
+          <p:nvPr/>
+        </p:nvSpPr>
+        <p:spPr>
+          <a:xfrm>
+            <a:off x="548640" y="6355080"/>
+            <a:ext cx="11064240" cy="365760"/>
+          </a:xfrm>
+          <a:prstGeom prst="rect">
+            <a:avLst/>
+          </a:prstGeom>
+          <a:noFill/>
+        </p:spPr>
+        <p:txBody>
+          <a:bodyPr wrap="square" anchor="t" lIns="50800" rIns="50800" tIns="25400" bIns="25400">
+            <a:spAutoFit/>
+          </a:bodyPr>
+          <a:lstStyle/>
+          <a:p>
+            <a:pPr algn="l">
+              <a:spcBef>
+                <a:spcPts val="0"/>
+              </a:spcBef>
+              <a:spcAft>
+                <a:spcPts val="400"/>
+              </a:spcAft>
+            </a:pPr>
+            <a:r>
+              <a:rPr sz="1050" b="0">
+                <a:solidFill>
+                  <a:srgbClr val="555555"/>
+                </a:solidFill>
+                <a:latin typeface="Yu Gothic"/>
+                <a:ea typeface="Yu Gothic"/>
+              </a:rPr>
+              <a:t>出典：Zhou L, et al. BMC Neurol 2026／Noushad MA, et al. JPNS 2025;30:e70079／Burton E, et al. Transfus Med 2026</a:t>
+            </a:r>
+          </a:p>
+        </p:txBody>
+      </p:sp>
+      <p:sp>
+        <p:nvSpPr>
+          <p:cNvPr id="8" name="TextBox 7"/>
+          <p:cNvSpPr txBox="1"/>
+          <p:nvPr/>
+        </p:nvSpPr>
+        <p:spPr>
+          <a:xfrm>
+            <a:off x="11430000" y="109728"/>
+            <a:ext cx="640080" cy="274320"/>
+          </a:xfrm>
+          <a:prstGeom prst="rect">
+            <a:avLst/>
+          </a:prstGeom>
+          <a:noFill/>
+        </p:spPr>
+        <p:txBody>
+          <a:bodyPr wrap="square" anchor="t" lIns="50800" rIns="50800" tIns="25400" bIns="25400">
+            <a:spAutoFit/>
+          </a:bodyPr>
+          <a:lstStyle/>
+          <a:p>
+            <a:pPr algn="r">
+              <a:spcBef>
+                <a:spcPts val="0"/>
+              </a:spcBef>
+              <a:spcAft>
+                <a:spcPts val="400"/>
+              </a:spcAft>
+            </a:pPr>
+            <a:r>
+              <a:rPr sz="1200" b="1">
+                <a:solidFill>
+                  <a:srgbClr val="BBD3EA"/>
+                </a:solidFill>
+                <a:latin typeface="Yu Gothic"/>
+                <a:ea typeface="Yu Gothic"/>
+              </a:rPr>
+              <a:t>3</a:t>
+            </a:r>
+          </a:p>
+        </p:txBody>
+      </p:sp>
+    </p:spTree>
+  </p:cSld>
+  <p:clrMapOvr>
+    <a:masterClrMapping/>
+  </p:clrMapOvr>
+</p:sld>
+</file>
+
+<file path=ppt/slides/slide25.xml><?xml version="1.0" encoding="utf-8"?>
+<p:sld xmlns:a="http://schemas.openxmlformats.org/drawingml/2006/main" xmlns:p="http://schemas.openxmlformats.org/presentationml/2006/main" xmlns:r="http://schemas.openxmlformats.org/officeDocument/2006/relationships">
+  <p:cSld>
+    <p:spTree>
+      <p:nvGrpSpPr>
+        <p:cNvPr id="1" name=""/>
+        <p:cNvGrpSpPr/>
+        <p:nvPr/>
+      </p:nvGrpSpPr>
+      <p:grpSpPr/>
+      <p:sp>
+        <p:nvSpPr>
+          <p:cNvPr id="2" name="Rectangle 1"/>
+          <p:cNvSpPr/>
+          <p:nvPr/>
+        </p:nvSpPr>
+        <p:spPr>
+          <a:xfrm>
+            <a:off x="0" y="0"/>
+            <a:ext cx="12191695" cy="1051560"/>
+          </a:xfrm>
+          <a:prstGeom prst="rect">
+            <a:avLst/>
+          </a:prstGeom>
+          <a:solidFill>
+            <a:srgbClr val="1F3A5F"/>
+          </a:solidFill>
+          <a:ln>
+            <a:noFill/>
+          </a:ln>
+          <a:effectLst/>
+        </p:spPr>
+        <p:style>
+          <a:lnRef idx="1">
+            <a:schemeClr val="accent1"/>
+          </a:lnRef>
+          <a:fillRef idx="3">
+            <a:schemeClr val="accent1"/>
+          </a:fillRef>
+          <a:effectRef idx="2">
+            <a:schemeClr val="accent1"/>
+          </a:effectRef>
+          <a:fontRef idx="minor">
+            <a:schemeClr val="lt1"/>
+          </a:fontRef>
+        </p:style>
+        <p:txBody>
+          <a:bodyPr rtlCol="0" anchor="ctr"/>
+          <a:lstStyle/>
+          <a:p>
+            <a:pPr algn="ctr"/>
+          </a:p>
+        </p:txBody>
+      </p:sp>
+      <p:sp>
+        <p:nvSpPr>
+          <p:cNvPr id="3" name="Rectangle 2"/>
+          <p:cNvSpPr/>
+          <p:nvPr/>
+        </p:nvSpPr>
+        <p:spPr>
+          <a:xfrm>
+            <a:off x="0" y="1051560"/>
+            <a:ext cx="12191695" cy="50800"/>
+          </a:xfrm>
+          <a:prstGeom prst="rect">
+            <a:avLst/>
+          </a:prstGeom>
+          <a:solidFill>
+            <a:srgbClr val="2E6DA4"/>
+          </a:solidFill>
+          <a:ln>
+            <a:noFill/>
+          </a:ln>
+          <a:effectLst/>
+        </p:spPr>
+        <p:style>
+          <a:lnRef idx="1">
+            <a:schemeClr val="accent1"/>
+          </a:lnRef>
+          <a:fillRef idx="3">
+            <a:schemeClr val="accent1"/>
+          </a:fillRef>
+          <a:effectRef idx="2">
+            <a:schemeClr val="accent1"/>
+          </a:effectRef>
+          <a:fontRef idx="minor">
+            <a:schemeClr val="lt1"/>
+          </a:fontRef>
+        </p:style>
+        <p:txBody>
+          <a:bodyPr rtlCol="0" anchor="ctr"/>
+          <a:lstStyle/>
+          <a:p>
+            <a:pPr algn="ctr"/>
+          </a:p>
+        </p:txBody>
+      </p:sp>
+      <p:sp>
+        <p:nvSpPr>
+          <p:cNvPr id="4" name="TextBox 3"/>
+          <p:cNvSpPr txBox="1"/>
+          <p:nvPr/>
+        </p:nvSpPr>
+        <p:spPr>
+          <a:xfrm>
+            <a:off x="457200" y="109728"/>
+            <a:ext cx="10058400" cy="274320"/>
+          </a:xfrm>
+          <a:prstGeom prst="rect">
+            <a:avLst/>
+          </a:prstGeom>
+          <a:noFill/>
+        </p:spPr>
+        <p:txBody>
+          <a:bodyPr wrap="square" anchor="t" lIns="50800" rIns="50800" tIns="25400" bIns="25400">
+            <a:spAutoFit/>
+          </a:bodyPr>
+          <a:lstStyle/>
+          <a:p>
+            <a:pPr algn="l">
+              <a:spcBef>
+                <a:spcPts val="0"/>
+              </a:spcBef>
+              <a:spcAft>
+                <a:spcPts val="400"/>
+              </a:spcAft>
+            </a:pPr>
+            <a:r>
+              <a:rPr sz="1200" b="1">
+                <a:solidFill>
+                  <a:srgbClr val="BBD3EA"/>
+                </a:solidFill>
+                <a:latin typeface="Yu Gothic"/>
+                <a:ea typeface="Yu Gothic"/>
+              </a:rPr>
+              <a:t>3｜治療（新）</a:t>
+            </a:r>
+          </a:p>
+        </p:txBody>
+      </p:sp>
+      <p:sp>
+        <p:nvSpPr>
+          <p:cNvPr id="5" name="TextBox 4"/>
+          <p:cNvSpPr txBox="1"/>
+          <p:nvPr/>
+        </p:nvSpPr>
+        <p:spPr>
+          <a:xfrm>
+            <a:off x="457200" y="329184"/>
+            <a:ext cx="11247120" cy="685800"/>
+          </a:xfrm>
+          <a:prstGeom prst="rect">
+            <a:avLst/>
+          </a:prstGeom>
+          <a:noFill/>
+        </p:spPr>
+        <p:txBody>
+          <a:bodyPr wrap="square" anchor="ctr" lIns="50800" rIns="50800" tIns="25400" bIns="25400">
+            <a:spAutoFit/>
+          </a:bodyPr>
+          <a:lstStyle/>
+          <a:p>
+            <a:pPr algn="l">
+              <a:spcBef>
+                <a:spcPts val="0"/>
+              </a:spcBef>
+              <a:spcAft>
+                <a:spcPts val="400"/>
+              </a:spcAft>
+            </a:pPr>
+            <a:r>
+              <a:rPr sz="2600" b="1">
+                <a:solidFill>
+                  <a:srgbClr val="FFFFFF"/>
+                </a:solidFill>
+                <a:latin typeface="Yu Gothic"/>
+                <a:ea typeface="Yu Gothic"/>
+              </a:rPr>
+              <a:t>残された課題 — 非運動症状の負担 と SCIg の実際</a:t>
+            </a:r>
+          </a:p>
+        </p:txBody>
+      </p:sp>
+      <p:sp>
+        <p:nvSpPr>
+          <p:cNvPr id="6" name="TextBox 5"/>
+          <p:cNvSpPr txBox="1"/>
+          <p:nvPr/>
+        </p:nvSpPr>
+        <p:spPr>
+          <a:xfrm>
+            <a:off x="548640" y="1325880"/>
+            <a:ext cx="11064240" cy="5029200"/>
+          </a:xfrm>
+          <a:prstGeom prst="rect">
+            <a:avLst/>
+          </a:prstGeom>
+          <a:noFill/>
+        </p:spPr>
+        <p:txBody>
+          <a:bodyPr wrap="square">
+            <a:spAutoFit/>
+          </a:bodyPr>
+          <a:lstStyle/>
+          <a:p>
+            <a:pPr>
+              <a:spcBef>
+                <a:spcPts val="200"/>
+              </a:spcBef>
+              <a:spcAft>
+                <a:spcPts val="700"/>
+              </a:spcAft>
+            </a:pPr>
+            <a:r>
+              <a:rPr sz="1800" b="1">
+                <a:solidFill>
+                  <a:srgbClr val="2E6DA4"/>
+                </a:solidFill>
+                <a:latin typeface="Yu Gothic"/>
+                <a:ea typeface="Yu Gothic"/>
+              </a:rPr>
+              <a:t>● </a:t>
+            </a:r>
+            <a:r>
+              <a:rPr sz="1800" b="1">
+                <a:solidFill>
+                  <a:srgbClr val="1F3A5F"/>
+                </a:solidFill>
+                <a:latin typeface="Yu Gothic"/>
+                <a:ea typeface="Yu Gothic"/>
+              </a:rPr>
+              <a:t>6年追跡：運動障害(INCAT)は安定だが、疲労17→58%・うつ8→25%に増悪</a:t>
+            </a:r>
+          </a:p>
+          <a:p>
+            <a:pPr lvl="1">
+              <a:spcBef>
+                <a:spcPts val="200"/>
+              </a:spcBef>
+              <a:spcAft>
+                <a:spcPts val="700"/>
+              </a:spcAft>
+            </a:pPr>
+            <a:r>
+              <a:rPr sz="1500" b="1">
+                <a:solidFill>
+                  <a:srgbClr val="555555"/>
+                </a:solidFill>
+                <a:latin typeface="Yu Gothic"/>
+                <a:ea typeface="Yu Gothic"/>
+              </a:rPr>
+              <a:t>– </a:t>
+            </a:r>
+            <a:r>
+              <a:rPr sz="1500" b="0">
+                <a:solidFill>
+                  <a:srgbClr val="555555"/>
+                </a:solidFill>
+                <a:latin typeface="Yu Gothic"/>
+                <a:ea typeface="Yu Gothic"/>
+              </a:rPr>
+              <a:t>免疫治療は運動を安定させるが非運動症状は防げない → 疲労・メンタルのスクリーニング</a:t>
+            </a:r>
+          </a:p>
+          <a:p>
+            <a:pPr>
+              <a:spcBef>
+                <a:spcPts val="800"/>
+              </a:spcBef>
+              <a:spcAft>
+                <a:spcPts val="700"/>
+              </a:spcAft>
+            </a:pPr>
+            <a:r>
+              <a:rPr sz="1800" b="1">
+                <a:solidFill>
+                  <a:srgbClr val="2E6DA4"/>
+                </a:solidFill>
+                <a:latin typeface="Yu Gothic"/>
+                <a:ea typeface="Yu Gothic"/>
+              </a:rPr>
+              <a:t>● </a:t>
+            </a:r>
+            <a:r>
+              <a:rPr sz="1800" b="1">
+                <a:solidFill>
+                  <a:srgbClr val="222222"/>
+                </a:solidFill>
+                <a:latin typeface="Yu Gothic"/>
+                <a:ea typeface="Yu Gothic"/>
+              </a:rPr>
+              <a:t>IVIg→SCIg 切替：MMNの77%が12か月継続・安定、満足度高い</a:t>
+            </a:r>
+          </a:p>
+          <a:p>
+            <a:pPr lvl="1">
+              <a:spcBef>
+                <a:spcPts val="200"/>
+              </a:spcBef>
+              <a:spcAft>
+                <a:spcPts val="700"/>
+              </a:spcAft>
+            </a:pPr>
+            <a:r>
+              <a:rPr sz="1500" b="1">
+                <a:solidFill>
+                  <a:srgbClr val="555555"/>
+                </a:solidFill>
+                <a:latin typeface="Yu Gothic"/>
+                <a:ea typeface="Yu Gothic"/>
+              </a:rPr>
+              <a:t>– </a:t>
+            </a:r>
+            <a:r>
+              <a:rPr sz="1500" b="0">
+                <a:solidFill>
+                  <a:srgbClr val="555555"/>
+                </a:solidFill>
+                <a:latin typeface="Yu Gothic"/>
+                <a:ea typeface="Yu Gothic"/>
+              </a:rPr>
+              <a:t>ただし40%で増量など治療強化が必要（本邦は保険適用外）</a:t>
+            </a:r>
+          </a:p>
+          <a:p>
+            <a:pPr lvl="1">
+              <a:spcBef>
+                <a:spcPts val="600"/>
+              </a:spcBef>
+              <a:spcAft>
+                <a:spcPts val="700"/>
+              </a:spcAft>
+            </a:pPr>
+            <a:r>
+              <a:rPr sz="1500" b="1">
+                <a:solidFill>
+                  <a:srgbClr val="555555"/>
+                </a:solidFill>
+                <a:latin typeface="Yu Gothic"/>
+                <a:ea typeface="Yu Gothic"/>
+              </a:rPr>
+              <a:t>▶ </a:t>
+            </a:r>
+            <a:r>
+              <a:rPr sz="1500" b="1">
+                <a:solidFill>
+                  <a:srgbClr val="2E6DA4"/>
+                </a:solidFill>
+                <a:latin typeface="Yu Gothic"/>
+                <a:ea typeface="Yu Gothic"/>
+              </a:rPr>
+              <a:t>→ 多職種での包括的マネジメントとSCIgという在宅選択肢</a:t>
+            </a:r>
+          </a:p>
+        </p:txBody>
+      </p:sp>
+      <p:sp>
+        <p:nvSpPr>
+          <p:cNvPr id="7" name="TextBox 6"/>
+          <p:cNvSpPr txBox="1"/>
+          <p:nvPr/>
+        </p:nvSpPr>
+        <p:spPr>
+          <a:xfrm>
+            <a:off x="548640" y="6355080"/>
+            <a:ext cx="11064240" cy="365760"/>
+          </a:xfrm>
+          <a:prstGeom prst="rect">
+            <a:avLst/>
+          </a:prstGeom>
+          <a:noFill/>
+        </p:spPr>
+        <p:txBody>
+          <a:bodyPr wrap="square" anchor="t" lIns="50800" rIns="50800" tIns="25400" bIns="25400">
+            <a:spAutoFit/>
+          </a:bodyPr>
+          <a:lstStyle/>
+          <a:p>
+            <a:pPr algn="l">
+              <a:spcBef>
+                <a:spcPts val="0"/>
+              </a:spcBef>
+              <a:spcAft>
+                <a:spcPts val="400"/>
+              </a:spcAft>
+            </a:pPr>
+            <a:r>
+              <a:rPr sz="1050" b="0">
+                <a:solidFill>
+                  <a:srgbClr val="555555"/>
+                </a:solidFill>
+                <a:latin typeface="Yu Gothic"/>
+                <a:ea typeface="Yu Gothic"/>
+              </a:rPr>
+              <a:t>出典：Basta I, et al. Front Hum Neurosci 2026;20:1824742／Gingele S, et al. Neurol Ther 2026;15:165-177</a:t>
+            </a:r>
+          </a:p>
+        </p:txBody>
+      </p:sp>
+      <p:sp>
+        <p:nvSpPr>
+          <p:cNvPr id="8" name="TextBox 7"/>
+          <p:cNvSpPr txBox="1"/>
+          <p:nvPr/>
+        </p:nvSpPr>
+        <p:spPr>
+          <a:xfrm>
+            <a:off x="11430000" y="109728"/>
+            <a:ext cx="640080" cy="274320"/>
+          </a:xfrm>
+          <a:prstGeom prst="rect">
+            <a:avLst/>
+          </a:prstGeom>
+          <a:noFill/>
+        </p:spPr>
+        <p:txBody>
+          <a:bodyPr wrap="square" anchor="t" lIns="50800" rIns="50800" tIns="25400" bIns="25400">
+            <a:spAutoFit/>
+          </a:bodyPr>
+          <a:lstStyle/>
+          <a:p>
+            <a:pPr algn="r">
+              <a:spcBef>
+                <a:spcPts val="0"/>
+              </a:spcBef>
+              <a:spcAft>
+                <a:spcPts val="400"/>
+              </a:spcAft>
+            </a:pPr>
+            <a:r>
+              <a:rPr sz="1200" b="1">
+                <a:solidFill>
+                  <a:srgbClr val="BBD3EA"/>
+                </a:solidFill>
+                <a:latin typeface="Yu Gothic"/>
+                <a:ea typeface="Yu Gothic"/>
+              </a:rPr>
+              <a:t>3</a:t>
+            </a:r>
+          </a:p>
+        </p:txBody>
+      </p:sp>
+    </p:spTree>
+  </p:cSld>
+  <p:clrMapOvr>
+    <a:masterClrMapping/>
+  </p:clrMapOvr>
+</p:sld>
+</file>
+
+<file path=ppt/slides/slide26.xml><?xml version="1.0" encoding="utf-8"?>
+<p:sld xmlns:a="http://schemas.openxmlformats.org/drawingml/2006/main" xmlns:p="http://schemas.openxmlformats.org/presentationml/2006/main" xmlns:r="http://schemas.openxmlformats.org/officeDocument/2006/relationships">
+  <p:cSld>
+    <p:spTree>
+      <p:nvGrpSpPr>
+        <p:cNvPr id="1" name=""/>
+        <p:cNvGrpSpPr/>
+        <p:nvPr/>
+      </p:nvGrpSpPr>
+      <p:grpSpPr/>
+      <p:sp>
+        <p:nvSpPr>
+          <p:cNvPr id="2" name="Rectangle 1"/>
+          <p:cNvSpPr/>
+          <p:nvPr/>
+        </p:nvSpPr>
+        <p:spPr>
+          <a:xfrm>
+            <a:off x="0" y="0"/>
+            <a:ext cx="12191695" cy="1051560"/>
+          </a:xfrm>
+          <a:prstGeom prst="rect">
+            <a:avLst/>
+          </a:prstGeom>
+          <a:solidFill>
+            <a:srgbClr val="1F3A5F"/>
+          </a:solidFill>
+          <a:ln>
+            <a:noFill/>
+          </a:ln>
+          <a:effectLst/>
+        </p:spPr>
+        <p:style>
+          <a:lnRef idx="1">
+            <a:schemeClr val="accent1"/>
+          </a:lnRef>
+          <a:fillRef idx="3">
+            <a:schemeClr val="accent1"/>
+          </a:fillRef>
+          <a:effectRef idx="2">
+            <a:schemeClr val="accent1"/>
+          </a:effectRef>
+          <a:fontRef idx="minor">
+            <a:schemeClr val="lt1"/>
+          </a:fontRef>
+        </p:style>
+        <p:txBody>
+          <a:bodyPr rtlCol="0" anchor="ctr"/>
+          <a:lstStyle/>
+          <a:p>
+            <a:pPr algn="ctr"/>
+          </a:p>
+        </p:txBody>
+      </p:sp>
+      <p:sp>
+        <p:nvSpPr>
+          <p:cNvPr id="3" name="Rectangle 2"/>
+          <p:cNvSpPr/>
+          <p:nvPr/>
+        </p:nvSpPr>
+        <p:spPr>
+          <a:xfrm>
+            <a:off x="0" y="1051560"/>
+            <a:ext cx="12191695" cy="50800"/>
+          </a:xfrm>
+          <a:prstGeom prst="rect">
+            <a:avLst/>
+          </a:prstGeom>
+          <a:solidFill>
+            <a:srgbClr val="2E6DA4"/>
+          </a:solidFill>
+          <a:ln>
+            <a:noFill/>
+          </a:ln>
+          <a:effectLst/>
+        </p:spPr>
+        <p:style>
+          <a:lnRef idx="1">
+            <a:schemeClr val="accent1"/>
+          </a:lnRef>
+          <a:fillRef idx="3">
+            <a:schemeClr val="accent1"/>
+          </a:fillRef>
+          <a:effectRef idx="2">
+            <a:schemeClr val="accent1"/>
+          </a:effectRef>
+          <a:fontRef idx="minor">
+            <a:schemeClr val="lt1"/>
+          </a:fontRef>
+        </p:style>
+        <p:txBody>
+          <a:bodyPr rtlCol="0" anchor="ctr"/>
+          <a:lstStyle/>
+          <a:p>
+            <a:pPr algn="ctr"/>
+          </a:p>
+        </p:txBody>
+      </p:sp>
+      <p:sp>
+        <p:nvSpPr>
+          <p:cNvPr id="4" name="TextBox 3"/>
+          <p:cNvSpPr txBox="1"/>
+          <p:nvPr/>
+        </p:nvSpPr>
+        <p:spPr>
+          <a:xfrm>
+            <a:off x="457200" y="109728"/>
+            <a:ext cx="10058400" cy="274320"/>
+          </a:xfrm>
+          <a:prstGeom prst="rect">
+            <a:avLst/>
+          </a:prstGeom>
+          <a:noFill/>
+        </p:spPr>
+        <p:txBody>
+          <a:bodyPr wrap="square" anchor="t" lIns="50800" rIns="50800" tIns="25400" bIns="25400">
+            <a:spAutoFit/>
+          </a:bodyPr>
+          <a:lstStyle/>
+          <a:p>
+            <a:pPr algn="l">
+              <a:spcBef>
+                <a:spcPts val="0"/>
+              </a:spcBef>
+              <a:spcAft>
+                <a:spcPts val="400"/>
+              </a:spcAft>
+            </a:pPr>
+            <a:r>
+              <a:rPr sz="1200" b="1">
+                <a:solidFill>
+                  <a:srgbClr val="BBD3EA"/>
+                </a:solidFill>
+                <a:latin typeface="Yu Gothic"/>
+                <a:ea typeface="Yu Gothic"/>
+              </a:rPr>
+              <a:t>3｜治療</a:t>
+            </a:r>
+          </a:p>
+        </p:txBody>
+      </p:sp>
+      <p:sp>
+        <p:nvSpPr>
+          <p:cNvPr id="5" name="TextBox 4"/>
+          <p:cNvSpPr txBox="1"/>
+          <p:nvPr/>
+        </p:nvSpPr>
+        <p:spPr>
+          <a:xfrm>
+            <a:off x="457200" y="329184"/>
+            <a:ext cx="11247120" cy="685800"/>
+          </a:xfrm>
+          <a:prstGeom prst="rect">
+            <a:avLst/>
+          </a:prstGeom>
+          <a:noFill/>
+        </p:spPr>
+        <p:txBody>
+          <a:bodyPr wrap="square" anchor="ctr" lIns="50800" rIns="50800" tIns="25400" bIns="25400">
+            <a:spAutoFit/>
+          </a:bodyPr>
+          <a:lstStyle/>
+          <a:p>
+            <a:pPr algn="l">
+              <a:spcBef>
+                <a:spcPts val="0"/>
+              </a:spcBef>
+              <a:spcAft>
+                <a:spcPts val="400"/>
+              </a:spcAft>
+            </a:pPr>
+            <a:r>
+              <a:rPr sz="2600" b="1">
+                <a:solidFill>
+                  <a:srgbClr val="FFFFFF"/>
+                </a:solidFill>
+                <a:latin typeface="Yu Gothic"/>
+                <a:ea typeface="Yu Gothic"/>
+              </a:rPr>
+              <a:t>なぜ補体阻害か —「本命」の病態的根拠</a:t>
+            </a:r>
+          </a:p>
+        </p:txBody>
+      </p:sp>
+      <p:sp>
+        <p:nvSpPr>
+          <p:cNvPr id="6" name="TextBox 5"/>
+          <p:cNvSpPr txBox="1"/>
+          <p:nvPr/>
+        </p:nvSpPr>
+        <p:spPr>
+          <a:xfrm>
+            <a:off x="548640" y="1325880"/>
+            <a:ext cx="11064240" cy="5029200"/>
+          </a:xfrm>
+          <a:prstGeom prst="rect">
+            <a:avLst/>
+          </a:prstGeom>
+          <a:noFill/>
+        </p:spPr>
+        <p:txBody>
+          <a:bodyPr wrap="square">
+            <a:spAutoFit/>
+          </a:bodyPr>
+          <a:lstStyle/>
+          <a:p>
+            <a:pPr>
+              <a:spcBef>
+                <a:spcPts val="200"/>
+              </a:spcBef>
+              <a:spcAft>
+                <a:spcPts val="700"/>
+              </a:spcAft>
+            </a:pPr>
+            <a:r>
+              <a:rPr sz="1800" b="1">
+                <a:solidFill>
+                  <a:srgbClr val="2E6DA4"/>
+                </a:solidFill>
+                <a:latin typeface="Yu Gothic"/>
+                <a:ea typeface="Yu Gothic"/>
+              </a:rPr>
+              <a:t>● </a:t>
+            </a:r>
+            <a:r>
+              <a:rPr sz="1800" b="1">
+                <a:solidFill>
+                  <a:srgbClr val="222222"/>
+                </a:solidFill>
+                <a:latin typeface="Yu Gothic"/>
+                <a:ea typeface="Yu Gothic"/>
+              </a:rPr>
+              <a:t>抗GM1 IgM →（古典経路・C2依存性）→ 補体活性化</a:t>
+            </a:r>
+          </a:p>
+          <a:p>
+            <a:pPr lvl="1">
+              <a:spcBef>
+                <a:spcPts val="200"/>
+              </a:spcBef>
+              <a:spcAft>
+                <a:spcPts val="700"/>
+              </a:spcAft>
+            </a:pPr>
+            <a:r>
+              <a:rPr sz="1500" b="1">
+                <a:solidFill>
+                  <a:srgbClr val="555555"/>
+                </a:solidFill>
+                <a:latin typeface="Yu Gothic"/>
+                <a:ea typeface="Yu Gothic"/>
+              </a:rPr>
+              <a:t>– </a:t>
+            </a:r>
+            <a:r>
+              <a:rPr sz="1500" b="0">
+                <a:solidFill>
+                  <a:srgbClr val="555555"/>
+                </a:solidFill>
+                <a:latin typeface="Yu Gothic"/>
+                <a:ea typeface="Yu Gothic"/>
+              </a:rPr>
+              <a:t>ランビエ絞輪で膜侵襲複合体(MAC)形成 → Navチャネル障害・軸索障害</a:t>
+            </a:r>
+          </a:p>
+          <a:p>
+            <a:pPr lvl="1">
+              <a:spcBef>
+                <a:spcPts val="200"/>
+              </a:spcBef>
+              <a:spcAft>
+                <a:spcPts val="700"/>
+              </a:spcAft>
+            </a:pPr>
+            <a:r>
+              <a:rPr sz="1500" b="1">
+                <a:solidFill>
+                  <a:srgbClr val="555555"/>
+                </a:solidFill>
+                <a:latin typeface="Yu Gothic"/>
+                <a:ea typeface="Yu Gothic"/>
+              </a:rPr>
+              <a:t>– </a:t>
+            </a:r>
+            <a:r>
+              <a:rPr sz="1500" b="0">
+                <a:solidFill>
+                  <a:srgbClr val="555555"/>
+                </a:solidFill>
+                <a:latin typeface="Yu Gothic"/>
+                <a:ea typeface="Yu Gothic"/>
+              </a:rPr>
+              <a:t>IVIgは補体沈着を減らすが不十分 → 上流での選択的補体阻害が合理的</a:t>
+            </a:r>
+          </a:p>
+          <a:p>
+            <a:pPr>
+              <a:spcBef>
+                <a:spcPts val="1000"/>
+              </a:spcBef>
+              <a:spcAft>
+                <a:spcPts val="700"/>
+              </a:spcAft>
+            </a:pPr>
+            <a:r>
+              <a:rPr sz="1800" b="1">
+                <a:solidFill>
+                  <a:srgbClr val="2E6DA4"/>
+                </a:solidFill>
+                <a:latin typeface="Yu Gothic"/>
+                <a:ea typeface="Yu Gothic"/>
+              </a:rPr>
+              <a:t>▶ </a:t>
+            </a:r>
+            <a:r>
+              <a:rPr sz="1800" b="1">
+                <a:solidFill>
+                  <a:srgbClr val="1F3A5F"/>
+                </a:solidFill>
+                <a:latin typeface="Yu Gothic"/>
+                <a:ea typeface="Yu Gothic"/>
+              </a:rPr>
+              <a:t>開発の主戦場は C2（empasiprubart）と 活性化C1s（DNTH103）</a:t>
+            </a:r>
+          </a:p>
+          <a:p>
+            <a:pPr>
+              <a:spcBef>
+                <a:spcPts val="800"/>
+              </a:spcBef>
+              <a:spcAft>
+                <a:spcPts val="700"/>
+              </a:spcAft>
+            </a:pPr>
+            <a:r>
+              <a:rPr sz="1300" b="0">
+                <a:solidFill>
+                  <a:srgbClr val="555555"/>
+                </a:solidFill>
+                <a:latin typeface="Yu Gothic"/>
+                <a:ea typeface="Yu Gothic"/>
+              </a:rPr>
+              <a:t>＊いずれも国内未承認・臨床試験段階（適応外）</a:t>
+            </a:r>
+          </a:p>
+        </p:txBody>
+      </p:sp>
+      <p:sp>
+        <p:nvSpPr>
+          <p:cNvPr id="7" name="TextBox 6"/>
+          <p:cNvSpPr txBox="1"/>
+          <p:nvPr/>
+        </p:nvSpPr>
+        <p:spPr>
+          <a:xfrm>
+            <a:off x="548640" y="6355080"/>
+            <a:ext cx="11064240" cy="365760"/>
+          </a:xfrm>
+          <a:prstGeom prst="rect">
+            <a:avLst/>
+          </a:prstGeom>
+          <a:noFill/>
+        </p:spPr>
+        <p:txBody>
+          <a:bodyPr wrap="square" anchor="t" lIns="50800" rIns="50800" tIns="25400" bIns="25400">
+            <a:spAutoFit/>
+          </a:bodyPr>
+          <a:lstStyle/>
+          <a:p>
+            <a:pPr algn="l">
+              <a:spcBef>
+                <a:spcPts val="0"/>
+              </a:spcBef>
+              <a:spcAft>
+                <a:spcPts val="400"/>
+              </a:spcAft>
+            </a:pPr>
+            <a:r>
+              <a:rPr sz="1050" b="0">
+                <a:solidFill>
+                  <a:srgbClr val="555555"/>
+                </a:solidFill>
+                <a:latin typeface="Yu Gothic"/>
+                <a:ea typeface="Yu Gothic"/>
+              </a:rPr>
+              <a:t>出典：Budding K, et al. Eur J Neurol 2025;32:e16541 ほか</a:t>
+            </a:r>
+          </a:p>
+        </p:txBody>
+      </p:sp>
+      <p:sp>
+        <p:nvSpPr>
+          <p:cNvPr id="8" name="TextBox 7"/>
+          <p:cNvSpPr txBox="1"/>
+          <p:nvPr/>
+        </p:nvSpPr>
+        <p:spPr>
+          <a:xfrm>
+            <a:off x="11430000" y="109728"/>
+            <a:ext cx="640080" cy="274320"/>
+          </a:xfrm>
+          <a:prstGeom prst="rect">
+            <a:avLst/>
+          </a:prstGeom>
+          <a:noFill/>
+        </p:spPr>
+        <p:txBody>
+          <a:bodyPr wrap="square" anchor="t" lIns="50800" rIns="50800" tIns="25400" bIns="25400">
+            <a:spAutoFit/>
+          </a:bodyPr>
+          <a:lstStyle/>
+          <a:p>
+            <a:pPr algn="r">
+              <a:spcBef>
+                <a:spcPts val="0"/>
+              </a:spcBef>
+              <a:spcAft>
+                <a:spcPts val="400"/>
+              </a:spcAft>
+            </a:pPr>
+            <a:r>
+              <a:rPr sz="1200" b="1">
+                <a:solidFill>
+                  <a:srgbClr val="BBD3EA"/>
+                </a:solidFill>
+                <a:latin typeface="Yu Gothic"/>
+                <a:ea typeface="Yu Gothic"/>
+              </a:rPr>
+              <a:t>3</a:t>
+            </a:r>
+          </a:p>
+        </p:txBody>
+      </p:sp>
+    </p:spTree>
+  </p:cSld>
+  <p:clrMapOvr>
+    <a:masterClrMapping/>
+  </p:clrMapOvr>
+</p:sld>
+</file>
+
+<file path=ppt/slides/slide27.xml><?xml version="1.0" encoding="utf-8"?>
+<p:sld xmlns:a="http://schemas.openxmlformats.org/drawingml/2006/main" xmlns:p="http://schemas.openxmlformats.org/presentationml/2006/main" xmlns:r="http://schemas.openxmlformats.org/officeDocument/2006/relationships">
+  <p:cSld>
+    <p:spTree>
+      <p:nvGrpSpPr>
+        <p:cNvPr id="1" name=""/>
+        <p:cNvGrpSpPr/>
+        <p:nvPr/>
+      </p:nvGrpSpPr>
+      <p:grpSpPr/>
+      <p:sp>
+        <p:nvSpPr>
+          <p:cNvPr id="2" name="Rectangle 1"/>
+          <p:cNvSpPr/>
+          <p:nvPr/>
+        </p:nvSpPr>
+        <p:spPr>
+          <a:xfrm>
+            <a:off x="0" y="0"/>
+            <a:ext cx="12191695" cy="1051560"/>
+          </a:xfrm>
+          <a:prstGeom prst="rect">
+            <a:avLst/>
+          </a:prstGeom>
+          <a:solidFill>
+            <a:srgbClr val="1F3A5F"/>
+          </a:solidFill>
+          <a:ln>
+            <a:noFill/>
+          </a:ln>
+          <a:effectLst/>
+        </p:spPr>
+        <p:style>
+          <a:lnRef idx="1">
+            <a:schemeClr val="accent1"/>
+          </a:lnRef>
+          <a:fillRef idx="3">
+            <a:schemeClr val="accent1"/>
+          </a:fillRef>
+          <a:effectRef idx="2">
+            <a:schemeClr val="accent1"/>
+          </a:effectRef>
+          <a:fontRef idx="minor">
+            <a:schemeClr val="lt1"/>
+          </a:fontRef>
+        </p:style>
+        <p:txBody>
+          <a:bodyPr rtlCol="0" anchor="ctr"/>
+          <a:lstStyle/>
+          <a:p>
+            <a:pPr algn="ctr"/>
+          </a:p>
+        </p:txBody>
+      </p:sp>
+      <p:sp>
+        <p:nvSpPr>
+          <p:cNvPr id="3" name="Rectangle 2"/>
+          <p:cNvSpPr/>
+          <p:nvPr/>
+        </p:nvSpPr>
+        <p:spPr>
+          <a:xfrm>
+            <a:off x="0" y="1051560"/>
+            <a:ext cx="12191695" cy="50800"/>
+          </a:xfrm>
+          <a:prstGeom prst="rect">
+            <a:avLst/>
+          </a:prstGeom>
+          <a:solidFill>
+            <a:srgbClr val="2E6DA4"/>
+          </a:solidFill>
+          <a:ln>
+            <a:noFill/>
+          </a:ln>
+          <a:effectLst/>
+        </p:spPr>
+        <p:style>
+          <a:lnRef idx="1">
+            <a:schemeClr val="accent1"/>
+          </a:lnRef>
+          <a:fillRef idx="3">
+            <a:schemeClr val="accent1"/>
+          </a:fillRef>
+          <a:effectRef idx="2">
+            <a:schemeClr val="accent1"/>
+          </a:effectRef>
+          <a:fontRef idx="minor">
+            <a:schemeClr val="lt1"/>
+          </a:fontRef>
+        </p:style>
+        <p:txBody>
+          <a:bodyPr rtlCol="0" anchor="ctr"/>
+          <a:lstStyle/>
+          <a:p>
+            <a:pPr algn="ctr"/>
+          </a:p>
+        </p:txBody>
+      </p:sp>
+      <p:sp>
+        <p:nvSpPr>
+          <p:cNvPr id="4" name="TextBox 3"/>
+          <p:cNvSpPr txBox="1"/>
+          <p:nvPr/>
+        </p:nvSpPr>
+        <p:spPr>
+          <a:xfrm>
+            <a:off x="457200" y="109728"/>
+            <a:ext cx="10058400" cy="274320"/>
+          </a:xfrm>
+          <a:prstGeom prst="rect">
+            <a:avLst/>
+          </a:prstGeom>
+          <a:noFill/>
+        </p:spPr>
+        <p:txBody>
+          <a:bodyPr wrap="square" anchor="t" lIns="50800" rIns="50800" tIns="25400" bIns="25400">
+            <a:spAutoFit/>
+          </a:bodyPr>
+          <a:lstStyle/>
+          <a:p>
+            <a:pPr algn="l">
+              <a:spcBef>
+                <a:spcPts val="0"/>
+              </a:spcBef>
+              <a:spcAft>
+                <a:spcPts val="400"/>
+              </a:spcAft>
+            </a:pPr>
+            <a:r>
+              <a:rPr sz="1200" b="1">
+                <a:solidFill>
+                  <a:srgbClr val="BBD3EA"/>
+                </a:solidFill>
+                <a:latin typeface="Yu Gothic"/>
+                <a:ea typeface="Yu Gothic"/>
+              </a:rPr>
+              <a:t>3｜治療（新）</a:t>
+            </a:r>
+          </a:p>
+        </p:txBody>
+      </p:sp>
+      <p:sp>
+        <p:nvSpPr>
+          <p:cNvPr id="5" name="TextBox 4"/>
+          <p:cNvSpPr txBox="1"/>
+          <p:nvPr/>
+        </p:nvSpPr>
+        <p:spPr>
+          <a:xfrm>
+            <a:off x="457200" y="329184"/>
+            <a:ext cx="11247120" cy="685800"/>
+          </a:xfrm>
+          <a:prstGeom prst="rect">
+            <a:avLst/>
+          </a:prstGeom>
+          <a:noFill/>
+        </p:spPr>
+        <p:txBody>
+          <a:bodyPr wrap="square" anchor="ctr" lIns="50800" rIns="50800" tIns="25400" bIns="25400">
+            <a:spAutoFit/>
+          </a:bodyPr>
+          <a:lstStyle/>
+          <a:p>
+            <a:pPr algn="l">
+              <a:spcBef>
+                <a:spcPts val="0"/>
+              </a:spcBef>
+              <a:spcAft>
+                <a:spcPts val="400"/>
+              </a:spcAft>
+            </a:pPr>
+            <a:r>
+              <a:rPr sz="2600" b="1">
+                <a:solidFill>
+                  <a:srgbClr val="FFFFFF"/>
+                </a:solidFill>
+                <a:latin typeface="Yu Gothic"/>
+                <a:ea typeface="Yu Gothic"/>
+              </a:rPr>
+              <a:t>補体が本命、FcRn阻害はMMNには不向き</a:t>
+            </a:r>
+          </a:p>
+        </p:txBody>
+      </p:sp>
+      <p:sp>
+        <p:nvSpPr>
+          <p:cNvPr id="6" name="TextBox 5"/>
+          <p:cNvSpPr txBox="1"/>
+          <p:nvPr/>
+        </p:nvSpPr>
+        <p:spPr>
+          <a:xfrm>
+            <a:off x="548640" y="1325880"/>
+            <a:ext cx="11064240" cy="5029200"/>
+          </a:xfrm>
+          <a:prstGeom prst="rect">
+            <a:avLst/>
+          </a:prstGeom>
+          <a:noFill/>
+        </p:spPr>
+        <p:txBody>
+          <a:bodyPr wrap="square">
+            <a:spAutoFit/>
+          </a:bodyPr>
+          <a:lstStyle/>
+          <a:p>
+            <a:pPr>
+              <a:spcBef>
+                <a:spcPts val="200"/>
+              </a:spcBef>
+              <a:spcAft>
+                <a:spcPts val="700"/>
+              </a:spcAft>
+            </a:pPr>
+            <a:r>
+              <a:rPr sz="1800" b="1">
+                <a:solidFill>
+                  <a:srgbClr val="2E6DA4"/>
+                </a:solidFill>
+                <a:latin typeface="Yu Gothic"/>
+                <a:ea typeface="Yu Gothic"/>
+              </a:rPr>
+              <a:t>● </a:t>
+            </a:r>
+            <a:r>
+              <a:rPr sz="1800" b="1">
+                <a:solidFill>
+                  <a:srgbClr val="222222"/>
+                </a:solidFill>
+                <a:latin typeface="Yu Gothic"/>
+                <a:ea typeface="Yu Gothic"/>
+              </a:rPr>
+              <a:t>FcRn阻害（nipocalimab, efgartigimod, rozanolixizumab）はIgG自己抗体病で有効</a:t>
+            </a:r>
+          </a:p>
+          <a:p>
+            <a:pPr lvl="1">
+              <a:spcBef>
+                <a:spcPts val="200"/>
+              </a:spcBef>
+              <a:spcAft>
+                <a:spcPts val="700"/>
+              </a:spcAft>
+            </a:pPr>
+            <a:r>
+              <a:rPr sz="1500" b="1">
+                <a:solidFill>
+                  <a:srgbClr val="555555"/>
+                </a:solidFill>
+                <a:latin typeface="Yu Gothic"/>
+                <a:ea typeface="Yu Gothic"/>
+              </a:rPr>
+              <a:t>– </a:t>
+            </a:r>
+            <a:r>
+              <a:rPr sz="1500" b="0">
+                <a:solidFill>
+                  <a:srgbClr val="555555"/>
+                </a:solidFill>
+                <a:latin typeface="Yu Gothic"/>
+                <a:ea typeface="Yu Gothic"/>
+              </a:rPr>
+              <a:t>重症筋無力症で確立、CIDPで開発中（efgartigimodは再発予防効果）</a:t>
+            </a:r>
+          </a:p>
+          <a:p>
+            <a:pPr>
+              <a:spcBef>
+                <a:spcPts val="800"/>
+              </a:spcBef>
+              <a:spcAft>
+                <a:spcPts val="700"/>
+              </a:spcAft>
+            </a:pPr>
+            <a:r>
+              <a:rPr sz="1800" b="1">
+                <a:solidFill>
+                  <a:srgbClr val="1F3A5F"/>
+                </a:solidFill>
+                <a:latin typeface="Yu Gothic"/>
+                <a:ea typeface="Yu Gothic"/>
+              </a:rPr>
+              <a:t>● </a:t>
+            </a:r>
+            <a:r>
+              <a:rPr sz="1800" b="1">
+                <a:solidFill>
+                  <a:srgbClr val="1F3A5F"/>
+                </a:solidFill>
+                <a:latin typeface="Yu Gothic"/>
+                <a:ea typeface="Yu Gothic"/>
+              </a:rPr>
+              <a:t>MMNではFcRn阻害は無効と考えられる ── MMNが主にIgM介在性の病態のため</a:t>
+            </a:r>
+          </a:p>
+          <a:p>
+            <a:pPr lvl="1">
+              <a:spcBef>
+                <a:spcPts val="200"/>
+              </a:spcBef>
+              <a:spcAft>
+                <a:spcPts val="700"/>
+              </a:spcAft>
+            </a:pPr>
+            <a:r>
+              <a:rPr sz="1500" b="1">
+                <a:solidFill>
+                  <a:srgbClr val="2E7D32"/>
+                </a:solidFill>
+                <a:latin typeface="Yu Gothic"/>
+                <a:ea typeface="Yu Gothic"/>
+              </a:rPr>
+              <a:t>▶ </a:t>
+            </a:r>
+            <a:r>
+              <a:rPr sz="1500" b="1">
+                <a:solidFill>
+                  <a:srgbClr val="2E7D32"/>
+                </a:solidFill>
+                <a:latin typeface="Yu Gothic"/>
+                <a:ea typeface="Yu Gothic"/>
+              </a:rPr>
+              <a:t>MMNは「IgM × 補体」主導 → 標的は補体（C2 / 活性化C1s）が理にかなう</a:t>
+            </a:r>
+          </a:p>
+          <a:p>
+            <a:pPr>
+              <a:spcBef>
+                <a:spcPts val="800"/>
+              </a:spcBef>
+              <a:spcAft>
+                <a:spcPts val="700"/>
+              </a:spcAft>
+            </a:pPr>
+            <a:r>
+              <a:rPr sz="1300" b="0">
+                <a:solidFill>
+                  <a:srgbClr val="555555"/>
+                </a:solidFill>
+                <a:latin typeface="Yu Gothic"/>
+                <a:ea typeface="Yu Gothic"/>
+              </a:rPr>
+              <a:t>＊FcRn阻害薬・補体阻害薬とも国内はMMN未承認（適応外）</a:t>
+            </a:r>
+          </a:p>
+        </p:txBody>
+      </p:sp>
+      <p:sp>
+        <p:nvSpPr>
+          <p:cNvPr id="7" name="TextBox 6"/>
+          <p:cNvSpPr txBox="1"/>
+          <p:nvPr/>
+        </p:nvSpPr>
+        <p:spPr>
+          <a:xfrm>
+            <a:off x="548640" y="6355080"/>
+            <a:ext cx="11064240" cy="365760"/>
+          </a:xfrm>
+          <a:prstGeom prst="rect">
+            <a:avLst/>
+          </a:prstGeom>
+          <a:noFill/>
+        </p:spPr>
+        <p:txBody>
+          <a:bodyPr wrap="square" anchor="t" lIns="50800" rIns="50800" tIns="25400" bIns="25400">
+            <a:spAutoFit/>
+          </a:bodyPr>
+          <a:lstStyle/>
+          <a:p>
+            <a:pPr algn="l">
+              <a:spcBef>
+                <a:spcPts val="0"/>
+              </a:spcBef>
+              <a:spcAft>
+                <a:spcPts val="400"/>
+              </a:spcAft>
+            </a:pPr>
+            <a:r>
+              <a:rPr sz="1050" b="0">
+                <a:solidFill>
+                  <a:srgbClr val="555555"/>
+                </a:solidFill>
+                <a:latin typeface="Yu Gothic"/>
+                <a:ea typeface="Yu Gothic"/>
+              </a:rPr>
+              <a:t>出典：Khateb M, Bril V. Nipocalimab and other FcRn blockers in neuromuscular disorders. Pharmacol Ther 2026;286:109071</a:t>
+            </a:r>
+          </a:p>
+        </p:txBody>
+      </p:sp>
+      <p:sp>
+        <p:nvSpPr>
+          <p:cNvPr id="8" name="TextBox 7"/>
+          <p:cNvSpPr txBox="1"/>
+          <p:nvPr/>
+        </p:nvSpPr>
+        <p:spPr>
+          <a:xfrm>
+            <a:off x="11430000" y="109728"/>
+            <a:ext cx="640080" cy="274320"/>
+          </a:xfrm>
+          <a:prstGeom prst="rect">
+            <a:avLst/>
+          </a:prstGeom>
+          <a:noFill/>
+        </p:spPr>
+        <p:txBody>
+          <a:bodyPr wrap="square" anchor="t" lIns="50800" rIns="50800" tIns="25400" bIns="25400">
+            <a:spAutoFit/>
+          </a:bodyPr>
+          <a:lstStyle/>
+          <a:p>
+            <a:pPr algn="r">
+              <a:spcBef>
+                <a:spcPts val="0"/>
+              </a:spcBef>
+              <a:spcAft>
+                <a:spcPts val="400"/>
+              </a:spcAft>
+            </a:pPr>
+            <a:r>
+              <a:rPr sz="1200" b="1">
+                <a:solidFill>
+                  <a:srgbClr val="BBD3EA"/>
+                </a:solidFill>
+                <a:latin typeface="Yu Gothic"/>
+                <a:ea typeface="Yu Gothic"/>
+              </a:rPr>
+              <a:t>3</a:t>
+            </a:r>
+          </a:p>
+        </p:txBody>
+      </p:sp>
+    </p:spTree>
+  </p:cSld>
+  <p:clrMapOvr>
+    <a:masterClrMapping/>
+  </p:clrMapOvr>
+</p:sld>
+</file>
+
+<file path=ppt/slides/slide28.xml><?xml version="1.0" encoding="utf-8"?>
+<p:sld xmlns:a="http://schemas.openxmlformats.org/drawingml/2006/main" xmlns:p="http://schemas.openxmlformats.org/presentationml/2006/main" xmlns:r="http://schemas.openxmlformats.org/officeDocument/2006/relationships">
+  <p:cSld>
+    <p:spTree>
+      <p:nvGrpSpPr>
+        <p:cNvPr id="1" name=""/>
+        <p:cNvGrpSpPr/>
+        <p:nvPr/>
+      </p:nvGrpSpPr>
+      <p:grpSpPr/>
+      <p:sp>
+        <p:nvSpPr>
+          <p:cNvPr id="2" name="Rectangle 1"/>
+          <p:cNvSpPr/>
+          <p:nvPr/>
+        </p:nvSpPr>
+        <p:spPr>
+          <a:xfrm>
+            <a:off x="0" y="0"/>
+            <a:ext cx="12191695" cy="1051560"/>
+          </a:xfrm>
+          <a:prstGeom prst="rect">
+            <a:avLst/>
+          </a:prstGeom>
+          <a:solidFill>
+            <a:srgbClr val="1F3A5F"/>
+          </a:solidFill>
+          <a:ln>
+            <a:noFill/>
+          </a:ln>
+          <a:effectLst/>
+        </p:spPr>
+        <p:style>
+          <a:lnRef idx="1">
+            <a:schemeClr val="accent1"/>
+          </a:lnRef>
+          <a:fillRef idx="3">
+            <a:schemeClr val="accent1"/>
+          </a:fillRef>
+          <a:effectRef idx="2">
+            <a:schemeClr val="accent1"/>
+          </a:effectRef>
+          <a:fontRef idx="minor">
+            <a:schemeClr val="lt1"/>
+          </a:fontRef>
+        </p:style>
+        <p:txBody>
+          <a:bodyPr rtlCol="0" anchor="ctr"/>
+          <a:lstStyle/>
+          <a:p>
+            <a:pPr algn="ctr"/>
+          </a:p>
+        </p:txBody>
+      </p:sp>
+      <p:sp>
+        <p:nvSpPr>
+          <p:cNvPr id="3" name="Rectangle 2"/>
+          <p:cNvSpPr/>
+          <p:nvPr/>
+        </p:nvSpPr>
+        <p:spPr>
+          <a:xfrm>
+            <a:off x="0" y="1051560"/>
+            <a:ext cx="12191695" cy="50800"/>
+          </a:xfrm>
+          <a:prstGeom prst="rect">
+            <a:avLst/>
+          </a:prstGeom>
+          <a:solidFill>
+            <a:srgbClr val="2E6DA4"/>
+          </a:solidFill>
+          <a:ln>
+            <a:noFill/>
+          </a:ln>
+          <a:effectLst/>
+        </p:spPr>
+        <p:style>
+          <a:lnRef idx="1">
+            <a:schemeClr val="accent1"/>
+          </a:lnRef>
+          <a:fillRef idx="3">
+            <a:schemeClr val="accent1"/>
+          </a:fillRef>
+          <a:effectRef idx="2">
+            <a:schemeClr val="accent1"/>
+          </a:effectRef>
+          <a:fontRef idx="minor">
+            <a:schemeClr val="lt1"/>
+          </a:fontRef>
+        </p:style>
+        <p:txBody>
+          <a:bodyPr rtlCol="0" anchor="ctr"/>
+          <a:lstStyle/>
+          <a:p>
+            <a:pPr algn="ctr"/>
+          </a:p>
+        </p:txBody>
+      </p:sp>
+      <p:sp>
+        <p:nvSpPr>
+          <p:cNvPr id="4" name="TextBox 3"/>
+          <p:cNvSpPr txBox="1"/>
+          <p:nvPr/>
+        </p:nvSpPr>
+        <p:spPr>
+          <a:xfrm>
+            <a:off x="457200" y="109728"/>
+            <a:ext cx="10058400" cy="274320"/>
+          </a:xfrm>
+          <a:prstGeom prst="rect">
+            <a:avLst/>
+          </a:prstGeom>
+          <a:noFill/>
+        </p:spPr>
+        <p:txBody>
+          <a:bodyPr wrap="square" anchor="t" lIns="50800" rIns="50800" tIns="25400" bIns="25400">
+            <a:spAutoFit/>
+          </a:bodyPr>
+          <a:lstStyle/>
+          <a:p>
+            <a:pPr algn="l">
+              <a:spcBef>
+                <a:spcPts val="0"/>
+              </a:spcBef>
+              <a:spcAft>
+                <a:spcPts val="400"/>
+              </a:spcAft>
+            </a:pPr>
+            <a:r>
+              <a:rPr sz="1200" b="1">
+                <a:solidFill>
+                  <a:srgbClr val="BBD3EA"/>
+                </a:solidFill>
+                <a:latin typeface="Yu Gothic"/>
+                <a:ea typeface="Yu Gothic"/>
+              </a:rPr>
+              <a:t>3｜治療（本命）</a:t>
+            </a:r>
+          </a:p>
+        </p:txBody>
+      </p:sp>
+      <p:sp>
+        <p:nvSpPr>
+          <p:cNvPr id="5" name="TextBox 4"/>
+          <p:cNvSpPr txBox="1"/>
+          <p:nvPr/>
+        </p:nvSpPr>
+        <p:spPr>
+          <a:xfrm>
+            <a:off x="457200" y="329184"/>
+            <a:ext cx="11247120" cy="685800"/>
+          </a:xfrm>
+          <a:prstGeom prst="rect">
+            <a:avLst/>
+          </a:prstGeom>
+          <a:noFill/>
+        </p:spPr>
+        <p:txBody>
+          <a:bodyPr wrap="square" anchor="ctr" lIns="50800" rIns="50800" tIns="25400" bIns="25400">
+            <a:spAutoFit/>
+          </a:bodyPr>
+          <a:lstStyle/>
+          <a:p>
+            <a:pPr algn="l">
+              <a:spcBef>
+                <a:spcPts val="0"/>
+              </a:spcBef>
+              <a:spcAft>
+                <a:spcPts val="400"/>
+              </a:spcAft>
+            </a:pPr>
+            <a:r>
+              <a:rPr sz="2600" b="1">
+                <a:solidFill>
+                  <a:srgbClr val="FFFFFF"/>
+                </a:solidFill>
+                <a:latin typeface="Yu Gothic"/>
+                <a:ea typeface="Yu Gothic"/>
+              </a:rPr>
+              <a:t>empasiprubart（抗C2）— 第2相 ARDA 試験</a:t>
+            </a:r>
+          </a:p>
+        </p:txBody>
+      </p:sp>
+      <p:sp>
+        <p:nvSpPr>
+          <p:cNvPr id="6" name="TextBox 5"/>
+          <p:cNvSpPr txBox="1"/>
+          <p:nvPr/>
+        </p:nvSpPr>
+        <p:spPr>
+          <a:xfrm>
+            <a:off x="548640" y="1325880"/>
+            <a:ext cx="11064240" cy="5029200"/>
+          </a:xfrm>
+          <a:prstGeom prst="rect">
+            <a:avLst/>
+          </a:prstGeom>
+          <a:noFill/>
+        </p:spPr>
+        <p:txBody>
+          <a:bodyPr wrap="square">
+            <a:spAutoFit/>
+          </a:bodyPr>
+          <a:lstStyle/>
+          <a:p>
+            <a:pPr>
+              <a:spcBef>
+                <a:spcPts val="200"/>
+              </a:spcBef>
+              <a:spcAft>
+                <a:spcPts val="700"/>
+              </a:spcAft>
+            </a:pPr>
+            <a:r>
+              <a:rPr sz="1800" b="1">
+                <a:solidFill>
+                  <a:srgbClr val="2E6DA4"/>
+                </a:solidFill>
+                <a:latin typeface="Yu Gothic"/>
+                <a:ea typeface="Yu Gothic"/>
+              </a:rPr>
+              <a:t>● </a:t>
+            </a:r>
+            <a:r>
+              <a:rPr sz="1800" b="1">
+                <a:solidFill>
+                  <a:srgbClr val="222222"/>
+                </a:solidFill>
+                <a:latin typeface="Yu Gothic"/>
+                <a:ea typeface="Yu Gothic"/>
+              </a:rPr>
+              <a:t>対象：IVIg依存の probable/definite MMN 計54名</a:t>
+            </a:r>
+          </a:p>
+          <a:p>
+            <a:pPr lvl="1">
+              <a:spcBef>
+                <a:spcPts val="200"/>
+              </a:spcBef>
+              <a:spcAft>
+                <a:spcPts val="700"/>
+              </a:spcAft>
+            </a:pPr>
+            <a:r>
+              <a:rPr sz="1500" b="1">
+                <a:solidFill>
+                  <a:srgbClr val="555555"/>
+                </a:solidFill>
+                <a:latin typeface="Yu Gothic"/>
+                <a:ea typeface="Yu Gothic"/>
+              </a:rPr>
+              <a:t>– </a:t>
+            </a:r>
+            <a:r>
+              <a:rPr sz="1500" b="0">
+                <a:solidFill>
+                  <a:srgbClr val="555555"/>
+                </a:solidFill>
+                <a:latin typeface="Yu Gothic"/>
+                <a:ea typeface="Yu Gothic"/>
+              </a:rPr>
+              <a:t>27名×2コホート、各2:1（実薬n=18/プラセボn=9）、16週二重盲検</a:t>
+            </a:r>
+          </a:p>
+          <a:p>
+            <a:pPr>
+              <a:spcBef>
+                <a:spcPts val="800"/>
+              </a:spcBef>
+              <a:spcAft>
+                <a:spcPts val="700"/>
+              </a:spcAft>
+            </a:pPr>
+            <a:r>
+              <a:rPr sz="1800" b="1">
+                <a:solidFill>
+                  <a:srgbClr val="2E6DA4"/>
+                </a:solidFill>
+                <a:latin typeface="Yu Gothic"/>
+                <a:ea typeface="Yu Gothic"/>
+              </a:rPr>
+              <a:t>● </a:t>
+            </a:r>
+            <a:r>
+              <a:rPr sz="1800" b="1">
+                <a:solidFill>
+                  <a:srgbClr val="1F3A5F"/>
+                </a:solidFill>
+                <a:latin typeface="Yu Gothic"/>
+                <a:ea typeface="Yu Gothic"/>
+              </a:rPr>
+              <a:t>主要結果（EAN2025/PNS2025）</a:t>
+            </a:r>
+          </a:p>
+          <a:p>
+            <a:pPr lvl="1">
+              <a:spcBef>
+                <a:spcPts val="200"/>
+              </a:spcBef>
+              <a:spcAft>
+                <a:spcPts val="700"/>
+              </a:spcAft>
+            </a:pPr>
+            <a:r>
+              <a:rPr sz="1500" b="1">
+                <a:solidFill>
+                  <a:srgbClr val="555555"/>
+                </a:solidFill>
+                <a:latin typeface="Yu Gothic"/>
+                <a:ea typeface="Yu Gothic"/>
+              </a:rPr>
+              <a:t>– </a:t>
+            </a:r>
+            <a:r>
+              <a:rPr sz="1500" b="1">
+                <a:solidFill>
+                  <a:srgbClr val="2E7D32"/>
+                </a:solidFill>
+                <a:latin typeface="Yu Gothic"/>
+                <a:ea typeface="Yu Gothic"/>
+              </a:rPr>
+              <a:t>IVIg再投与リスク 約91%減：コホート1 HR 0.09（95%CI 0.02–0.44）</a:t>
+            </a:r>
+          </a:p>
+          <a:p>
+            <a:pPr lvl="1">
+              <a:spcBef>
+                <a:spcPts val="200"/>
+              </a:spcBef>
+              <a:spcAft>
+                <a:spcPts val="700"/>
+              </a:spcAft>
+            </a:pPr>
+            <a:r>
+              <a:rPr sz="1500" b="1">
+                <a:solidFill>
+                  <a:srgbClr val="555555"/>
+                </a:solidFill>
+                <a:latin typeface="Yu Gothic"/>
+                <a:ea typeface="Yu Gothic"/>
+              </a:rPr>
+              <a:t>– </a:t>
+            </a:r>
+            <a:r>
+              <a:rPr sz="1500" b="0">
+                <a:solidFill>
+                  <a:srgbClr val="555555"/>
+                </a:solidFill>
+                <a:latin typeface="Yu Gothic"/>
+                <a:ea typeface="Yu Gothic"/>
+              </a:rPr>
+              <a:t>握力改善（コホート2：+19.89 vs +0.78 kPa）、血清NfL低下（軸索保護示唆）</a:t>
+            </a:r>
+          </a:p>
+          <a:p>
+            <a:pPr lvl="1">
+              <a:spcBef>
+                <a:spcPts val="200"/>
+              </a:spcBef>
+              <a:spcAft>
+                <a:spcPts val="700"/>
+              </a:spcAft>
+            </a:pPr>
+            <a:r>
+              <a:rPr sz="1500" b="1">
+                <a:solidFill>
+                  <a:srgbClr val="555555"/>
+                </a:solidFill>
+                <a:latin typeface="Yu Gothic"/>
+                <a:ea typeface="Yu Gothic"/>
+              </a:rPr>
+              <a:t>– </a:t>
+            </a:r>
+            <a:r>
+              <a:rPr sz="1500" b="0">
+                <a:solidFill>
+                  <a:srgbClr val="555555"/>
+                </a:solidFill>
+                <a:latin typeface="Yu Gothic"/>
+                <a:ea typeface="Yu Gothic"/>
+              </a:rPr>
+              <a:t>安全性は概ね良好（多くは軽〜中等度）。MMNで過去最大の介入試験</a:t>
+            </a:r>
+          </a:p>
+        </p:txBody>
+      </p:sp>
+      <p:sp>
+        <p:nvSpPr>
+          <p:cNvPr id="7" name="TextBox 6"/>
+          <p:cNvSpPr txBox="1"/>
+          <p:nvPr/>
+        </p:nvSpPr>
+        <p:spPr>
+          <a:xfrm>
+            <a:off x="548640" y="6355080"/>
+            <a:ext cx="11064240" cy="365760"/>
+          </a:xfrm>
+          <a:prstGeom prst="rect">
+            <a:avLst/>
+          </a:prstGeom>
+          <a:noFill/>
+        </p:spPr>
+        <p:txBody>
+          <a:bodyPr wrap="square" anchor="t" lIns="50800" rIns="50800" tIns="25400" bIns="25400">
+            <a:spAutoFit/>
+          </a:bodyPr>
+          <a:lstStyle/>
+          <a:p>
+            <a:pPr algn="l">
+              <a:spcBef>
+                <a:spcPts val="0"/>
+              </a:spcBef>
+              <a:spcAft>
+                <a:spcPts val="400"/>
+              </a:spcAft>
+            </a:pPr>
+            <a:r>
+              <a:rPr sz="1050" b="0">
+                <a:solidFill>
+                  <a:srgbClr val="555555"/>
+                </a:solidFill>
+                <a:latin typeface="Yu Gothic"/>
+                <a:ea typeface="Yu Gothic"/>
+              </a:rPr>
+              <a:t>出典：ARDA 第2相（NCT05225675）argenx PNS 2025 ポスター。査読論文化は要確認・国内未承認</a:t>
+            </a:r>
+          </a:p>
+        </p:txBody>
+      </p:sp>
+      <p:sp>
+        <p:nvSpPr>
+          <p:cNvPr id="8" name="TextBox 7"/>
+          <p:cNvSpPr txBox="1"/>
+          <p:nvPr/>
+        </p:nvSpPr>
+        <p:spPr>
+          <a:xfrm>
+            <a:off x="11430000" y="109728"/>
+            <a:ext cx="640080" cy="274320"/>
+          </a:xfrm>
+          <a:prstGeom prst="rect">
+            <a:avLst/>
+          </a:prstGeom>
+          <a:noFill/>
+        </p:spPr>
+        <p:txBody>
+          <a:bodyPr wrap="square" anchor="t" lIns="50800" rIns="50800" tIns="25400" bIns="25400">
+            <a:spAutoFit/>
+          </a:bodyPr>
+          <a:lstStyle/>
+          <a:p>
+            <a:pPr algn="r">
+              <a:spcBef>
+                <a:spcPts val="0"/>
+              </a:spcBef>
+              <a:spcAft>
+                <a:spcPts val="400"/>
+              </a:spcAft>
+            </a:pPr>
+            <a:r>
+              <a:rPr sz="1200" b="1">
+                <a:solidFill>
+                  <a:srgbClr val="BBD3EA"/>
+                </a:solidFill>
+                <a:latin typeface="Yu Gothic"/>
+                <a:ea typeface="Yu Gothic"/>
+              </a:rPr>
+              <a:t>3</a:t>
+            </a:r>
+          </a:p>
+        </p:txBody>
+      </p:sp>
+    </p:spTree>
+  </p:cSld>
+  <p:clrMapOvr>
+    <a:masterClrMapping/>
+  </p:clrMapOvr>
+</p:sld>
+</file>
+
+<file path=ppt/slides/slide29.xml><?xml version="1.0" encoding="utf-8"?>
+<p:sld xmlns:a="http://schemas.openxmlformats.org/drawingml/2006/main" xmlns:p="http://schemas.openxmlformats.org/presentationml/2006/main" xmlns:r="http://schemas.openxmlformats.org/officeDocument/2006/relationships">
+  <p:cSld>
+    <p:spTree>
+      <p:nvGrpSpPr>
+        <p:cNvPr id="1" name=""/>
+        <p:cNvGrpSpPr/>
+        <p:nvPr/>
+      </p:nvGrpSpPr>
+      <p:grpSpPr/>
+      <p:sp>
+        <p:nvSpPr>
+          <p:cNvPr id="2" name="Rectangle 1"/>
+          <p:cNvSpPr/>
+          <p:nvPr/>
+        </p:nvSpPr>
+        <p:spPr>
+          <a:xfrm>
+            <a:off x="0" y="0"/>
+            <a:ext cx="12191695" cy="1051560"/>
+          </a:xfrm>
+          <a:prstGeom prst="rect">
+            <a:avLst/>
+          </a:prstGeom>
+          <a:solidFill>
+            <a:srgbClr val="1F3A5F"/>
+          </a:solidFill>
+          <a:ln>
+            <a:noFill/>
+          </a:ln>
+          <a:effectLst/>
+        </p:spPr>
+        <p:style>
+          <a:lnRef idx="1">
+            <a:schemeClr val="accent1"/>
+          </a:lnRef>
+          <a:fillRef idx="3">
+            <a:schemeClr val="accent1"/>
+          </a:fillRef>
+          <a:effectRef idx="2">
+            <a:schemeClr val="accent1"/>
+          </a:effectRef>
+          <a:fontRef idx="minor">
+            <a:schemeClr val="lt1"/>
+          </a:fontRef>
+        </p:style>
+        <p:txBody>
+          <a:bodyPr rtlCol="0" anchor="ctr"/>
+          <a:lstStyle/>
+          <a:p>
+            <a:pPr algn="ctr"/>
+          </a:p>
+        </p:txBody>
+      </p:sp>
+      <p:sp>
+        <p:nvSpPr>
+          <p:cNvPr id="3" name="Rectangle 2"/>
+          <p:cNvSpPr/>
+          <p:nvPr/>
+        </p:nvSpPr>
+        <p:spPr>
+          <a:xfrm>
+            <a:off x="0" y="1051560"/>
+            <a:ext cx="12191695" cy="50800"/>
+          </a:xfrm>
+          <a:prstGeom prst="rect">
+            <a:avLst/>
+          </a:prstGeom>
+          <a:solidFill>
+            <a:srgbClr val="2E6DA4"/>
+          </a:solidFill>
+          <a:ln>
+            <a:noFill/>
+          </a:ln>
+          <a:effectLst/>
+        </p:spPr>
+        <p:style>
+          <a:lnRef idx="1">
+            <a:schemeClr val="accent1"/>
+          </a:lnRef>
+          <a:fillRef idx="3">
+            <a:schemeClr val="accent1"/>
+          </a:fillRef>
+          <a:effectRef idx="2">
+            <a:schemeClr val="accent1"/>
+          </a:effectRef>
+          <a:fontRef idx="minor">
+            <a:schemeClr val="lt1"/>
+          </a:fontRef>
+        </p:style>
+        <p:txBody>
+          <a:bodyPr rtlCol="0" anchor="ctr"/>
+          <a:lstStyle/>
+          <a:p>
+            <a:pPr algn="ctr"/>
+          </a:p>
+        </p:txBody>
+      </p:sp>
+      <p:sp>
+        <p:nvSpPr>
+          <p:cNvPr id="4" name="TextBox 3"/>
+          <p:cNvSpPr txBox="1"/>
+          <p:nvPr/>
+        </p:nvSpPr>
+        <p:spPr>
+          <a:xfrm>
+            <a:off x="457200" y="109728"/>
+            <a:ext cx="10058400" cy="274320"/>
+          </a:xfrm>
+          <a:prstGeom prst="rect">
+            <a:avLst/>
+          </a:prstGeom>
+          <a:noFill/>
+        </p:spPr>
+        <p:txBody>
+          <a:bodyPr wrap="square" anchor="t" lIns="50800" rIns="50800" tIns="25400" bIns="25400">
+            <a:spAutoFit/>
+          </a:bodyPr>
+          <a:lstStyle/>
+          <a:p>
+            <a:pPr algn="l">
+              <a:spcBef>
+                <a:spcPts val="0"/>
+              </a:spcBef>
+              <a:spcAft>
+                <a:spcPts val="400"/>
+              </a:spcAft>
+            </a:pPr>
+            <a:r>
+              <a:rPr sz="1200" b="1">
+                <a:solidFill>
+                  <a:srgbClr val="BBD3EA"/>
+                </a:solidFill>
+                <a:latin typeface="Yu Gothic"/>
+                <a:ea typeface="Yu Gothic"/>
+              </a:rPr>
+              <a:t>3｜治療（本命）</a:t>
+            </a:r>
+          </a:p>
+        </p:txBody>
+      </p:sp>
+      <p:sp>
+        <p:nvSpPr>
+          <p:cNvPr id="5" name="TextBox 4"/>
+          <p:cNvSpPr txBox="1"/>
+          <p:nvPr/>
+        </p:nvSpPr>
+        <p:spPr>
+          <a:xfrm>
+            <a:off x="457200" y="329184"/>
+            <a:ext cx="11247120" cy="685800"/>
+          </a:xfrm>
+          <a:prstGeom prst="rect">
+            <a:avLst/>
+          </a:prstGeom>
+          <a:noFill/>
+        </p:spPr>
+        <p:txBody>
+          <a:bodyPr wrap="square" anchor="ctr" lIns="50800" rIns="50800" tIns="25400" bIns="25400">
+            <a:spAutoFit/>
+          </a:bodyPr>
+          <a:lstStyle/>
+          <a:p>
+            <a:pPr algn="l">
+              <a:spcBef>
+                <a:spcPts val="0"/>
+              </a:spcBef>
+              <a:spcAft>
+                <a:spcPts val="400"/>
+              </a:spcAft>
+            </a:pPr>
+            <a:r>
+              <a:rPr sz="2600" b="1">
+                <a:solidFill>
+                  <a:srgbClr val="FFFFFF"/>
+                </a:solidFill>
+                <a:latin typeface="Yu Gothic"/>
+                <a:ea typeface="Yu Gothic"/>
+              </a:rPr>
+              <a:t>empasiprubart — 第3相 EMPASSION／他の補体阻害薬</a:t>
+            </a:r>
+          </a:p>
+        </p:txBody>
+      </p:sp>
+      <p:sp>
+        <p:nvSpPr>
+          <p:cNvPr id="6" name="TextBox 5"/>
+          <p:cNvSpPr txBox="1"/>
+          <p:nvPr/>
+        </p:nvSpPr>
+        <p:spPr>
+          <a:xfrm>
+            <a:off x="548640" y="1325880"/>
+            <a:ext cx="11064240" cy="5029200"/>
+          </a:xfrm>
+          <a:prstGeom prst="rect">
+            <a:avLst/>
+          </a:prstGeom>
+          <a:noFill/>
+        </p:spPr>
+        <p:txBody>
+          <a:bodyPr wrap="square">
+            <a:spAutoFit/>
+          </a:bodyPr>
+          <a:lstStyle/>
+          <a:p>
+            <a:pPr>
+              <a:spcBef>
+                <a:spcPts val="200"/>
+              </a:spcBef>
+              <a:spcAft>
+                <a:spcPts val="700"/>
+              </a:spcAft>
+            </a:pPr>
+            <a:r>
+              <a:rPr sz="1800" b="1">
+                <a:solidFill>
+                  <a:srgbClr val="2E6DA4"/>
+                </a:solidFill>
+                <a:latin typeface="Yu Gothic"/>
+                <a:ea typeface="Yu Gothic"/>
+              </a:rPr>
+              <a:t>● </a:t>
+            </a:r>
+            <a:r>
+              <a:rPr sz="1800" b="1">
+                <a:solidFill>
+                  <a:srgbClr val="222222"/>
+                </a:solidFill>
+                <a:latin typeface="Yu Gothic"/>
+                <a:ea typeface="Yu Gothic"/>
+              </a:rPr>
+              <a:t>EMPASSION（NCT06742190）：empasiprubart vs IVIg、約154名、進行中</a:t>
+            </a:r>
+          </a:p>
+          <a:p>
+            <a:pPr lvl="1">
+              <a:spcBef>
+                <a:spcPts val="200"/>
+              </a:spcBef>
+              <a:spcAft>
+                <a:spcPts val="700"/>
+              </a:spcAft>
+            </a:pPr>
+            <a:r>
+              <a:rPr sz="1500" b="1">
+                <a:solidFill>
+                  <a:srgbClr val="555555"/>
+                </a:solidFill>
+                <a:latin typeface="Yu Gothic"/>
+                <a:ea typeface="Yu Gothic"/>
+              </a:rPr>
+              <a:t>– </a:t>
+            </a:r>
+            <a:r>
+              <a:rPr sz="1500" b="0">
+                <a:solidFill>
+                  <a:srgbClr val="555555"/>
+                </a:solidFill>
+                <a:latin typeface="Yu Gothic"/>
+                <a:ea typeface="Yu Gothic"/>
+              </a:rPr>
+              <a:t>主要評価は握力変化（CT.gov）／MMN-RODS（企業資料）で出典間に食い違い→要確認</a:t>
+            </a:r>
+          </a:p>
+          <a:p>
+            <a:pPr>
+              <a:spcBef>
+                <a:spcPts val="800"/>
+              </a:spcBef>
+              <a:spcAft>
+                <a:spcPts val="700"/>
+              </a:spcAft>
+            </a:pPr>
+            <a:r>
+              <a:rPr sz="1800" b="1">
+                <a:solidFill>
+                  <a:srgbClr val="2E6DA4"/>
+                </a:solidFill>
+                <a:latin typeface="Yu Gothic"/>
+                <a:ea typeface="Yu Gothic"/>
+              </a:rPr>
+              <a:t>● </a:t>
+            </a:r>
+            <a:r>
+              <a:rPr sz="1800" b="1">
+                <a:solidFill>
+                  <a:srgbClr val="222222"/>
+                </a:solidFill>
+                <a:latin typeface="Yu Gothic"/>
+                <a:ea typeface="Yu Gothic"/>
+              </a:rPr>
+              <a:t>DNTH103（抗活性化C1s、皮下・2週毎）：第2相 MoMeNtum（MMN36名）、2H2026データ</a:t>
+            </a:r>
+          </a:p>
+          <a:p>
+            <a:pPr lvl="1">
+              <a:spcBef>
+                <a:spcPts val="200"/>
+              </a:spcBef>
+              <a:spcAft>
+                <a:spcPts val="700"/>
+              </a:spcAft>
+            </a:pPr>
+            <a:r>
+              <a:rPr sz="1500" b="1">
+                <a:solidFill>
+                  <a:srgbClr val="555555"/>
+                </a:solidFill>
+                <a:latin typeface="Yu Gothic"/>
+                <a:ea typeface="Yu Gothic"/>
+              </a:rPr>
+              <a:t>– </a:t>
+            </a:r>
+            <a:r>
+              <a:rPr sz="1500" b="0">
+                <a:solidFill>
+                  <a:srgbClr val="555555"/>
+                </a:solidFill>
+                <a:latin typeface="Yu Gothic"/>
+                <a:ea typeface="Yu Gothic"/>
+              </a:rPr>
+              <a:t>riliprubart（抗C1s, Sanofi）はMMN非対象（CIDP専用・難治CIDP第3相は無益性中止）</a:t>
+            </a:r>
+          </a:p>
+          <a:p>
+            <a:pPr lvl="1">
+              <a:spcBef>
+                <a:spcPts val="200"/>
+              </a:spcBef>
+              <a:spcAft>
+                <a:spcPts val="700"/>
+              </a:spcAft>
+            </a:pPr>
+            <a:r>
+              <a:rPr sz="1500" b="1">
+                <a:solidFill>
+                  <a:srgbClr val="555555"/>
+                </a:solidFill>
+                <a:latin typeface="Yu Gothic"/>
+                <a:ea typeface="Yu Gothic"/>
+              </a:rPr>
+              <a:t>– </a:t>
+            </a:r>
+            <a:r>
+              <a:rPr sz="1500" b="0">
+                <a:solidFill>
+                  <a:srgbClr val="555555"/>
+                </a:solidFill>
+                <a:latin typeface="Yu Gothic"/>
+                <a:ea typeface="Yu Gothic"/>
+              </a:rPr>
+              <a:t>eculizumab（抗C5）は小規模オープン試験で効果限定的（上流阻害へ主流移行）</a:t>
+            </a:r>
+          </a:p>
+        </p:txBody>
+      </p:sp>
+      <p:sp>
+        <p:nvSpPr>
+          <p:cNvPr id="7" name="TextBox 6"/>
+          <p:cNvSpPr txBox="1"/>
+          <p:nvPr/>
+        </p:nvSpPr>
+        <p:spPr>
+          <a:xfrm>
+            <a:off x="548640" y="6355080"/>
+            <a:ext cx="11064240" cy="365760"/>
+          </a:xfrm>
+          <a:prstGeom prst="rect">
+            <a:avLst/>
+          </a:prstGeom>
+          <a:noFill/>
+        </p:spPr>
+        <p:txBody>
+          <a:bodyPr wrap="square" anchor="t" lIns="50800" rIns="50800" tIns="25400" bIns="25400">
+            <a:spAutoFit/>
+          </a:bodyPr>
+          <a:lstStyle/>
+          <a:p>
+            <a:pPr algn="l">
+              <a:spcBef>
+                <a:spcPts val="0"/>
+              </a:spcBef>
+              <a:spcAft>
+                <a:spcPts val="400"/>
+              </a:spcAft>
+            </a:pPr>
+            <a:r>
+              <a:rPr sz="1050" b="0">
+                <a:solidFill>
+                  <a:srgbClr val="555555"/>
+                </a:solidFill>
+                <a:latin typeface="Yu Gothic"/>
+                <a:ea typeface="Yu Gothic"/>
+              </a:rPr>
+              <a:t>出典：ClinicalTrials.gov（NCT06742190/NCT06537999）／Sanofi press 2026／Fitzpatrick 2011</a:t>
+            </a:r>
+          </a:p>
+        </p:txBody>
+      </p:sp>
+      <p:sp>
+        <p:nvSpPr>
+          <p:cNvPr id="8" name="TextBox 7"/>
+          <p:cNvSpPr txBox="1"/>
+          <p:nvPr/>
+        </p:nvSpPr>
+        <p:spPr>
+          <a:xfrm>
+            <a:off x="11430000" y="109728"/>
+            <a:ext cx="640080" cy="274320"/>
+          </a:xfrm>
+          <a:prstGeom prst="rect">
+            <a:avLst/>
+          </a:prstGeom>
+          <a:noFill/>
+        </p:spPr>
+        <p:txBody>
+          <a:bodyPr wrap="square" anchor="t" lIns="50800" rIns="50800" tIns="25400" bIns="25400">
+            <a:spAutoFit/>
+          </a:bodyPr>
+          <a:lstStyle/>
+          <a:p>
+            <a:pPr algn="r">
+              <a:spcBef>
+                <a:spcPts val="0"/>
+              </a:spcBef>
+              <a:spcAft>
+                <a:spcPts val="400"/>
+              </a:spcAft>
+            </a:pPr>
+            <a:r>
+              <a:rPr sz="1200" b="1">
+                <a:solidFill>
+                  <a:srgbClr val="BBD3EA"/>
+                </a:solidFill>
+                <a:latin typeface="Yu Gothic"/>
+                <a:ea typeface="Yu Gothic"/>
+              </a:rPr>
+              <a:t>3</a:t>
+            </a:r>
+          </a:p>
+        </p:txBody>
+      </p:sp>
+    </p:spTree>
+  </p:cSld>
+  <p:clrMapOvr>
+    <a:masterClrMapping/>
+  </p:clrMapOvr>
+</p:sld>
+</file>
+
+<file path=ppt/slides/slide3.xml><?xml version="1.0" encoding="utf-8"?>
+<p:sld xmlns:a="http://schemas.openxmlformats.org/drawingml/2006/main" xmlns:p="http://schemas.openxmlformats.org/presentationml/2006/main" xmlns:r="http://schemas.openxmlformats.org/officeDocument/2006/relationships">
+  <p:cSld>
+    <p:spTree>
+      <p:nvGrpSpPr>
+        <p:cNvPr id="1" name=""/>
+        <p:cNvGrpSpPr/>
+        <p:nvPr/>
+      </p:nvGrpSpPr>
+      <p:grpSpPr/>
+      <p:sp>
+        <p:nvSpPr>
+          <p:cNvPr id="2" name="Rectangle 1"/>
+          <p:cNvSpPr/>
+          <p:nvPr/>
+        </p:nvSpPr>
+        <p:spPr>
+          <a:xfrm>
+            <a:off x="0" y="0"/>
+            <a:ext cx="12191695" cy="1051560"/>
+          </a:xfrm>
+          <a:prstGeom prst="rect">
+            <a:avLst/>
+          </a:prstGeom>
+          <a:solidFill>
+            <a:srgbClr val="1F3A5F"/>
+          </a:solidFill>
+          <a:ln>
+            <a:noFill/>
+          </a:ln>
+          <a:effectLst/>
+        </p:spPr>
+        <p:style>
+          <a:lnRef idx="1">
+            <a:schemeClr val="accent1"/>
+          </a:lnRef>
+          <a:fillRef idx="3">
+            <a:schemeClr val="accent1"/>
+          </a:fillRef>
+          <a:effectRef idx="2">
+            <a:schemeClr val="accent1"/>
+          </a:effectRef>
+          <a:fontRef idx="minor">
+            <a:schemeClr val="lt1"/>
+          </a:fontRef>
+        </p:style>
+        <p:txBody>
+          <a:bodyPr rtlCol="0" anchor="ctr"/>
+          <a:lstStyle/>
+          <a:p>
+            <a:pPr algn="ctr"/>
+          </a:p>
+        </p:txBody>
+      </p:sp>
+      <p:sp>
+        <p:nvSpPr>
+          <p:cNvPr id="3" name="Rectangle 2"/>
+          <p:cNvSpPr/>
+          <p:nvPr/>
+        </p:nvSpPr>
+        <p:spPr>
+          <a:xfrm>
+            <a:off x="0" y="1051560"/>
+            <a:ext cx="12191695" cy="50800"/>
+          </a:xfrm>
+          <a:prstGeom prst="rect">
+            <a:avLst/>
+          </a:prstGeom>
+          <a:solidFill>
+            <a:srgbClr val="2E6DA4"/>
+          </a:solidFill>
+          <a:ln>
+            <a:noFill/>
+          </a:ln>
+          <a:effectLst/>
+        </p:spPr>
+        <p:style>
+          <a:lnRef idx="1">
+            <a:schemeClr val="accent1"/>
+          </a:lnRef>
+          <a:fillRef idx="3">
+            <a:schemeClr val="accent1"/>
+          </a:fillRef>
+          <a:effectRef idx="2">
+            <a:schemeClr val="accent1"/>
+          </a:effectRef>
+          <a:fontRef idx="minor">
+            <a:schemeClr val="lt1"/>
+          </a:fontRef>
+        </p:style>
+        <p:txBody>
+          <a:bodyPr rtlCol="0" anchor="ctr"/>
+          <a:lstStyle/>
+          <a:p>
+            <a:pPr algn="ctr"/>
+          </a:p>
+        </p:txBody>
+      </p:sp>
+      <p:sp>
+        <p:nvSpPr>
+          <p:cNvPr id="4" name="TextBox 3"/>
+          <p:cNvSpPr txBox="1"/>
+          <p:nvPr/>
+        </p:nvSpPr>
+        <p:spPr>
+          <a:xfrm>
+            <a:off x="457200" y="109728"/>
+            <a:ext cx="10058400" cy="274320"/>
+          </a:xfrm>
+          <a:prstGeom prst="rect">
+            <a:avLst/>
+          </a:prstGeom>
+          <a:noFill/>
+        </p:spPr>
+        <p:txBody>
+          <a:bodyPr wrap="square" anchor="t" lIns="50800" rIns="50800" tIns="25400" bIns="25400">
+            <a:spAutoFit/>
+          </a:bodyPr>
+          <a:lstStyle/>
+          <a:p>
+            <a:pPr algn="l">
+              <a:spcBef>
+                <a:spcPts val="0"/>
+              </a:spcBef>
+              <a:spcAft>
+                <a:spcPts val="400"/>
+              </a:spcAft>
+            </a:pPr>
+            <a:r>
+              <a:rPr sz="1200" b="1">
+                <a:solidFill>
+                  <a:srgbClr val="BBD3EA"/>
+                </a:solidFill>
+                <a:latin typeface="Yu Gothic"/>
+                <a:ea typeface="Yu Gothic"/>
+              </a:rPr>
+              <a:t>AGENDA</a:t>
+            </a:r>
+          </a:p>
+        </p:txBody>
+      </p:sp>
+      <p:sp>
+        <p:nvSpPr>
+          <p:cNvPr id="5" name="TextBox 4"/>
+          <p:cNvSpPr txBox="1"/>
+          <p:nvPr/>
+        </p:nvSpPr>
+        <p:spPr>
+          <a:xfrm>
+            <a:off x="457200" y="329184"/>
+            <a:ext cx="11247120" cy="685800"/>
+          </a:xfrm>
+          <a:prstGeom prst="rect">
+            <a:avLst/>
+          </a:prstGeom>
+          <a:noFill/>
+        </p:spPr>
+        <p:txBody>
+          <a:bodyPr wrap="square" anchor="ctr" lIns="50800" rIns="50800" tIns="25400" bIns="25400">
+            <a:spAutoFit/>
+          </a:bodyPr>
+          <a:lstStyle/>
+          <a:p>
+            <a:pPr algn="l">
+              <a:spcBef>
+                <a:spcPts val="0"/>
+              </a:spcBef>
+              <a:spcAft>
+                <a:spcPts val="400"/>
+              </a:spcAft>
+            </a:pPr>
+            <a:r>
+              <a:rPr sz="2600" b="1">
+                <a:solidFill>
+                  <a:srgbClr val="FFFFFF"/>
+                </a:solidFill>
+                <a:latin typeface="Yu Gothic"/>
+                <a:ea typeface="Yu Gothic"/>
+              </a:rPr>
+              <a:t>本日の内容</a:t>
+            </a:r>
+          </a:p>
+        </p:txBody>
+      </p:sp>
+      <p:sp>
+        <p:nvSpPr>
+          <p:cNvPr id="6" name="TextBox 5"/>
+          <p:cNvSpPr txBox="1"/>
+          <p:nvPr/>
+        </p:nvSpPr>
+        <p:spPr>
+          <a:xfrm>
+            <a:off x="548640" y="1325880"/>
+            <a:ext cx="11064240" cy="5029200"/>
+          </a:xfrm>
+          <a:prstGeom prst="rect">
+            <a:avLst/>
+          </a:prstGeom>
+          <a:noFill/>
+        </p:spPr>
+        <p:txBody>
+          <a:bodyPr wrap="square">
+            <a:spAutoFit/>
+          </a:bodyPr>
+          <a:lstStyle/>
+          <a:p>
+            <a:pPr>
+              <a:spcBef>
+                <a:spcPts val="200"/>
+              </a:spcBef>
+              <a:spcAft>
+                <a:spcPts val="700"/>
+              </a:spcAft>
+            </a:pPr>
+            <a:r>
+              <a:rPr sz="1800" b="1">
+                <a:solidFill>
+                  <a:srgbClr val="2E6DA4"/>
+                </a:solidFill>
+                <a:latin typeface="Yu Gothic"/>
+                <a:ea typeface="Yu Gothic"/>
+              </a:rPr>
+              <a:t>● </a:t>
+            </a:r>
+            <a:r>
+              <a:rPr sz="1800" b="1">
+                <a:solidFill>
+                  <a:srgbClr val="222222"/>
+                </a:solidFill>
+                <a:latin typeface="Yu Gothic"/>
+                <a:ea typeface="Yu Gothic"/>
+              </a:rPr>
+              <a:t>MMN とは — 疾患概要・疫学・病態のアップデート</a:t>
+            </a:r>
+          </a:p>
+          <a:p>
+            <a:pPr lvl="1">
+              <a:spcBef>
+                <a:spcPts val="200"/>
+              </a:spcBef>
+              <a:spcAft>
+                <a:spcPts val="700"/>
+              </a:spcAft>
+            </a:pPr>
+            <a:r>
+              <a:rPr sz="1500" b="1">
+                <a:solidFill>
+                  <a:srgbClr val="555555"/>
+                </a:solidFill>
+                <a:latin typeface="Yu Gothic"/>
+                <a:ea typeface="Yu Gothic"/>
+              </a:rPr>
+              <a:t>– </a:t>
+            </a:r>
+            <a:r>
+              <a:rPr sz="1500" b="0">
+                <a:solidFill>
+                  <a:srgbClr val="555555"/>
+                </a:solidFill>
+                <a:latin typeface="Yu Gothic"/>
+                <a:ea typeface="Yu Gothic"/>
+              </a:rPr>
+              <a:t>日本全国調査2024、補体（C2依存性）が病態の中心へ</a:t>
+            </a:r>
+          </a:p>
+          <a:p>
+            <a:pPr>
+              <a:spcBef>
+                <a:spcPts val="600"/>
+              </a:spcBef>
+              <a:spcAft>
+                <a:spcPts val="700"/>
+              </a:spcAft>
+            </a:pPr>
+            <a:r>
+              <a:rPr sz="1800" b="1">
+                <a:solidFill>
+                  <a:srgbClr val="2E6DA4"/>
+                </a:solidFill>
+                <a:latin typeface="Yu Gothic"/>
+                <a:ea typeface="Yu Gothic"/>
+              </a:rPr>
+              <a:t>● </a:t>
+            </a:r>
+            <a:r>
+              <a:rPr sz="1800" b="1">
+                <a:solidFill>
+                  <a:srgbClr val="222222"/>
+                </a:solidFill>
+                <a:latin typeface="Yu Gothic"/>
+                <a:ea typeface="Yu Gothic"/>
+              </a:rPr>
+              <a:t>診断のアップデートと「新ガイドライン」</a:t>
+            </a:r>
+          </a:p>
+          <a:p>
+            <a:pPr lvl="1">
+              <a:spcBef>
+                <a:spcPts val="200"/>
+              </a:spcBef>
+              <a:spcAft>
+                <a:spcPts val="700"/>
+              </a:spcAft>
+            </a:pPr>
+            <a:r>
+              <a:rPr sz="1500" b="1">
+                <a:solidFill>
+                  <a:srgbClr val="555555"/>
+                </a:solidFill>
+                <a:latin typeface="Yu Gothic"/>
+                <a:ea typeface="Yu Gothic"/>
+              </a:rPr>
+              <a:t>– </a:t>
+            </a:r>
+            <a:r>
+              <a:rPr sz="1500" b="0">
+                <a:solidFill>
+                  <a:srgbClr val="555555"/>
+                </a:solidFill>
+                <a:latin typeface="Yu Gothic"/>
+                <a:ea typeface="Yu Gothic"/>
+              </a:rPr>
+              <a:t>診断基準の再検討（CBを超えて）、EAN/PNS 新ガイドライン近刊</a:t>
+            </a:r>
+          </a:p>
+          <a:p>
+            <a:pPr>
+              <a:spcBef>
+                <a:spcPts val="600"/>
+              </a:spcBef>
+              <a:spcAft>
+                <a:spcPts val="700"/>
+              </a:spcAft>
+            </a:pPr>
+            <a:r>
+              <a:rPr sz="1800" b="1">
+                <a:solidFill>
+                  <a:srgbClr val="2E6DA4"/>
+                </a:solidFill>
+                <a:latin typeface="Yu Gothic"/>
+                <a:ea typeface="Yu Gothic"/>
+              </a:rPr>
+              <a:t>● </a:t>
+            </a:r>
+            <a:r>
+              <a:rPr sz="1800" b="1">
+                <a:solidFill>
+                  <a:srgbClr val="222222"/>
+                </a:solidFill>
+                <a:latin typeface="Yu Gothic"/>
+                <a:ea typeface="Yu Gothic"/>
+              </a:rPr>
+              <a:t>治療のアップデート —「本命」補体阻害薬</a:t>
+            </a:r>
+          </a:p>
+          <a:p>
+            <a:pPr lvl="1">
+              <a:spcBef>
+                <a:spcPts val="200"/>
+              </a:spcBef>
+              <a:spcAft>
+                <a:spcPts val="700"/>
+              </a:spcAft>
+            </a:pPr>
+            <a:r>
+              <a:rPr sz="1500" b="1">
+                <a:solidFill>
+                  <a:srgbClr val="555555"/>
+                </a:solidFill>
+                <a:latin typeface="Yu Gothic"/>
+                <a:ea typeface="Yu Gothic"/>
+              </a:rPr>
+              <a:t>– </a:t>
+            </a:r>
+            <a:r>
+              <a:rPr sz="1500" b="0">
+                <a:solidFill>
+                  <a:srgbClr val="555555"/>
+                </a:solidFill>
+                <a:latin typeface="Yu Gothic"/>
+                <a:ea typeface="Yu Gothic"/>
+              </a:rPr>
+              <a:t>empasiprubart（ARDA/EMPASSION）ほか、新規IgG療法への接続</a:t>
+            </a:r>
+          </a:p>
+        </p:txBody>
+      </p:sp>
+    </p:spTree>
+  </p:cSld>
+  <p:clrMapOvr>
+    <a:masterClrMapping/>
+  </p:clrMapOvr>
+</p:sld>
+</file>
+
+<file path=ppt/slides/slide30.xml><?xml version="1.0" encoding="utf-8"?>
 <p:sld xmlns:a="http://schemas.openxmlformats.org/drawingml/2006/main" xmlns:p="http://schemas.openxmlformats.org/presentationml/2006/main" xmlns:r="http://schemas.openxmlformats.org/officeDocument/2006/relationships">
   <p:cSld>
     <p:spTree>
@@ -10068,7 +13854,7 @@
 </p:sld>
 </file>
 
-<file path=ppt/slides/slide23.xml><?xml version="1.0" encoding="utf-8"?>
+<file path=ppt/slides/slide31.xml><?xml version="1.0" encoding="utf-8"?>
 <p:sld xmlns:a="http://schemas.openxmlformats.org/drawingml/2006/main" xmlns:p="http://schemas.openxmlformats.org/presentationml/2006/main" xmlns:r="http://schemas.openxmlformats.org/officeDocument/2006/relationships">
   <p:cSld>
     <p:spTree>
@@ -10509,7 +14295,7 @@
 </p:sld>
 </file>
 
-<file path=ppt/slides/slide24.xml><?xml version="1.0" encoding="utf-8"?>
+<file path=ppt/slides/slide32.xml><?xml version="1.0" encoding="utf-8"?>
 <p:sld xmlns:a="http://schemas.openxmlformats.org/drawingml/2006/main" xmlns:p="http://schemas.openxmlformats.org/presentationml/2006/main" xmlns:r="http://schemas.openxmlformats.org/officeDocument/2006/relationships">
   <p:cSld>
     <p:spTree>
@@ -10947,7 +14733,7 @@
 </p:sld>
 </file>
 
-<file path=ppt/slides/slide25.xml><?xml version="1.0" encoding="utf-8"?>
+<file path=ppt/slides/slide33.xml><?xml version="1.0" encoding="utf-8"?>
 <p:sld xmlns:a="http://schemas.openxmlformats.org/drawingml/2006/main" xmlns:p="http://schemas.openxmlformats.org/presentationml/2006/main" xmlns:r="http://schemas.openxmlformats.org/officeDocument/2006/relationships">
   <p:cSld>
     <p:spTree>
@@ -11432,7 +15218,7 @@
 </p:sld>
 </file>
 
-<file path=ppt/slides/slide3.xml><?xml version="1.0" encoding="utf-8"?>
+<file path=ppt/slides/slide34.xml><?xml version="1.0" encoding="utf-8"?>
 <p:sld xmlns:a="http://schemas.openxmlformats.org/drawingml/2006/main" xmlns:p="http://schemas.openxmlformats.org/presentationml/2006/main" xmlns:r="http://schemas.openxmlformats.org/officeDocument/2006/relationships">
   <p:cSld>
     <p:spTree>
@@ -11568,7 +15354,7 @@
                 <a:latin typeface="Yu Gothic"/>
                 <a:ea typeface="Yu Gothic"/>
               </a:rPr>
-              <a:t>AGENDA</a:t>
+              <a:t>REFERENCES</a:t>
             </a:r>
           </a:p>
         </p:txBody>
@@ -11611,7 +15397,7 @@
                 <a:latin typeface="Yu Gothic"/>
                 <a:ea typeface="Yu Gothic"/>
               </a:rPr>
-              <a:t>本日の内容</a:t>
+              <a:t>主要文献（2025–2026 アップデート）</a:t>
             </a:r>
           </a:p>
         </p:txBody>
@@ -11647,28 +15433,28 @@
               </a:spcAft>
             </a:pPr>
             <a:r>
-              <a:rPr sz="1800" b="1">
+              <a:rPr sz="1250" b="1">
                 <a:solidFill>
                   <a:srgbClr val="2E6DA4"/>
                 </a:solidFill>
                 <a:latin typeface="Yu Gothic"/>
                 <a:ea typeface="Yu Gothic"/>
               </a:rPr>
-              <a:t>● </a:t>
-            </a:r>
-            <a:r>
-              <a:rPr sz="1800" b="1">
+              <a:t>10. </a:t>
+            </a:r>
+            <a:r>
+              <a:rPr sz="1250" b="0">
                 <a:solidFill>
                   <a:srgbClr val="222222"/>
                 </a:solidFill>
                 <a:latin typeface="Yu Gothic"/>
                 <a:ea typeface="Yu Gothic"/>
               </a:rPr>
-              <a:t>MMN とは — 疾患概要・疫学・病態のアップデート</a:t>
-            </a:r>
-          </a:p>
-          <a:p>
-            <a:pPr lvl="1">
+              <a:t>Rajabally YA, et al. Variably Defined CB, TD and Other Electrophysiological Abnormalities in MMN. Eur J Neurol 2025;32:e70361.</a:t>
+            </a:r>
+          </a:p>
+          <a:p>
+            <a:pPr>
               <a:spcBef>
                 <a:spcPts val="200"/>
               </a:spcBef>
@@ -11677,58 +15463,58 @@
               </a:spcAft>
             </a:pPr>
             <a:r>
-              <a:rPr sz="1500" b="1">
-                <a:solidFill>
-                  <a:srgbClr val="555555"/>
-                </a:solidFill>
-                <a:latin typeface="Yu Gothic"/>
-                <a:ea typeface="Yu Gothic"/>
-              </a:rPr>
-              <a:t>– </a:t>
-            </a:r>
-            <a:r>
-              <a:rPr sz="1500" b="0">
-                <a:solidFill>
-                  <a:srgbClr val="555555"/>
-                </a:solidFill>
-                <a:latin typeface="Yu Gothic"/>
-                <a:ea typeface="Yu Gothic"/>
-              </a:rPr>
-              <a:t>日本全国調査2024、補体（C2依存性）が病態の中心へ</a:t>
+              <a:rPr sz="1250" b="1">
+                <a:solidFill>
+                  <a:srgbClr val="2E6DA4"/>
+                </a:solidFill>
+                <a:latin typeface="Yu Gothic"/>
+                <a:ea typeface="Yu Gothic"/>
+              </a:rPr>
+              <a:t>11. </a:t>
+            </a:r>
+            <a:r>
+              <a:rPr sz="1250" b="0">
+                <a:solidFill>
+                  <a:srgbClr val="222222"/>
+                </a:solidFill>
+                <a:latin typeface="Yu Gothic"/>
+                <a:ea typeface="Yu Gothic"/>
+              </a:rPr>
+              <a:t>Posa A, et al. Patterns of motor nerve demyelination and prognostic significance in MMN. IBRO Neurosci Rep 2026;20:474-479.</a:t>
             </a:r>
           </a:p>
           <a:p>
             <a:pPr>
               <a:spcBef>
-                <a:spcPts val="600"/>
+                <a:spcPts val="200"/>
               </a:spcBef>
               <a:spcAft>
                 <a:spcPts val="700"/>
               </a:spcAft>
             </a:pPr>
             <a:r>
-              <a:rPr sz="1800" b="1">
+              <a:rPr sz="1250" b="1">
                 <a:solidFill>
                   <a:srgbClr val="2E6DA4"/>
                 </a:solidFill>
                 <a:latin typeface="Yu Gothic"/>
                 <a:ea typeface="Yu Gothic"/>
               </a:rPr>
-              <a:t>● </a:t>
-            </a:r>
-            <a:r>
-              <a:rPr sz="1800" b="1">
+              <a:t>12. </a:t>
+            </a:r>
+            <a:r>
+              <a:rPr sz="1250" b="0">
                 <a:solidFill>
                   <a:srgbClr val="222222"/>
                 </a:solidFill>
                 <a:latin typeface="Yu Gothic"/>
                 <a:ea typeface="Yu Gothic"/>
               </a:rPr>
-              <a:t>診断のアップデートと「新ガイドライン」</a:t>
-            </a:r>
-          </a:p>
-          <a:p>
-            <a:pPr lvl="1">
+              <a:t>Fang SY, et al. Differentiating MMN from hand-onset ALS. J Chin Med Assoc 2026;89:437-444.</a:t>
+            </a:r>
+          </a:p>
+          <a:p>
+            <a:pPr>
               <a:spcBef>
                 <a:spcPts val="200"/>
               </a:spcBef>
@@ -11737,58 +15523,58 @@
               </a:spcAft>
             </a:pPr>
             <a:r>
-              <a:rPr sz="1500" b="1">
-                <a:solidFill>
-                  <a:srgbClr val="555555"/>
-                </a:solidFill>
-                <a:latin typeface="Yu Gothic"/>
-                <a:ea typeface="Yu Gothic"/>
-              </a:rPr>
-              <a:t>– </a:t>
-            </a:r>
-            <a:r>
-              <a:rPr sz="1500" b="0">
-                <a:solidFill>
-                  <a:srgbClr val="555555"/>
-                </a:solidFill>
-                <a:latin typeface="Yu Gothic"/>
-                <a:ea typeface="Yu Gothic"/>
-              </a:rPr>
-              <a:t>診断基準の再検討（CBを超えて）、EAN/PNS 新ガイドライン近刊</a:t>
+              <a:rPr sz="1250" b="1">
+                <a:solidFill>
+                  <a:srgbClr val="2E6DA4"/>
+                </a:solidFill>
+                <a:latin typeface="Yu Gothic"/>
+                <a:ea typeface="Yu Gothic"/>
+              </a:rPr>
+              <a:t>13. </a:t>
+            </a:r>
+            <a:r>
+              <a:rPr sz="1250" b="0">
+                <a:solidFill>
+                  <a:srgbClr val="222222"/>
+                </a:solidFill>
+                <a:latin typeface="Yu Gothic"/>
+                <a:ea typeface="Yu Gothic"/>
+              </a:rPr>
+              <a:t>Arlt FA, et al. Septin multimer autoantibodies in severe motor neuropathy. Brain 2026;awag183.</a:t>
             </a:r>
           </a:p>
           <a:p>
             <a:pPr>
               <a:spcBef>
-                <a:spcPts val="600"/>
+                <a:spcPts val="200"/>
               </a:spcBef>
               <a:spcAft>
                 <a:spcPts val="700"/>
               </a:spcAft>
             </a:pPr>
             <a:r>
-              <a:rPr sz="1800" b="1">
+              <a:rPr sz="1250" b="1">
                 <a:solidFill>
                   <a:srgbClr val="2E6DA4"/>
                 </a:solidFill>
                 <a:latin typeface="Yu Gothic"/>
                 <a:ea typeface="Yu Gothic"/>
               </a:rPr>
-              <a:t>● </a:t>
-            </a:r>
-            <a:r>
-              <a:rPr sz="1800" b="1">
+              <a:t>14. </a:t>
+            </a:r>
+            <a:r>
+              <a:rPr sz="1250" b="0">
                 <a:solidFill>
                   <a:srgbClr val="222222"/>
                 </a:solidFill>
                 <a:latin typeface="Yu Gothic"/>
                 <a:ea typeface="Yu Gothic"/>
               </a:rPr>
-              <a:t>治療のアップデート —「本命」補体阻害薬</a:t>
-            </a:r>
-          </a:p>
-          <a:p>
-            <a:pPr lvl="1">
+              <a:t>Niu J, et al. Nerve Ultrasound of MMN and Motor/Typical CIDP. Can J Neurol Sci 2025.</a:t>
+            </a:r>
+          </a:p>
+          <a:p>
+            <a:pPr>
               <a:spcBef>
                 <a:spcPts val="200"/>
               </a:spcBef>
@@ -11797,24 +15583,144 @@
               </a:spcAft>
             </a:pPr>
             <a:r>
-              <a:rPr sz="1500" b="1">
-                <a:solidFill>
-                  <a:srgbClr val="555555"/>
-                </a:solidFill>
-                <a:latin typeface="Yu Gothic"/>
-                <a:ea typeface="Yu Gothic"/>
-              </a:rPr>
-              <a:t>– </a:t>
-            </a:r>
-            <a:r>
-              <a:rPr sz="1500" b="0">
-                <a:solidFill>
-                  <a:srgbClr val="555555"/>
-                </a:solidFill>
-                <a:latin typeface="Yu Gothic"/>
-                <a:ea typeface="Yu Gothic"/>
-              </a:rPr>
-              <a:t>empasiprubart（ARDA/EMPASSION）ほか、新規IgG療法への接続</a:t>
+              <a:rPr sz="1250" b="1">
+                <a:solidFill>
+                  <a:srgbClr val="2E6DA4"/>
+                </a:solidFill>
+                <a:latin typeface="Yu Gothic"/>
+                <a:ea typeface="Yu Gothic"/>
+              </a:rPr>
+              <a:t>15. </a:t>
+            </a:r>
+            <a:r>
+              <a:rPr sz="1250" b="0">
+                <a:solidFill>
+                  <a:srgbClr val="222222"/>
+                </a:solidFill>
+                <a:latin typeface="Yu Gothic"/>
+                <a:ea typeface="Yu Gothic"/>
+              </a:rPr>
+              <a:t>Krijgsman D, et al. IgM Anti-Ganglioside Binding and Complement Activation in iPSC-MN Model for MMN. Neurol Neuroimmunol Neuroinflamm 2026;13:e200482.</a:t>
+            </a:r>
+          </a:p>
+          <a:p>
+            <a:pPr>
+              <a:spcBef>
+                <a:spcPts val="200"/>
+              </a:spcBef>
+              <a:spcAft>
+                <a:spcPts val="700"/>
+              </a:spcAft>
+            </a:pPr>
+            <a:r>
+              <a:rPr sz="1250" b="1">
+                <a:solidFill>
+                  <a:srgbClr val="2E6DA4"/>
+                </a:solidFill>
+                <a:latin typeface="Yu Gothic"/>
+                <a:ea typeface="Yu Gothic"/>
+              </a:rPr>
+              <a:t>16. </a:t>
+            </a:r>
+            <a:r>
+              <a:rPr sz="1250" b="0">
+                <a:solidFill>
+                  <a:srgbClr val="222222"/>
+                </a:solidFill>
+                <a:latin typeface="Yu Gothic"/>
+                <a:ea typeface="Yu Gothic"/>
+              </a:rPr>
+              <a:t>Shimizu F, et al. Blood-Nerve Barrier Breakdown Induced by IgG in CIDP and MMN. Int J Mol Sci 2026;27:1088.</a:t>
+            </a:r>
+          </a:p>
+          <a:p>
+            <a:pPr>
+              <a:spcBef>
+                <a:spcPts val="200"/>
+              </a:spcBef>
+              <a:spcAft>
+                <a:spcPts val="700"/>
+              </a:spcAft>
+            </a:pPr>
+            <a:r>
+              <a:rPr sz="1250" b="1">
+                <a:solidFill>
+                  <a:srgbClr val="2E6DA4"/>
+                </a:solidFill>
+                <a:latin typeface="Yu Gothic"/>
+                <a:ea typeface="Yu Gothic"/>
+              </a:rPr>
+              <a:t>17. </a:t>
+            </a:r>
+            <a:r>
+              <a:rPr sz="1250" b="0">
+                <a:solidFill>
+                  <a:srgbClr val="222222"/>
+                </a:solidFill>
+                <a:latin typeface="Yu Gothic"/>
+                <a:ea typeface="Yu Gothic"/>
+              </a:rPr>
+              <a:t>Zhou L, et al. IVIg frequency in MMN: nerve conduction outcomes. BMC Neurol 2026. ／ Noushad MA, et al. Long-Term Outcomes via MMN-RODS. JPNS 2025;30:e70079.</a:t>
+            </a:r>
+          </a:p>
+          <a:p>
+            <a:pPr>
+              <a:spcBef>
+                <a:spcPts val="200"/>
+              </a:spcBef>
+              <a:spcAft>
+                <a:spcPts val="700"/>
+              </a:spcAft>
+            </a:pPr>
+            <a:r>
+              <a:rPr sz="1250" b="1">
+                <a:solidFill>
+                  <a:srgbClr val="2E6DA4"/>
+                </a:solidFill>
+                <a:latin typeface="Yu Gothic"/>
+                <a:ea typeface="Yu Gothic"/>
+              </a:rPr>
+              <a:t>18. </a:t>
+            </a:r>
+            <a:r>
+              <a:rPr sz="1250" b="0">
+                <a:solidFill>
+                  <a:srgbClr val="222222"/>
+                </a:solidFill>
+                <a:latin typeface="Yu Gothic"/>
+                <a:ea typeface="Yu Gothic"/>
+              </a:rPr>
+              <a:t>Basta I, et al. Long-term motor stability but increasing non-motor burden in MMN. Front Hum Neurosci 2026;20:1824742. ／ Gingele S, et al. IV→SC Ig in CIDP and MMN. Neurol Ther 2026;15:165-177.</a:t>
+            </a:r>
+          </a:p>
+          <a:p>
+            <a:pPr>
+              <a:spcBef>
+                <a:spcPts val="200"/>
+              </a:spcBef>
+              <a:spcAft>
+                <a:spcPts val="700"/>
+              </a:spcAft>
+            </a:pPr>
+            <a:r>
+              <a:rPr sz="1250" b="1">
+                <a:solidFill>
+                  <a:srgbClr val="2E6DA4"/>
+                </a:solidFill>
+                <a:latin typeface="Yu Gothic"/>
+                <a:ea typeface="Yu Gothic"/>
+              </a:rPr>
+              <a:t>19. </a:t>
+            </a:r>
+            <a:r>
+              <a:rPr sz="1250" b="0">
+                <a:solidFill>
+                  <a:srgbClr val="222222"/>
+                </a:solidFill>
+                <a:latin typeface="Yu Gothic"/>
+                <a:ea typeface="Yu Gothic"/>
+              </a:rPr>
+              <a:t>Khateb M, Bril V. Nipocalimab and other FcRn blockers in neuromuscular disorders. Pharmacol Ther 2026;286:109071.</a:t>
             </a:r>
           </a:p>
         </p:txBody>
@@ -13915,7 +17821,7 @@
         <p:spPr>
           <a:xfrm>
             <a:off x="0" y="0"/>
-            <a:ext cx="12191695" cy="6858000"/>
+            <a:ext cx="12191695" cy="1051560"/>
           </a:xfrm>
           <a:prstGeom prst="rect">
             <a:avLst/>
@@ -13958,8 +17864,8 @@
         </p:nvSpPr>
         <p:spPr>
           <a:xfrm>
-            <a:off x="822960" y="2743200"/>
-            <a:ext cx="1463040" cy="76200"/>
+            <a:off x="0" y="1051560"/>
+            <a:ext cx="12191695" cy="50800"/>
           </a:xfrm>
           <a:prstGeom prst="rect">
             <a:avLst/>
@@ -14002,8 +17908,8 @@
         </p:nvSpPr>
         <p:spPr>
           <a:xfrm>
-            <a:off x="822960" y="1828800"/>
-            <a:ext cx="2743200" cy="914400"/>
+            <a:off x="457200" y="109728"/>
+            <a:ext cx="10058400" cy="274320"/>
           </a:xfrm>
           <a:prstGeom prst="rect">
             <a:avLst/>
@@ -14025,14 +17931,14 @@
               </a:spcAft>
             </a:pPr>
             <a:r>
-              <a:rPr sz="8000" b="1">
-                <a:solidFill>
-                  <a:srgbClr val="3E6A99"/>
-                </a:solidFill>
-                <a:latin typeface="Yu Gothic"/>
-                <a:ea typeface="Yu Gothic"/>
-              </a:rPr>
-              <a:t>2</a:t>
+              <a:rPr sz="1200" b="1">
+                <a:solidFill>
+                  <a:srgbClr val="BBD3EA"/>
+                </a:solidFill>
+                <a:latin typeface="Yu Gothic"/>
+                <a:ea typeface="Yu Gothic"/>
+              </a:rPr>
+              <a:t>1｜病態（新）</a:t>
             </a:r>
           </a:p>
         </p:txBody>
@@ -14045,8 +17951,224 @@
         </p:nvSpPr>
         <p:spPr>
           <a:xfrm>
-            <a:off x="822960" y="2926080"/>
-            <a:ext cx="10515600" cy="1188720"/>
+            <a:off x="457200" y="329184"/>
+            <a:ext cx="11247120" cy="685800"/>
+          </a:xfrm>
+          <a:prstGeom prst="rect">
+            <a:avLst/>
+          </a:prstGeom>
+          <a:noFill/>
+        </p:spPr>
+        <p:txBody>
+          <a:bodyPr wrap="square" anchor="ctr" lIns="50800" rIns="50800" tIns="25400" bIns="25400">
+            <a:spAutoFit/>
+          </a:bodyPr>
+          <a:lstStyle/>
+          <a:p>
+            <a:pPr algn="l">
+              <a:spcBef>
+                <a:spcPts val="0"/>
+              </a:spcBef>
+              <a:spcAft>
+                <a:spcPts val="400"/>
+              </a:spcAft>
+            </a:pPr>
+            <a:r>
+              <a:rPr sz="2600" b="1">
+                <a:solidFill>
+                  <a:srgbClr val="FFFFFF"/>
+                </a:solidFill>
+                <a:latin typeface="Yu Gothic"/>
+                <a:ea typeface="Yu Gothic"/>
+              </a:rPr>
+              <a:t>病態③ — 補体活性化は臨床像と相関、阻害薬の前臨床根拠</a:t>
+            </a:r>
+          </a:p>
+        </p:txBody>
+      </p:sp>
+      <p:sp>
+        <p:nvSpPr>
+          <p:cNvPr id="6" name="TextBox 5"/>
+          <p:cNvSpPr txBox="1"/>
+          <p:nvPr/>
+        </p:nvSpPr>
+        <p:spPr>
+          <a:xfrm>
+            <a:off x="548640" y="1325880"/>
+            <a:ext cx="11064240" cy="5029200"/>
+          </a:xfrm>
+          <a:prstGeom prst="rect">
+            <a:avLst/>
+          </a:prstGeom>
+          <a:noFill/>
+        </p:spPr>
+        <p:txBody>
+          <a:bodyPr wrap="square">
+            <a:spAutoFit/>
+          </a:bodyPr>
+          <a:lstStyle/>
+          <a:p>
+            <a:pPr>
+              <a:spcBef>
+                <a:spcPts val="200"/>
+              </a:spcBef>
+              <a:spcAft>
+                <a:spcPts val="700"/>
+              </a:spcAft>
+            </a:pPr>
+            <a:r>
+              <a:rPr sz="1800" b="1">
+                <a:solidFill>
+                  <a:srgbClr val="2E6DA4"/>
+                </a:solidFill>
+                <a:latin typeface="Yu Gothic"/>
+                <a:ea typeface="Yu Gothic"/>
+              </a:rPr>
+              <a:t>● </a:t>
+            </a:r>
+            <a:r>
+              <a:rPr sz="1800" b="1">
+                <a:solidFill>
+                  <a:srgbClr val="222222"/>
+                </a:solidFill>
+                <a:latin typeface="Yu Gothic"/>
+                <a:ea typeface="Yu Gothic"/>
+              </a:rPr>
+              <a:t>MMN 137例の血清 × iPS由来運動ニューロンモデル</a:t>
+            </a:r>
+          </a:p>
+          <a:p>
+            <a:pPr lvl="1">
+              <a:spcBef>
+                <a:spcPts val="200"/>
+              </a:spcBef>
+              <a:spcAft>
+                <a:spcPts val="700"/>
+              </a:spcAft>
+            </a:pPr>
+            <a:r>
+              <a:rPr sz="1500" b="1">
+                <a:solidFill>
+                  <a:srgbClr val="555555"/>
+                </a:solidFill>
+                <a:latin typeface="Yu Gothic"/>
+                <a:ea typeface="Yu Gothic"/>
+              </a:rPr>
+              <a:t>– </a:t>
+            </a:r>
+            <a:r>
+              <a:rPr sz="1500" b="0">
+                <a:solidFill>
+                  <a:srgbClr val="555555"/>
+                </a:solidFill>
+                <a:latin typeface="Yu Gothic"/>
+                <a:ea typeface="Yu Gothic"/>
+              </a:rPr>
+              <a:t>IgM結合↑→C3沈着↑が、筋力低下(MRC)・必要IVIg用量・軸索障害の程度と相関</a:t>
+            </a:r>
+          </a:p>
+          <a:p>
+            <a:pPr lvl="1">
+              <a:spcBef>
+                <a:spcPts val="200"/>
+              </a:spcBef>
+              <a:spcAft>
+                <a:spcPts val="700"/>
+              </a:spcAft>
+            </a:pPr>
+            <a:r>
+              <a:rPr sz="1500" b="1">
+                <a:solidFill>
+                  <a:srgbClr val="555555"/>
+                </a:solidFill>
+                <a:latin typeface="Yu Gothic"/>
+                <a:ea typeface="Yu Gothic"/>
+              </a:rPr>
+              <a:t>– </a:t>
+            </a:r>
+            <a:r>
+              <a:rPr sz="1500" b="0">
+                <a:solidFill>
+                  <a:srgbClr val="555555"/>
+                </a:solidFill>
+                <a:latin typeface="Yu Gothic"/>
+                <a:ea typeface="Yu Gothic"/>
+              </a:rPr>
+              <a:t>補体活性化は振動覚異常・腕神経叢MRI異常とも相関</a:t>
+            </a:r>
+          </a:p>
+          <a:p>
+            <a:pPr>
+              <a:spcBef>
+                <a:spcPts val="800"/>
+              </a:spcBef>
+              <a:spcAft>
+                <a:spcPts val="700"/>
+              </a:spcAft>
+            </a:pPr>
+            <a:r>
+              <a:rPr sz="1800" b="1">
+                <a:solidFill>
+                  <a:srgbClr val="2E6DA4"/>
+                </a:solidFill>
+                <a:latin typeface="Yu Gothic"/>
+                <a:ea typeface="Yu Gothic"/>
+              </a:rPr>
+              <a:t>● </a:t>
+            </a:r>
+            <a:r>
+              <a:rPr sz="1800" b="1">
+                <a:solidFill>
+                  <a:srgbClr val="1F3A5F"/>
+                </a:solidFill>
+                <a:latin typeface="Yu Gothic"/>
+                <a:ea typeface="Yu Gothic"/>
+              </a:rPr>
+              <a:t>IVIgは補体活性化を34–54%しか抑制しない</a:t>
+            </a:r>
+          </a:p>
+          <a:p>
+            <a:pPr lvl="1">
+              <a:spcBef>
+                <a:spcPts val="200"/>
+              </a:spcBef>
+              <a:spcAft>
+                <a:spcPts val="700"/>
+              </a:spcAft>
+            </a:pPr>
+            <a:r>
+              <a:rPr sz="1500" b="1">
+                <a:solidFill>
+                  <a:srgbClr val="2E7D32"/>
+                </a:solidFill>
+                <a:latin typeface="Yu Gothic"/>
+                <a:ea typeface="Yu Gothic"/>
+              </a:rPr>
+              <a:t>▶ </a:t>
+            </a:r>
+            <a:r>
+              <a:rPr sz="1500" b="1">
+                <a:solidFill>
+                  <a:srgbClr val="2E7D32"/>
+                </a:solidFill>
+                <a:latin typeface="Yu Gothic"/>
+                <a:ea typeface="Yu Gothic"/>
+              </a:rPr>
+              <a:t>特異的補体阻害薬はモデルで89.1–98.7%抑制 → 補体阻害の前臨床的根拠</a:t>
+            </a:r>
+          </a:p>
+        </p:txBody>
+      </p:sp>
+      <p:sp>
+        <p:nvSpPr>
+          <p:cNvPr id="7" name="TextBox 6"/>
+          <p:cNvSpPr txBox="1"/>
+          <p:nvPr/>
+        </p:nvSpPr>
+        <p:spPr>
+          <a:xfrm>
+            <a:off x="548640" y="6355080"/>
+            <a:ext cx="11064240" cy="365760"/>
           </a:xfrm>
           <a:prstGeom prst="rect">
             <a:avLst/>
@@ -14068,28 +18190,28 @@
               </a:spcAft>
             </a:pPr>
             <a:r>
-              <a:rPr sz="3600" b="1">
-                <a:solidFill>
-                  <a:srgbClr val="FFFFFF"/>
-                </a:solidFill>
-                <a:latin typeface="Yu Gothic"/>
-                <a:ea typeface="Yu Gothic"/>
-              </a:rPr>
-              <a:t>診断のアップデート</a:t>
-            </a:r>
-          </a:p>
-        </p:txBody>
-      </p:sp>
-      <p:sp>
-        <p:nvSpPr>
-          <p:cNvPr id="6" name="TextBox 5"/>
+              <a:rPr sz="1050" b="0">
+                <a:solidFill>
+                  <a:srgbClr val="555555"/>
+                </a:solidFill>
+                <a:latin typeface="Yu Gothic"/>
+                <a:ea typeface="Yu Gothic"/>
+              </a:rPr>
+              <a:t>出典：Krijgsman D, … van der Pol WL. Neurol Neuroimmunol Neuroinflamm 2026;13(1):e200482</a:t>
+            </a:r>
+          </a:p>
+        </p:txBody>
+      </p:sp>
+      <p:sp>
+        <p:nvSpPr>
+          <p:cNvPr id="8" name="TextBox 7"/>
           <p:cNvSpPr txBox="1"/>
           <p:nvPr/>
         </p:nvSpPr>
         <p:spPr>
           <a:xfrm>
-            <a:off x="868680" y="4023360"/>
-            <a:ext cx="10515600" cy="914400"/>
+            <a:off x="11430000" y="109728"/>
+            <a:ext cx="640080" cy="274320"/>
           </a:xfrm>
           <a:prstGeom prst="rect">
             <a:avLst/>
@@ -14102,7 +18224,7 @@
           </a:bodyPr>
           <a:lstStyle/>
           <a:p>
-            <a:pPr algn="l">
+            <a:pPr algn="r">
               <a:spcBef>
                 <a:spcPts val="0"/>
               </a:spcBef>
@@ -14111,14 +18233,14 @@
               </a:spcAft>
             </a:pPr>
             <a:r>
-              <a:rPr sz="1800" b="0">
+              <a:rPr sz="1200" b="1">
                 <a:solidFill>
                   <a:srgbClr val="BBD3EA"/>
                 </a:solidFill>
                 <a:latin typeface="Yu Gothic"/>
                 <a:ea typeface="Yu Gothic"/>
               </a:rPr>
-              <a:t>診断基準の再検討と EAN/PNS 新ガイドライン</a:t>
+              <a:t>1</a:t>
             </a:r>
           </a:p>
         </p:txBody>
